--- a/source/_assets/Blog動畫.pptx
+++ b/source/_assets/Blog動畫.pptx
@@ -5,10 +5,10 @@
     <p:sldMasterId id="2147483752" r:id="rId4"/>
   </p:sldMasterIdLst>
   <p:notesMasterIdLst>
-    <p:notesMasterId r:id="rId32"/>
+    <p:notesMasterId r:id="rId33"/>
   </p:notesMasterIdLst>
   <p:handoutMasterIdLst>
-    <p:handoutMasterId r:id="rId33"/>
+    <p:handoutMasterId r:id="rId34"/>
   </p:handoutMasterIdLst>
   <p:sldIdLst>
     <p:sldId id="315" r:id="rId5"/>
@@ -38,6 +38,7 @@
     <p:sldId id="339" r:id="rId29"/>
     <p:sldId id="341" r:id="rId30"/>
     <p:sldId id="342" r:id="rId31"/>
+    <p:sldId id="343" r:id="rId32"/>
   </p:sldIdLst>
   <p:sldSz cx="12192000" cy="6858000"/>
   <p:notesSz cx="7099300" cy="10234613"/>
@@ -252,7 +253,7 @@
             <a:fld id="{3CDD3A71-4C75-488C-A8F3-A1F163ED0DB9}" type="datetimeFigureOut">
               <a:rPr lang="en-US" smtClean="0"/>
               <a:pPr/>
-              <a:t>7/29/2019</a:t>
+              <a:t>7/31/2019</a:t>
             </a:fld>
             <a:endParaRPr lang="en-US" dirty="0"/>
           </a:p>
@@ -420,7 +421,7 @@
             <a:fld id="{523CC419-8FB3-4D1C-8127-E63C1A13459D}" type="datetimeFigureOut">
               <a:rPr lang="en-US" smtClean="0"/>
               <a:pPr/>
-              <a:t>7/29/2019</a:t>
+              <a:t>7/31/2019</a:t>
             </a:fld>
             <a:endParaRPr lang="en-US" dirty="0"/>
           </a:p>
@@ -822,7 +823,7 @@
           <a:p>
             <a:fld id="{237FF733-248C-4CF7-A090-89CF012E357B}" type="datetimeFigureOut">
               <a:rPr lang="zh-TW" altLang="en-US" smtClean="0"/>
-              <a:t>2019/7/29</a:t>
+              <a:t>2019/7/31</a:t>
             </a:fld>
             <a:endParaRPr lang="zh-TW" altLang="en-US"/>
           </a:p>
@@ -993,7 +994,7 @@
           <a:p>
             <a:fld id="{237FF733-248C-4CF7-A090-89CF012E357B}" type="datetimeFigureOut">
               <a:rPr lang="zh-TW" altLang="en-US" smtClean="0"/>
-              <a:t>2019/7/29</a:t>
+              <a:t>2019/7/31</a:t>
             </a:fld>
             <a:endParaRPr lang="zh-TW" altLang="en-US"/>
           </a:p>
@@ -1174,7 +1175,7 @@
           <a:p>
             <a:fld id="{237FF733-248C-4CF7-A090-89CF012E357B}" type="datetimeFigureOut">
               <a:rPr lang="zh-TW" altLang="en-US" smtClean="0"/>
-              <a:t>2019/7/29</a:t>
+              <a:t>2019/7/31</a:t>
             </a:fld>
             <a:endParaRPr lang="zh-TW" altLang="en-US"/>
           </a:p>
@@ -1345,7 +1346,7 @@
           <a:p>
             <a:fld id="{237FF733-248C-4CF7-A090-89CF012E357B}" type="datetimeFigureOut">
               <a:rPr lang="zh-TW" altLang="en-US" smtClean="0"/>
-              <a:t>2019/7/29</a:t>
+              <a:t>2019/7/31</a:t>
             </a:fld>
             <a:endParaRPr lang="zh-TW" altLang="en-US"/>
           </a:p>
@@ -1592,7 +1593,7 @@
           <a:p>
             <a:fld id="{237FF733-248C-4CF7-A090-89CF012E357B}" type="datetimeFigureOut">
               <a:rPr lang="zh-TW" altLang="en-US" smtClean="0"/>
-              <a:t>2019/7/29</a:t>
+              <a:t>2019/7/31</a:t>
             </a:fld>
             <a:endParaRPr lang="zh-TW" altLang="en-US"/>
           </a:p>
@@ -1825,7 +1826,7 @@
           <a:p>
             <a:fld id="{237FF733-248C-4CF7-A090-89CF012E357B}" type="datetimeFigureOut">
               <a:rPr lang="zh-TW" altLang="en-US" smtClean="0"/>
-              <a:t>2019/7/29</a:t>
+              <a:t>2019/7/31</a:t>
             </a:fld>
             <a:endParaRPr lang="zh-TW" altLang="en-US"/>
           </a:p>
@@ -2193,7 +2194,7 @@
           <a:p>
             <a:fld id="{237FF733-248C-4CF7-A090-89CF012E357B}" type="datetimeFigureOut">
               <a:rPr lang="zh-TW" altLang="en-US" smtClean="0"/>
-              <a:t>2019/7/29</a:t>
+              <a:t>2019/7/31</a:t>
             </a:fld>
             <a:endParaRPr lang="zh-TW" altLang="en-US"/>
           </a:p>
@@ -2312,7 +2313,7 @@
           <a:p>
             <a:fld id="{237FF733-248C-4CF7-A090-89CF012E357B}" type="datetimeFigureOut">
               <a:rPr lang="zh-TW" altLang="en-US" smtClean="0"/>
-              <a:t>2019/7/29</a:t>
+              <a:t>2019/7/31</a:t>
             </a:fld>
             <a:endParaRPr lang="zh-TW" altLang="en-US"/>
           </a:p>
@@ -2408,7 +2409,7 @@
           <a:p>
             <a:fld id="{237FF733-248C-4CF7-A090-89CF012E357B}" type="datetimeFigureOut">
               <a:rPr lang="zh-TW" altLang="en-US" smtClean="0"/>
-              <a:t>2019/7/29</a:t>
+              <a:t>2019/7/31</a:t>
             </a:fld>
             <a:endParaRPr lang="zh-TW" altLang="en-US"/>
           </a:p>
@@ -2686,7 +2687,7 @@
           <a:p>
             <a:fld id="{237FF733-248C-4CF7-A090-89CF012E357B}" type="datetimeFigureOut">
               <a:rPr lang="zh-TW" altLang="en-US" smtClean="0"/>
-              <a:t>2019/7/29</a:t>
+              <a:t>2019/7/31</a:t>
             </a:fld>
             <a:endParaRPr lang="zh-TW" altLang="en-US"/>
           </a:p>
@@ -2944,7 +2945,7 @@
           <a:p>
             <a:fld id="{237FF733-248C-4CF7-A090-89CF012E357B}" type="datetimeFigureOut">
               <a:rPr lang="zh-TW" altLang="en-US" smtClean="0"/>
-              <a:t>2019/7/29</a:t>
+              <a:t>2019/7/31</a:t>
             </a:fld>
             <a:endParaRPr lang="zh-TW" altLang="en-US"/>
           </a:p>
@@ -3158,7 +3159,7 @@
           <a:p>
             <a:fld id="{237FF733-248C-4CF7-A090-89CF012E357B}" type="datetimeFigureOut">
               <a:rPr lang="zh-TW" altLang="en-US" smtClean="0"/>
-              <a:t>2019/7/29</a:t>
+              <a:t>2019/7/31</a:t>
             </a:fld>
             <a:endParaRPr lang="zh-TW" altLang="en-US"/>
           </a:p>
@@ -27676,6 +27677,661 @@
 </p:sld>
 </file>
 
+<file path=ppt/slides/slide28.xml><?xml version="1.0" encoding="utf-8"?>
+<p:sld xmlns:a="http://schemas.openxmlformats.org/drawingml/2006/main" xmlns:r="http://schemas.openxmlformats.org/officeDocument/2006/relationships" xmlns:p="http://schemas.openxmlformats.org/presentationml/2006/main">
+  <p:cSld>
+    <p:spTree>
+      <p:nvGrpSpPr>
+        <p:cNvPr id="1" name=""/>
+        <p:cNvGrpSpPr/>
+        <p:nvPr/>
+      </p:nvGrpSpPr>
+      <p:grpSpPr>
+        <a:xfrm>
+          <a:off x="0" y="0"/>
+          <a:ext cx="0" cy="0"/>
+          <a:chOff x="0" y="0"/>
+          <a:chExt cx="0" cy="0"/>
+        </a:xfrm>
+      </p:grpSpPr>
+      <p:sp>
+        <p:nvSpPr>
+          <p:cNvPr id="23" name="矩形 22">
+            <a:extLst>
+              <a:ext uri="{FF2B5EF4-FFF2-40B4-BE49-F238E27FC236}">
+                <a16:creationId xmlns:a16="http://schemas.microsoft.com/office/drawing/2014/main" id="{4956DB15-5149-4A54-BDC8-532263F95A5D}"/>
+              </a:ext>
+            </a:extLst>
+          </p:cNvPr>
+          <p:cNvSpPr/>
+          <p:nvPr/>
+        </p:nvSpPr>
+        <p:spPr>
+          <a:xfrm>
+            <a:off x="4236830" y="2438400"/>
+            <a:ext cx="396970" cy="2367962"/>
+          </a:xfrm>
+          <a:prstGeom prst="rect">
+            <a:avLst/>
+          </a:prstGeom>
+        </p:spPr>
+        <p:style>
+          <a:lnRef idx="0">
+            <a:schemeClr val="accent2"/>
+          </a:lnRef>
+          <a:fillRef idx="3">
+            <a:schemeClr val="accent2"/>
+          </a:fillRef>
+          <a:effectRef idx="3">
+            <a:schemeClr val="accent2"/>
+          </a:effectRef>
+          <a:fontRef idx="minor">
+            <a:schemeClr val="lt1"/>
+          </a:fontRef>
+        </p:style>
+        <p:txBody>
+          <a:bodyPr vert="eaVert" rtlCol="0" anchor="ctr"/>
+          <a:lstStyle/>
+          <a:p>
+            <a:pPr algn="ctr"/>
+            <a:r>
+              <a:rPr lang="en-US" altLang="zh-TW" sz="1600" dirty="0"/>
+              <a:t>Nginx</a:t>
+            </a:r>
+          </a:p>
+        </p:txBody>
+      </p:sp>
+      <p:pic>
+        <p:nvPicPr>
+          <p:cNvPr id="24" name="圖片 23">
+            <a:extLst>
+              <a:ext uri="{FF2B5EF4-FFF2-40B4-BE49-F238E27FC236}">
+                <a16:creationId xmlns:a16="http://schemas.microsoft.com/office/drawing/2014/main" id="{D6D58BA3-531F-45A2-9591-80CC8BB2EB6E}"/>
+              </a:ext>
+            </a:extLst>
+          </p:cNvPr>
+          <p:cNvPicPr>
+            <a:picLocks noChangeAspect="1"/>
+          </p:cNvPicPr>
+          <p:nvPr/>
+        </p:nvPicPr>
+        <p:blipFill>
+          <a:blip r:embed="rId2">
+            <a:extLst>
+              <a:ext uri="{28A0092B-C50C-407E-A947-70E740481C1C}">
+                <a14:useLocalDpi xmlns:a14="http://schemas.microsoft.com/office/drawing/2010/main" val="0"/>
+              </a:ext>
+            </a:extLst>
+          </a:blip>
+          <a:stretch>
+            <a:fillRect/>
+          </a:stretch>
+        </p:blipFill>
+        <p:spPr>
+          <a:xfrm>
+            <a:off x="2819262" y="3262381"/>
+            <a:ext cx="720000" cy="720000"/>
+          </a:xfrm>
+          <a:prstGeom prst="rect">
+            <a:avLst/>
+          </a:prstGeom>
+        </p:spPr>
+      </p:pic>
+      <p:sp>
+        <p:nvSpPr>
+          <p:cNvPr id="25" name="文字方塊 24">
+            <a:extLst>
+              <a:ext uri="{FF2B5EF4-FFF2-40B4-BE49-F238E27FC236}">
+                <a16:creationId xmlns:a16="http://schemas.microsoft.com/office/drawing/2014/main" id="{4516CEFD-A8BA-4FB9-9CC7-A0E3C6520ACE}"/>
+              </a:ext>
+            </a:extLst>
+          </p:cNvPr>
+          <p:cNvSpPr txBox="1"/>
+          <p:nvPr/>
+        </p:nvSpPr>
+        <p:spPr>
+          <a:xfrm>
+            <a:off x="2706728" y="3758823"/>
+            <a:ext cx="945067" cy="369332"/>
+          </a:xfrm>
+          <a:prstGeom prst="rect">
+            <a:avLst/>
+          </a:prstGeom>
+          <a:noFill/>
+        </p:spPr>
+        <p:txBody>
+          <a:bodyPr wrap="none" rtlCol="0">
+            <a:spAutoFit/>
+          </a:bodyPr>
+          <a:lstStyle/>
+          <a:p>
+            <a:r>
+              <a:rPr lang="en-US" altLang="zh-TW" dirty="0"/>
+              <a:t>Internet</a:t>
+            </a:r>
+          </a:p>
+        </p:txBody>
+      </p:sp>
+      <p:sp>
+        <p:nvSpPr>
+          <p:cNvPr id="26" name="圓角矩形 40">
+            <a:extLst>
+              <a:ext uri="{FF2B5EF4-FFF2-40B4-BE49-F238E27FC236}">
+                <a16:creationId xmlns:a16="http://schemas.microsoft.com/office/drawing/2014/main" id="{7801243B-628D-4C87-B00E-DFA32F839653}"/>
+              </a:ext>
+            </a:extLst>
+          </p:cNvPr>
+          <p:cNvSpPr/>
+          <p:nvPr/>
+        </p:nvSpPr>
+        <p:spPr>
+          <a:xfrm>
+            <a:off x="4029781" y="2430633"/>
+            <a:ext cx="76074" cy="2375729"/>
+          </a:xfrm>
+          <a:prstGeom prst="roundRect">
+            <a:avLst/>
+          </a:prstGeom>
+        </p:spPr>
+        <p:style>
+          <a:lnRef idx="0">
+            <a:schemeClr val="accent5"/>
+          </a:lnRef>
+          <a:fillRef idx="3">
+            <a:schemeClr val="accent5"/>
+          </a:fillRef>
+          <a:effectRef idx="3">
+            <a:schemeClr val="accent5"/>
+          </a:effectRef>
+          <a:fontRef idx="minor">
+            <a:schemeClr val="lt1"/>
+          </a:fontRef>
+        </p:style>
+        <p:txBody>
+          <a:bodyPr rtlCol="0" anchor="ctr"/>
+          <a:lstStyle/>
+          <a:p>
+            <a:pPr algn="ctr"/>
+            <a:endParaRPr lang="zh-TW" altLang="en-US">
+              <a:ea typeface="微軟正黑體" panose="020B0604030504040204" pitchFamily="34" charset="-120"/>
+            </a:endParaRPr>
+          </a:p>
+        </p:txBody>
+      </p:sp>
+      <p:sp>
+        <p:nvSpPr>
+          <p:cNvPr id="27" name="矩形 26">
+            <a:extLst>
+              <a:ext uri="{FF2B5EF4-FFF2-40B4-BE49-F238E27FC236}">
+                <a16:creationId xmlns:a16="http://schemas.microsoft.com/office/drawing/2014/main" id="{656BE05F-B79B-45B3-AEE9-74A7411F4D37}"/>
+              </a:ext>
+            </a:extLst>
+          </p:cNvPr>
+          <p:cNvSpPr/>
+          <p:nvPr/>
+        </p:nvSpPr>
+        <p:spPr>
+          <a:xfrm>
+            <a:off x="4959120" y="2438400"/>
+            <a:ext cx="2372772" cy="2383563"/>
+          </a:xfrm>
+          <a:prstGeom prst="rect">
+            <a:avLst/>
+          </a:prstGeom>
+        </p:spPr>
+        <p:style>
+          <a:lnRef idx="0">
+            <a:schemeClr val="accent1"/>
+          </a:lnRef>
+          <a:fillRef idx="3">
+            <a:schemeClr val="accent1"/>
+          </a:fillRef>
+          <a:effectRef idx="3">
+            <a:schemeClr val="accent1"/>
+          </a:effectRef>
+          <a:fontRef idx="minor">
+            <a:schemeClr val="lt1"/>
+          </a:fontRef>
+        </p:style>
+        <p:txBody>
+          <a:bodyPr rtlCol="0" anchor="ctr"/>
+          <a:lstStyle/>
+          <a:p>
+            <a:pPr algn="ctr"/>
+            <a:endParaRPr lang="zh-TW" altLang="en-US" dirty="0"/>
+          </a:p>
+        </p:txBody>
+      </p:sp>
+      <p:sp>
+        <p:nvSpPr>
+          <p:cNvPr id="28" name="文字方塊 27">
+            <a:extLst>
+              <a:ext uri="{FF2B5EF4-FFF2-40B4-BE49-F238E27FC236}">
+                <a16:creationId xmlns:a16="http://schemas.microsoft.com/office/drawing/2014/main" id="{4F72A36E-5330-4208-9EF9-121A0F541671}"/>
+              </a:ext>
+            </a:extLst>
+          </p:cNvPr>
+          <p:cNvSpPr txBox="1"/>
+          <p:nvPr/>
+        </p:nvSpPr>
+        <p:spPr>
+          <a:xfrm>
+            <a:off x="5003430" y="2446235"/>
+            <a:ext cx="2284151" cy="338554"/>
+          </a:xfrm>
+          <a:prstGeom prst="rect">
+            <a:avLst/>
+          </a:prstGeom>
+          <a:noFill/>
+        </p:spPr>
+        <p:txBody>
+          <a:bodyPr wrap="none" rtlCol="0">
+            <a:spAutoFit/>
+          </a:bodyPr>
+          <a:lstStyle/>
+          <a:p>
+            <a:r>
+              <a:rPr lang="en-US" altLang="zh-TW" sz="1600" dirty="0">
+                <a:solidFill>
+                  <a:schemeClr val="bg1"/>
+                </a:solidFill>
+              </a:rPr>
+              <a:t>ASP.NET Core Application</a:t>
+            </a:r>
+          </a:p>
+        </p:txBody>
+      </p:sp>
+      <p:sp>
+        <p:nvSpPr>
+          <p:cNvPr id="29" name="矩形 28">
+            <a:extLst>
+              <a:ext uri="{FF2B5EF4-FFF2-40B4-BE49-F238E27FC236}">
+                <a16:creationId xmlns:a16="http://schemas.microsoft.com/office/drawing/2014/main" id="{F88D7EDB-DD9B-4777-BF49-A173221BED6E}"/>
+              </a:ext>
+            </a:extLst>
+          </p:cNvPr>
+          <p:cNvSpPr/>
+          <p:nvPr/>
+        </p:nvSpPr>
+        <p:spPr>
+          <a:xfrm>
+            <a:off x="5154114" y="2798447"/>
+            <a:ext cx="1981200" cy="720000"/>
+          </a:xfrm>
+          <a:prstGeom prst="rect">
+            <a:avLst/>
+          </a:prstGeom>
+        </p:spPr>
+        <p:style>
+          <a:lnRef idx="0">
+            <a:schemeClr val="accent4"/>
+          </a:lnRef>
+          <a:fillRef idx="3">
+            <a:schemeClr val="accent4"/>
+          </a:fillRef>
+          <a:effectRef idx="3">
+            <a:schemeClr val="accent4"/>
+          </a:effectRef>
+          <a:fontRef idx="minor">
+            <a:schemeClr val="lt1"/>
+          </a:fontRef>
+        </p:style>
+        <p:txBody>
+          <a:bodyPr rtlCol="0" anchor="ctr"/>
+          <a:lstStyle/>
+          <a:p>
+            <a:pPr algn="ctr"/>
+            <a:r>
+              <a:rPr lang="en-US" altLang="zh-TW" sz="1600" dirty="0"/>
+              <a:t>Kestrel Web Server</a:t>
+            </a:r>
+          </a:p>
+          <a:p>
+            <a:pPr algn="ctr"/>
+            <a:r>
+              <a:rPr lang="en-US" altLang="zh-TW" sz="1600" dirty="0"/>
+              <a:t>Port: 5000</a:t>
+            </a:r>
+            <a:endParaRPr lang="zh-TW" altLang="en-US" sz="1600" dirty="0"/>
+          </a:p>
+        </p:txBody>
+      </p:sp>
+      <p:sp>
+        <p:nvSpPr>
+          <p:cNvPr id="30" name="矩形 29">
+            <a:extLst>
+              <a:ext uri="{FF2B5EF4-FFF2-40B4-BE49-F238E27FC236}">
+                <a16:creationId xmlns:a16="http://schemas.microsoft.com/office/drawing/2014/main" id="{577B7550-C8CD-4956-B078-DB8088BE6AF4}"/>
+              </a:ext>
+            </a:extLst>
+          </p:cNvPr>
+          <p:cNvSpPr/>
+          <p:nvPr/>
+        </p:nvSpPr>
+        <p:spPr>
+          <a:xfrm>
+            <a:off x="5154114" y="3947372"/>
+            <a:ext cx="1981200" cy="720000"/>
+          </a:xfrm>
+          <a:prstGeom prst="rect">
+            <a:avLst/>
+          </a:prstGeom>
+        </p:spPr>
+        <p:style>
+          <a:lnRef idx="0">
+            <a:schemeClr val="accent6"/>
+          </a:lnRef>
+          <a:fillRef idx="3">
+            <a:schemeClr val="accent6"/>
+          </a:fillRef>
+          <a:effectRef idx="3">
+            <a:schemeClr val="accent6"/>
+          </a:effectRef>
+          <a:fontRef idx="minor">
+            <a:schemeClr val="lt1"/>
+          </a:fontRef>
+        </p:style>
+        <p:txBody>
+          <a:bodyPr rtlCol="0" anchor="ctr"/>
+          <a:lstStyle/>
+          <a:p>
+            <a:pPr algn="ctr"/>
+            <a:r>
+              <a:rPr lang="en-US" altLang="zh-TW" sz="1600" dirty="0"/>
+              <a:t>Application Code</a:t>
+            </a:r>
+          </a:p>
+          <a:p>
+            <a:pPr algn="ctr"/>
+            <a:r>
+              <a:rPr lang="en-US" altLang="zh-TW" sz="1600" dirty="0"/>
+              <a:t>(</a:t>
+            </a:r>
+            <a:r>
+              <a:rPr lang="en-US" altLang="zh-TW" sz="1600" dirty="0" err="1"/>
+              <a:t>Startup.cs</a:t>
+            </a:r>
+            <a:r>
+              <a:rPr lang="en-US" altLang="zh-TW" sz="1600" dirty="0"/>
+              <a:t> , …)</a:t>
+            </a:r>
+            <a:endParaRPr lang="zh-TW" altLang="en-US" sz="1600" dirty="0"/>
+          </a:p>
+        </p:txBody>
+      </p:sp>
+      <p:cxnSp>
+        <p:nvCxnSpPr>
+          <p:cNvPr id="31" name="肘形接點 45">
+            <a:extLst>
+              <a:ext uri="{FF2B5EF4-FFF2-40B4-BE49-F238E27FC236}">
+                <a16:creationId xmlns:a16="http://schemas.microsoft.com/office/drawing/2014/main" id="{8EE901C1-2B1D-463C-9E43-B70577DEEC37}"/>
+              </a:ext>
+            </a:extLst>
+          </p:cNvPr>
+          <p:cNvCxnSpPr>
+            <a:cxnSpLocks/>
+            <a:stCxn id="23" idx="3"/>
+            <a:endCxn id="29" idx="1"/>
+          </p:cNvCxnSpPr>
+          <p:nvPr/>
+        </p:nvCxnSpPr>
+        <p:spPr>
+          <a:xfrm flipV="1">
+            <a:off x="4633800" y="3158447"/>
+            <a:ext cx="520314" cy="463934"/>
+          </a:xfrm>
+          <a:prstGeom prst="bentConnector3">
+            <a:avLst>
+              <a:gd name="adj1" fmla="val 50000"/>
+            </a:avLst>
+          </a:prstGeom>
+          <a:ln w="38100">
+            <a:solidFill>
+              <a:schemeClr val="tx1"/>
+            </a:solidFill>
+            <a:headEnd type="triangle" w="med" len="med"/>
+            <a:tailEnd type="triangle" w="med" len="med"/>
+          </a:ln>
+        </p:spPr>
+        <p:style>
+          <a:lnRef idx="1">
+            <a:schemeClr val="accent1"/>
+          </a:lnRef>
+          <a:fillRef idx="0">
+            <a:schemeClr val="accent1"/>
+          </a:fillRef>
+          <a:effectRef idx="0">
+            <a:schemeClr val="accent1"/>
+          </a:effectRef>
+          <a:fontRef idx="minor">
+            <a:schemeClr val="tx1"/>
+          </a:fontRef>
+        </p:style>
+      </p:cxnSp>
+      <p:sp>
+        <p:nvSpPr>
+          <p:cNvPr id="32" name="文字方塊 31">
+            <a:extLst>
+              <a:ext uri="{FF2B5EF4-FFF2-40B4-BE49-F238E27FC236}">
+                <a16:creationId xmlns:a16="http://schemas.microsoft.com/office/drawing/2014/main" id="{1D8BCFEC-9D15-4932-BA58-6E8DA088384D}"/>
+              </a:ext>
+            </a:extLst>
+          </p:cNvPr>
+          <p:cNvSpPr txBox="1"/>
+          <p:nvPr/>
+        </p:nvSpPr>
+        <p:spPr>
+          <a:xfrm>
+            <a:off x="4583808" y="2825032"/>
+            <a:ext cx="620298" cy="338554"/>
+          </a:xfrm>
+          <a:prstGeom prst="rect">
+            <a:avLst/>
+          </a:prstGeom>
+          <a:noFill/>
+        </p:spPr>
+        <p:txBody>
+          <a:bodyPr wrap="none" rtlCol="0">
+            <a:spAutoFit/>
+          </a:bodyPr>
+          <a:lstStyle/>
+          <a:p>
+            <a:r>
+              <a:rPr lang="en-US" altLang="zh-TW" sz="1600" dirty="0"/>
+              <a:t>HTTP</a:t>
+            </a:r>
+          </a:p>
+        </p:txBody>
+      </p:sp>
+      <p:cxnSp>
+        <p:nvCxnSpPr>
+          <p:cNvPr id="33" name="直線接點 32">
+            <a:extLst>
+              <a:ext uri="{FF2B5EF4-FFF2-40B4-BE49-F238E27FC236}">
+                <a16:creationId xmlns:a16="http://schemas.microsoft.com/office/drawing/2014/main" id="{CF395E83-BEC8-4796-ACD6-3914F4042C1D}"/>
+              </a:ext>
+            </a:extLst>
+          </p:cNvPr>
+          <p:cNvCxnSpPr>
+            <a:stCxn id="29" idx="2"/>
+            <a:endCxn id="30" idx="0"/>
+          </p:cNvCxnSpPr>
+          <p:nvPr/>
+        </p:nvCxnSpPr>
+        <p:spPr>
+          <a:xfrm>
+            <a:off x="6144714" y="3518447"/>
+            <a:ext cx="0" cy="428925"/>
+          </a:xfrm>
+          <a:prstGeom prst="line">
+            <a:avLst/>
+          </a:prstGeom>
+          <a:ln w="38100">
+            <a:solidFill>
+              <a:schemeClr val="tx1"/>
+            </a:solidFill>
+            <a:headEnd type="triangle" w="med" len="med"/>
+            <a:tailEnd type="triangle" w="med" len="med"/>
+          </a:ln>
+        </p:spPr>
+        <p:style>
+          <a:lnRef idx="1">
+            <a:schemeClr val="accent1"/>
+          </a:lnRef>
+          <a:fillRef idx="0">
+            <a:schemeClr val="accent1"/>
+          </a:fillRef>
+          <a:effectRef idx="0">
+            <a:schemeClr val="accent1"/>
+          </a:effectRef>
+          <a:fontRef idx="minor">
+            <a:schemeClr val="tx1"/>
+          </a:fontRef>
+        </p:style>
+      </p:cxnSp>
+      <p:sp>
+        <p:nvSpPr>
+          <p:cNvPr id="34" name="文字方塊 33">
+            <a:extLst>
+              <a:ext uri="{FF2B5EF4-FFF2-40B4-BE49-F238E27FC236}">
+                <a16:creationId xmlns:a16="http://schemas.microsoft.com/office/drawing/2014/main" id="{0C2B6715-8270-449A-B33E-D41122765CB4}"/>
+              </a:ext>
+            </a:extLst>
+          </p:cNvPr>
+          <p:cNvSpPr txBox="1"/>
+          <p:nvPr/>
+        </p:nvSpPr>
+        <p:spPr>
+          <a:xfrm>
+            <a:off x="6129190" y="3563213"/>
+            <a:ext cx="1202702" cy="338554"/>
+          </a:xfrm>
+          <a:prstGeom prst="rect">
+            <a:avLst/>
+          </a:prstGeom>
+          <a:noFill/>
+        </p:spPr>
+        <p:txBody>
+          <a:bodyPr wrap="none" rtlCol="0">
+            <a:spAutoFit/>
+          </a:bodyPr>
+          <a:lstStyle/>
+          <a:p>
+            <a:r>
+              <a:rPr lang="en-US" altLang="zh-TW" sz="1600" dirty="0" err="1"/>
+              <a:t>HttpContext</a:t>
+            </a:r>
+            <a:endParaRPr lang="en-US" altLang="zh-TW" sz="1600" dirty="0"/>
+          </a:p>
+        </p:txBody>
+      </p:sp>
+      <p:cxnSp>
+        <p:nvCxnSpPr>
+          <p:cNvPr id="35" name="直線接點 34">
+            <a:extLst>
+              <a:ext uri="{FF2B5EF4-FFF2-40B4-BE49-F238E27FC236}">
+                <a16:creationId xmlns:a16="http://schemas.microsoft.com/office/drawing/2014/main" id="{DAB58FCB-5BDE-4E30-AAD7-871F2620678F}"/>
+              </a:ext>
+            </a:extLst>
+          </p:cNvPr>
+          <p:cNvCxnSpPr>
+            <a:cxnSpLocks/>
+            <a:stCxn id="24" idx="3"/>
+            <a:endCxn id="23" idx="1"/>
+          </p:cNvCxnSpPr>
+          <p:nvPr/>
+        </p:nvCxnSpPr>
+        <p:spPr>
+          <a:xfrm>
+            <a:off x="3539262" y="3622381"/>
+            <a:ext cx="697568" cy="0"/>
+          </a:xfrm>
+          <a:prstGeom prst="line">
+            <a:avLst/>
+          </a:prstGeom>
+          <a:ln w="38100">
+            <a:solidFill>
+              <a:schemeClr val="tx1"/>
+            </a:solidFill>
+            <a:headEnd type="triangle" w="med" len="med"/>
+            <a:tailEnd type="triangle" w="med" len="med"/>
+          </a:ln>
+        </p:spPr>
+        <p:style>
+          <a:lnRef idx="1">
+            <a:schemeClr val="accent1"/>
+          </a:lnRef>
+          <a:fillRef idx="0">
+            <a:schemeClr val="accent1"/>
+          </a:fillRef>
+          <a:effectRef idx="0">
+            <a:schemeClr val="accent1"/>
+          </a:effectRef>
+          <a:fontRef idx="minor">
+            <a:schemeClr val="tx1"/>
+          </a:fontRef>
+        </p:style>
+      </p:cxnSp>
+      <p:sp>
+        <p:nvSpPr>
+          <p:cNvPr id="37" name="文字方塊 36">
+            <a:extLst>
+              <a:ext uri="{FF2B5EF4-FFF2-40B4-BE49-F238E27FC236}">
+                <a16:creationId xmlns:a16="http://schemas.microsoft.com/office/drawing/2014/main" id="{788C9C7D-6994-447C-A129-8177241EE2C1}"/>
+              </a:ext>
+            </a:extLst>
+          </p:cNvPr>
+          <p:cNvSpPr txBox="1"/>
+          <p:nvPr/>
+        </p:nvSpPr>
+        <p:spPr>
+          <a:xfrm>
+            <a:off x="2457716" y="2798873"/>
+            <a:ext cx="1807290" cy="646331"/>
+          </a:xfrm>
+          <a:prstGeom prst="rect">
+            <a:avLst/>
+          </a:prstGeom>
+          <a:noFill/>
+        </p:spPr>
+        <p:txBody>
+          <a:bodyPr wrap="none" rtlCol="0">
+            <a:spAutoFit/>
+          </a:bodyPr>
+          <a:lstStyle/>
+          <a:p>
+            <a:r>
+              <a:rPr lang="en-US" altLang="zh-TW" sz="1200" dirty="0"/>
+              <a:t>http://demo.johnwu.cc</a:t>
+            </a:r>
+          </a:p>
+          <a:p>
+            <a:r>
+              <a:rPr lang="en-US" altLang="zh-TW" sz="1200" dirty="0"/>
+              <a:t>http://example.johnwu.cc</a:t>
+            </a:r>
+          </a:p>
+          <a:p>
+            <a:r>
+              <a:rPr lang="en-US" altLang="zh-TW" sz="1200" dirty="0"/>
+              <a:t>https://demo.johnwu.cc</a:t>
+            </a:r>
+          </a:p>
+        </p:txBody>
+      </p:sp>
+    </p:spTree>
+    <p:extLst>
+      <p:ext uri="{BB962C8B-B14F-4D97-AF65-F5344CB8AC3E}">
+        <p14:creationId xmlns:p14="http://schemas.microsoft.com/office/powerpoint/2010/main" val="3824870588"/>
+      </p:ext>
+    </p:extLst>
+  </p:cSld>
+  <p:clrMapOvr>
+    <a:masterClrMapping/>
+  </p:clrMapOvr>
+</p:sld>
+</file>
+
 <file path=ppt/slides/slide3.xml><?xml version="1.0" encoding="utf-8"?>
 <p:sld xmlns:a="http://schemas.openxmlformats.org/drawingml/2006/main" xmlns:r="http://schemas.openxmlformats.org/officeDocument/2006/relationships" xmlns:p="http://schemas.openxmlformats.org/presentationml/2006/main">
   <p:cSld>

--- a/source/_assets/Blog動畫.pptx
+++ b/source/_assets/Blog動畫.pptx
@@ -5,10 +5,10 @@
     <p:sldMasterId id="2147483752" r:id="rId4"/>
   </p:sldMasterIdLst>
   <p:notesMasterIdLst>
-    <p:notesMasterId r:id="rId33"/>
+    <p:notesMasterId r:id="rId35"/>
   </p:notesMasterIdLst>
   <p:handoutMasterIdLst>
-    <p:handoutMasterId r:id="rId34"/>
+    <p:handoutMasterId r:id="rId36"/>
   </p:handoutMasterIdLst>
   <p:sldIdLst>
     <p:sldId id="315" r:id="rId5"/>
@@ -39,6 +39,8 @@
     <p:sldId id="341" r:id="rId30"/>
     <p:sldId id="342" r:id="rId31"/>
     <p:sldId id="343" r:id="rId32"/>
+    <p:sldId id="345" r:id="rId33"/>
+    <p:sldId id="344" r:id="rId34"/>
   </p:sldIdLst>
   <p:sldSz cx="12192000" cy="6858000"/>
   <p:notesSz cx="7099300" cy="10234613"/>
@@ -253,7 +255,7 @@
             <a:fld id="{3CDD3A71-4C75-488C-A8F3-A1F163ED0DB9}" type="datetimeFigureOut">
               <a:rPr lang="en-US" smtClean="0"/>
               <a:pPr/>
-              <a:t>7/31/2019</a:t>
+              <a:t>8/1/2019</a:t>
             </a:fld>
             <a:endParaRPr lang="en-US" dirty="0"/>
           </a:p>
@@ -421,7 +423,7 @@
             <a:fld id="{523CC419-8FB3-4D1C-8127-E63C1A13459D}" type="datetimeFigureOut">
               <a:rPr lang="en-US" smtClean="0"/>
               <a:pPr/>
-              <a:t>7/31/2019</a:t>
+              <a:t>8/1/2019</a:t>
             </a:fld>
             <a:endParaRPr lang="en-US" dirty="0"/>
           </a:p>
@@ -823,7 +825,7 @@
           <a:p>
             <a:fld id="{237FF733-248C-4CF7-A090-89CF012E357B}" type="datetimeFigureOut">
               <a:rPr lang="zh-TW" altLang="en-US" smtClean="0"/>
-              <a:t>2019/7/31</a:t>
+              <a:t>2019/8/1</a:t>
             </a:fld>
             <a:endParaRPr lang="zh-TW" altLang="en-US"/>
           </a:p>
@@ -994,7 +996,7 @@
           <a:p>
             <a:fld id="{237FF733-248C-4CF7-A090-89CF012E357B}" type="datetimeFigureOut">
               <a:rPr lang="zh-TW" altLang="en-US" smtClean="0"/>
-              <a:t>2019/7/31</a:t>
+              <a:t>2019/8/1</a:t>
             </a:fld>
             <a:endParaRPr lang="zh-TW" altLang="en-US"/>
           </a:p>
@@ -1175,7 +1177,7 @@
           <a:p>
             <a:fld id="{237FF733-248C-4CF7-A090-89CF012E357B}" type="datetimeFigureOut">
               <a:rPr lang="zh-TW" altLang="en-US" smtClean="0"/>
-              <a:t>2019/7/31</a:t>
+              <a:t>2019/8/1</a:t>
             </a:fld>
             <a:endParaRPr lang="zh-TW" altLang="en-US"/>
           </a:p>
@@ -1346,7 +1348,7 @@
           <a:p>
             <a:fld id="{237FF733-248C-4CF7-A090-89CF012E357B}" type="datetimeFigureOut">
               <a:rPr lang="zh-TW" altLang="en-US" smtClean="0"/>
-              <a:t>2019/7/31</a:t>
+              <a:t>2019/8/1</a:t>
             </a:fld>
             <a:endParaRPr lang="zh-TW" altLang="en-US"/>
           </a:p>
@@ -1593,7 +1595,7 @@
           <a:p>
             <a:fld id="{237FF733-248C-4CF7-A090-89CF012E357B}" type="datetimeFigureOut">
               <a:rPr lang="zh-TW" altLang="en-US" smtClean="0"/>
-              <a:t>2019/7/31</a:t>
+              <a:t>2019/8/1</a:t>
             </a:fld>
             <a:endParaRPr lang="zh-TW" altLang="en-US"/>
           </a:p>
@@ -1826,7 +1828,7 @@
           <a:p>
             <a:fld id="{237FF733-248C-4CF7-A090-89CF012E357B}" type="datetimeFigureOut">
               <a:rPr lang="zh-TW" altLang="en-US" smtClean="0"/>
-              <a:t>2019/7/31</a:t>
+              <a:t>2019/8/1</a:t>
             </a:fld>
             <a:endParaRPr lang="zh-TW" altLang="en-US"/>
           </a:p>
@@ -2194,7 +2196,7 @@
           <a:p>
             <a:fld id="{237FF733-248C-4CF7-A090-89CF012E357B}" type="datetimeFigureOut">
               <a:rPr lang="zh-TW" altLang="en-US" smtClean="0"/>
-              <a:t>2019/7/31</a:t>
+              <a:t>2019/8/1</a:t>
             </a:fld>
             <a:endParaRPr lang="zh-TW" altLang="en-US"/>
           </a:p>
@@ -2313,7 +2315,7 @@
           <a:p>
             <a:fld id="{237FF733-248C-4CF7-A090-89CF012E357B}" type="datetimeFigureOut">
               <a:rPr lang="zh-TW" altLang="en-US" smtClean="0"/>
-              <a:t>2019/7/31</a:t>
+              <a:t>2019/8/1</a:t>
             </a:fld>
             <a:endParaRPr lang="zh-TW" altLang="en-US"/>
           </a:p>
@@ -2409,7 +2411,7 @@
           <a:p>
             <a:fld id="{237FF733-248C-4CF7-A090-89CF012E357B}" type="datetimeFigureOut">
               <a:rPr lang="zh-TW" altLang="en-US" smtClean="0"/>
-              <a:t>2019/7/31</a:t>
+              <a:t>2019/8/1</a:t>
             </a:fld>
             <a:endParaRPr lang="zh-TW" altLang="en-US"/>
           </a:p>
@@ -2687,7 +2689,7 @@
           <a:p>
             <a:fld id="{237FF733-248C-4CF7-A090-89CF012E357B}" type="datetimeFigureOut">
               <a:rPr lang="zh-TW" altLang="en-US" smtClean="0"/>
-              <a:t>2019/7/31</a:t>
+              <a:t>2019/8/1</a:t>
             </a:fld>
             <a:endParaRPr lang="zh-TW" altLang="en-US"/>
           </a:p>
@@ -2945,7 +2947,7 @@
           <a:p>
             <a:fld id="{237FF733-248C-4CF7-A090-89CF012E357B}" type="datetimeFigureOut">
               <a:rPr lang="zh-TW" altLang="en-US" smtClean="0"/>
-              <a:t>2019/7/31</a:t>
+              <a:t>2019/8/1</a:t>
             </a:fld>
             <a:endParaRPr lang="zh-TW" altLang="en-US"/>
           </a:p>
@@ -3159,7 +3161,7 @@
           <a:p>
             <a:fld id="{237FF733-248C-4CF7-A090-89CF012E357B}" type="datetimeFigureOut">
               <a:rPr lang="zh-TW" altLang="en-US" smtClean="0"/>
-              <a:t>2019/7/31</a:t>
+              <a:t>2019/8/1</a:t>
             </a:fld>
             <a:endParaRPr lang="zh-TW" altLang="en-US"/>
           </a:p>
@@ -28332,6 +28334,751 @@
 </p:sld>
 </file>
 
+<file path=ppt/slides/slide29.xml><?xml version="1.0" encoding="utf-8"?>
+<p:sld xmlns:a="http://schemas.openxmlformats.org/drawingml/2006/main" xmlns:r="http://schemas.openxmlformats.org/officeDocument/2006/relationships" xmlns:p="http://schemas.openxmlformats.org/presentationml/2006/main">
+  <p:cSld>
+    <p:spTree>
+      <p:nvGrpSpPr>
+        <p:cNvPr id="1" name=""/>
+        <p:cNvGrpSpPr/>
+        <p:nvPr/>
+      </p:nvGrpSpPr>
+      <p:grpSpPr>
+        <a:xfrm>
+          <a:off x="0" y="0"/>
+          <a:ext cx="0" cy="0"/>
+          <a:chOff x="0" y="0"/>
+          <a:chExt cx="0" cy="0"/>
+        </a:xfrm>
+      </p:grpSpPr>
+      <p:grpSp>
+        <p:nvGrpSpPr>
+          <p:cNvPr id="6" name="群組 5">
+            <a:extLst>
+              <a:ext uri="{FF2B5EF4-FFF2-40B4-BE49-F238E27FC236}">
+                <a16:creationId xmlns:a16="http://schemas.microsoft.com/office/drawing/2014/main" id="{8B9E6B5C-3F6A-4D3E-BCDE-4F4235C3931C}"/>
+              </a:ext>
+            </a:extLst>
+          </p:cNvPr>
+          <p:cNvGrpSpPr/>
+          <p:nvPr/>
+        </p:nvGrpSpPr>
+        <p:grpSpPr>
+          <a:xfrm>
+            <a:off x="3764384" y="3387239"/>
+            <a:ext cx="1800000" cy="1440013"/>
+            <a:chOff x="6011310" y="4777991"/>
+            <a:chExt cx="1800000" cy="1440013"/>
+          </a:xfrm>
+        </p:grpSpPr>
+        <p:pic>
+          <p:nvPicPr>
+            <p:cNvPr id="7" name="圖片 6">
+              <a:extLst>
+                <a:ext uri="{FF2B5EF4-FFF2-40B4-BE49-F238E27FC236}">
+                  <a16:creationId xmlns:a16="http://schemas.microsoft.com/office/drawing/2014/main" id="{BAD506DE-25A1-4843-9C00-53C841C7DCD5}"/>
+                </a:ext>
+              </a:extLst>
+            </p:cNvPr>
+            <p:cNvPicPr>
+              <a:picLocks noChangeAspect="1"/>
+            </p:cNvPicPr>
+            <p:nvPr/>
+          </p:nvPicPr>
+          <p:blipFill>
+            <a:blip r:embed="rId2">
+              <a:extLst>
+                <a:ext uri="{28A0092B-C50C-407E-A947-70E740481C1C}">
+                  <a14:useLocalDpi xmlns:a14="http://schemas.microsoft.com/office/drawing/2010/main" val="0"/>
+                </a:ext>
+              </a:extLst>
+            </a:blip>
+            <a:stretch>
+              <a:fillRect/>
+            </a:stretch>
+          </p:blipFill>
+          <p:spPr>
+            <a:xfrm>
+              <a:off x="6367416" y="4777991"/>
+              <a:ext cx="1080000" cy="1080000"/>
+            </a:xfrm>
+            <a:prstGeom prst="rect">
+              <a:avLst/>
+            </a:prstGeom>
+          </p:spPr>
+        </p:pic>
+        <p:sp>
+          <p:nvSpPr>
+            <p:cNvPr id="8" name="矩形 7">
+              <a:extLst>
+                <a:ext uri="{FF2B5EF4-FFF2-40B4-BE49-F238E27FC236}">
+                  <a16:creationId xmlns:a16="http://schemas.microsoft.com/office/drawing/2014/main" id="{A4A94BFF-9C0F-475B-83B2-B42C315C1506}"/>
+                </a:ext>
+              </a:extLst>
+            </p:cNvPr>
+            <p:cNvSpPr/>
+            <p:nvPr/>
+          </p:nvSpPr>
+          <p:spPr>
+            <a:xfrm>
+              <a:off x="6011310" y="5848672"/>
+              <a:ext cx="1800000" cy="369332"/>
+            </a:xfrm>
+            <a:prstGeom prst="rect">
+              <a:avLst/>
+            </a:prstGeom>
+          </p:spPr>
+          <p:txBody>
+            <a:bodyPr wrap="square">
+              <a:spAutoFit/>
+            </a:bodyPr>
+            <a:lstStyle/>
+            <a:p>
+              <a:pPr algn="ctr"/>
+              <a:r>
+                <a:rPr lang="en-US" altLang="zh-TW" b="1" dirty="0"/>
+                <a:t>Cleanroom</a:t>
+              </a:r>
+              <a:endParaRPr lang="zh-TW" altLang="en-US" b="1" dirty="0"/>
+            </a:p>
+          </p:txBody>
+        </p:sp>
+      </p:grpSp>
+      <p:sp>
+        <p:nvSpPr>
+          <p:cNvPr id="10" name="矩形 9">
+            <a:extLst>
+              <a:ext uri="{FF2B5EF4-FFF2-40B4-BE49-F238E27FC236}">
+                <a16:creationId xmlns:a16="http://schemas.microsoft.com/office/drawing/2014/main" id="{F39164C2-74DF-4F21-9E50-51F111156252}"/>
+              </a:ext>
+            </a:extLst>
+          </p:cNvPr>
+          <p:cNvSpPr/>
+          <p:nvPr/>
+        </p:nvSpPr>
+        <p:spPr>
+          <a:xfrm>
+            <a:off x="6857997" y="514284"/>
+            <a:ext cx="2249254" cy="4438716"/>
+          </a:xfrm>
+          <a:prstGeom prst="rect">
+            <a:avLst/>
+          </a:prstGeom>
+          <a:noFill/>
+          <a:ln w="38100">
+            <a:solidFill>
+              <a:schemeClr val="bg1">
+                <a:lumMod val="65000"/>
+              </a:schemeClr>
+            </a:solidFill>
+            <a:prstDash val="lgDash"/>
+          </a:ln>
+        </p:spPr>
+        <p:style>
+          <a:lnRef idx="2">
+            <a:schemeClr val="accent1">
+              <a:shade val="50000"/>
+            </a:schemeClr>
+          </a:lnRef>
+          <a:fillRef idx="1">
+            <a:schemeClr val="accent1"/>
+          </a:fillRef>
+          <a:effectRef idx="0">
+            <a:schemeClr val="accent1"/>
+          </a:effectRef>
+          <a:fontRef idx="minor">
+            <a:schemeClr val="lt1"/>
+          </a:fontRef>
+        </p:style>
+        <p:txBody>
+          <a:bodyPr rot="0" spcFirstLastPara="0" vertOverflow="overflow" horzOverflow="overflow" vert="horz" wrap="square" lIns="91440" tIns="45720" rIns="91440" bIns="45720" numCol="1" spcCol="0" rtlCol="0" fromWordArt="0" anchor="ctr" anchorCtr="0" forceAA="0" compatLnSpc="1">
+            <a:prstTxWarp prst="textNoShape">
+              <a:avLst/>
+            </a:prstTxWarp>
+            <a:noAutofit/>
+          </a:bodyPr>
+          <a:lstStyle/>
+          <a:p>
+            <a:pPr algn="ctr"/>
+            <a:endParaRPr lang="zh-TW" altLang="en-US"/>
+          </a:p>
+        </p:txBody>
+      </p:sp>
+      <p:sp>
+        <p:nvSpPr>
+          <p:cNvPr id="11" name="文字方塊 10">
+            <a:extLst>
+              <a:ext uri="{FF2B5EF4-FFF2-40B4-BE49-F238E27FC236}">
+                <a16:creationId xmlns:a16="http://schemas.microsoft.com/office/drawing/2014/main" id="{AFE94126-A55B-4905-B1C9-98474C234261}"/>
+              </a:ext>
+            </a:extLst>
+          </p:cNvPr>
+          <p:cNvSpPr txBox="1"/>
+          <p:nvPr/>
+        </p:nvSpPr>
+        <p:spPr>
+          <a:xfrm>
+            <a:off x="221515" y="466518"/>
+            <a:ext cx="2249255" cy="646331"/>
+          </a:xfrm>
+          <a:prstGeom prst="rect">
+            <a:avLst/>
+          </a:prstGeom>
+          <a:noFill/>
+        </p:spPr>
+        <p:txBody>
+          <a:bodyPr wrap="square" rtlCol="0">
+            <a:spAutoFit/>
+          </a:bodyPr>
+          <a:lstStyle/>
+          <a:p>
+            <a:pPr algn="ctr"/>
+            <a:r>
+              <a:rPr lang="en-US" altLang="zh-TW" b="1" dirty="0"/>
+              <a:t>Development </a:t>
+            </a:r>
+          </a:p>
+          <a:p>
+            <a:pPr algn="ctr"/>
+            <a:r>
+              <a:rPr lang="en-US" altLang="zh-TW" b="1" dirty="0"/>
+              <a:t>Environment</a:t>
+            </a:r>
+            <a:endParaRPr lang="zh-TW" altLang="en-US" b="1" dirty="0"/>
+          </a:p>
+        </p:txBody>
+      </p:sp>
+      <p:sp>
+        <p:nvSpPr>
+          <p:cNvPr id="12" name="文字方塊 11">
+            <a:extLst>
+              <a:ext uri="{FF2B5EF4-FFF2-40B4-BE49-F238E27FC236}">
+                <a16:creationId xmlns:a16="http://schemas.microsoft.com/office/drawing/2014/main" id="{B83AEB57-88E0-46F2-857B-F345318DD602}"/>
+              </a:ext>
+            </a:extLst>
+          </p:cNvPr>
+          <p:cNvSpPr txBox="1"/>
+          <p:nvPr/>
+        </p:nvSpPr>
+        <p:spPr>
+          <a:xfrm>
+            <a:off x="6857995" y="551978"/>
+            <a:ext cx="2249255" cy="646331"/>
+          </a:xfrm>
+          <a:prstGeom prst="rect">
+            <a:avLst/>
+          </a:prstGeom>
+          <a:noFill/>
+        </p:spPr>
+        <p:txBody>
+          <a:bodyPr wrap="square" rtlCol="0">
+            <a:spAutoFit/>
+          </a:bodyPr>
+          <a:lstStyle/>
+          <a:p>
+            <a:pPr algn="ctr"/>
+            <a:r>
+              <a:rPr lang="en-US" altLang="zh-TW" b="1" dirty="0"/>
+              <a:t>Production </a:t>
+            </a:r>
+          </a:p>
+          <a:p>
+            <a:pPr algn="ctr"/>
+            <a:r>
+              <a:rPr lang="en-US" altLang="zh-TW" b="1" dirty="0"/>
+              <a:t>Environment</a:t>
+            </a:r>
+            <a:endParaRPr lang="zh-TW" altLang="en-US" b="1" dirty="0"/>
+          </a:p>
+        </p:txBody>
+      </p:sp>
+      <p:grpSp>
+        <p:nvGrpSpPr>
+          <p:cNvPr id="13" name="群組 12">
+            <a:extLst>
+              <a:ext uri="{FF2B5EF4-FFF2-40B4-BE49-F238E27FC236}">
+                <a16:creationId xmlns:a16="http://schemas.microsoft.com/office/drawing/2014/main" id="{9CA4C3C4-A330-436A-ADB5-9DCAFD6470B0}"/>
+              </a:ext>
+            </a:extLst>
+          </p:cNvPr>
+          <p:cNvGrpSpPr/>
+          <p:nvPr/>
+        </p:nvGrpSpPr>
+        <p:grpSpPr>
+          <a:xfrm>
+            <a:off x="7082622" y="2089160"/>
+            <a:ext cx="1800000" cy="1482745"/>
+            <a:chOff x="8986974" y="999532"/>
+            <a:chExt cx="1800000" cy="1482745"/>
+          </a:xfrm>
+        </p:grpSpPr>
+        <p:pic>
+          <p:nvPicPr>
+            <p:cNvPr id="14" name="圖片 13">
+              <a:extLst>
+                <a:ext uri="{FF2B5EF4-FFF2-40B4-BE49-F238E27FC236}">
+                  <a16:creationId xmlns:a16="http://schemas.microsoft.com/office/drawing/2014/main" id="{9B87E593-FD20-4D9C-AC02-ADBE5396F791}"/>
+                </a:ext>
+              </a:extLst>
+            </p:cNvPr>
+            <p:cNvPicPr>
+              <a:picLocks noChangeAspect="1"/>
+            </p:cNvPicPr>
+            <p:nvPr/>
+          </p:nvPicPr>
+          <p:blipFill>
+            <a:blip r:embed="rId3">
+              <a:extLst>
+                <a:ext uri="{28A0092B-C50C-407E-A947-70E740481C1C}">
+                  <a14:useLocalDpi xmlns:a14="http://schemas.microsoft.com/office/drawing/2010/main" val="0"/>
+                </a:ext>
+              </a:extLst>
+            </a:blip>
+            <a:stretch>
+              <a:fillRect/>
+            </a:stretch>
+          </p:blipFill>
+          <p:spPr>
+            <a:xfrm>
+              <a:off x="9346974" y="999532"/>
+              <a:ext cx="1080000" cy="1080000"/>
+            </a:xfrm>
+            <a:prstGeom prst="rect">
+              <a:avLst/>
+            </a:prstGeom>
+          </p:spPr>
+        </p:pic>
+        <p:sp>
+          <p:nvSpPr>
+            <p:cNvPr id="15" name="矩形 14">
+              <a:extLst>
+                <a:ext uri="{FF2B5EF4-FFF2-40B4-BE49-F238E27FC236}">
+                  <a16:creationId xmlns:a16="http://schemas.microsoft.com/office/drawing/2014/main" id="{017A64B1-C5F7-4C0D-9175-8CF1774D0403}"/>
+                </a:ext>
+              </a:extLst>
+            </p:cNvPr>
+            <p:cNvSpPr/>
+            <p:nvPr/>
+          </p:nvSpPr>
+          <p:spPr>
+            <a:xfrm>
+              <a:off x="8986974" y="2112945"/>
+              <a:ext cx="1800000" cy="369332"/>
+            </a:xfrm>
+            <a:prstGeom prst="rect">
+              <a:avLst/>
+            </a:prstGeom>
+          </p:spPr>
+          <p:txBody>
+            <a:bodyPr wrap="square">
+              <a:spAutoFit/>
+            </a:bodyPr>
+            <a:lstStyle/>
+            <a:p>
+              <a:pPr algn="ctr"/>
+              <a:r>
+                <a:rPr lang="en-US" altLang="zh-TW" b="1" dirty="0"/>
+                <a:t>Servers</a:t>
+              </a:r>
+              <a:endParaRPr lang="zh-TW" altLang="en-US" b="1" dirty="0"/>
+            </a:p>
+          </p:txBody>
+        </p:sp>
+      </p:grpSp>
+      <p:sp>
+        <p:nvSpPr>
+          <p:cNvPr id="16" name="矩形 15">
+            <a:extLst>
+              <a:ext uri="{FF2B5EF4-FFF2-40B4-BE49-F238E27FC236}">
+                <a16:creationId xmlns:a16="http://schemas.microsoft.com/office/drawing/2014/main" id="{83D3D2D5-A0FE-4303-8FBE-97CBD997C26E}"/>
+              </a:ext>
+            </a:extLst>
+          </p:cNvPr>
+          <p:cNvSpPr/>
+          <p:nvPr/>
+        </p:nvSpPr>
+        <p:spPr>
+          <a:xfrm>
+            <a:off x="221517" y="455520"/>
+            <a:ext cx="2249254" cy="4497480"/>
+          </a:xfrm>
+          <a:prstGeom prst="rect">
+            <a:avLst/>
+          </a:prstGeom>
+          <a:noFill/>
+          <a:ln w="38100">
+            <a:solidFill>
+              <a:schemeClr val="bg1">
+                <a:lumMod val="65000"/>
+              </a:schemeClr>
+            </a:solidFill>
+            <a:prstDash val="lgDash"/>
+          </a:ln>
+        </p:spPr>
+        <p:style>
+          <a:lnRef idx="2">
+            <a:schemeClr val="accent1">
+              <a:shade val="50000"/>
+            </a:schemeClr>
+          </a:lnRef>
+          <a:fillRef idx="1">
+            <a:schemeClr val="accent1"/>
+          </a:fillRef>
+          <a:effectRef idx="0">
+            <a:schemeClr val="accent1"/>
+          </a:effectRef>
+          <a:fontRef idx="minor">
+            <a:schemeClr val="lt1"/>
+          </a:fontRef>
+        </p:style>
+        <p:txBody>
+          <a:bodyPr rot="0" spcFirstLastPara="0" vertOverflow="overflow" horzOverflow="overflow" vert="horz" wrap="square" lIns="91440" tIns="45720" rIns="91440" bIns="45720" numCol="1" spcCol="0" rtlCol="0" fromWordArt="0" anchor="ctr" anchorCtr="0" forceAA="0" compatLnSpc="1">
+            <a:prstTxWarp prst="textNoShape">
+              <a:avLst/>
+            </a:prstTxWarp>
+            <a:noAutofit/>
+          </a:bodyPr>
+          <a:lstStyle/>
+          <a:p>
+            <a:pPr algn="ctr"/>
+            <a:endParaRPr lang="zh-TW" altLang="en-US"/>
+          </a:p>
+        </p:txBody>
+      </p:sp>
+      <p:pic>
+        <p:nvPicPr>
+          <p:cNvPr id="18" name="圖片 17">
+            <a:extLst>
+              <a:ext uri="{FF2B5EF4-FFF2-40B4-BE49-F238E27FC236}">
+                <a16:creationId xmlns:a16="http://schemas.microsoft.com/office/drawing/2014/main" id="{48B78911-732C-4CF0-A44F-CF54A3BB87EB}"/>
+              </a:ext>
+            </a:extLst>
+          </p:cNvPr>
+          <p:cNvPicPr>
+            <a:picLocks noChangeAspect="1"/>
+          </p:cNvPicPr>
+          <p:nvPr/>
+        </p:nvPicPr>
+        <p:blipFill>
+          <a:blip r:embed="rId4">
+            <a:extLst>
+              <a:ext uri="{28A0092B-C50C-407E-A947-70E740481C1C}">
+                <a14:useLocalDpi xmlns:a14="http://schemas.microsoft.com/office/drawing/2010/main" val="0"/>
+              </a:ext>
+            </a:extLst>
+          </a:blip>
+          <a:stretch>
+            <a:fillRect/>
+          </a:stretch>
+        </p:blipFill>
+        <p:spPr>
+          <a:xfrm>
+            <a:off x="806142" y="2089160"/>
+            <a:ext cx="1080000" cy="1080000"/>
+          </a:xfrm>
+          <a:prstGeom prst="rect">
+            <a:avLst/>
+          </a:prstGeom>
+        </p:spPr>
+      </p:pic>
+      <p:pic>
+        <p:nvPicPr>
+          <p:cNvPr id="20" name="圖片 19">
+            <a:extLst>
+              <a:ext uri="{FF2B5EF4-FFF2-40B4-BE49-F238E27FC236}">
+                <a16:creationId xmlns:a16="http://schemas.microsoft.com/office/drawing/2014/main" id="{60168455-394A-444A-AB03-E390431D2349}"/>
+              </a:ext>
+            </a:extLst>
+          </p:cNvPr>
+          <p:cNvPicPr>
+            <a:picLocks noChangeAspect="1"/>
+          </p:cNvPicPr>
+          <p:nvPr/>
+        </p:nvPicPr>
+        <p:blipFill>
+          <a:blip r:embed="rId5">
+            <a:extLst>
+              <a:ext uri="{28A0092B-C50C-407E-A947-70E740481C1C}">
+                <a14:useLocalDpi xmlns:a14="http://schemas.microsoft.com/office/drawing/2010/main" val="0"/>
+              </a:ext>
+            </a:extLst>
+          </a:blip>
+          <a:stretch>
+            <a:fillRect/>
+          </a:stretch>
+        </p:blipFill>
+        <p:spPr>
+          <a:xfrm>
+            <a:off x="4138522" y="658309"/>
+            <a:ext cx="1080000" cy="1080000"/>
+          </a:xfrm>
+          <a:prstGeom prst="rect">
+            <a:avLst/>
+          </a:prstGeom>
+        </p:spPr>
+      </p:pic>
+      <p:sp>
+        <p:nvSpPr>
+          <p:cNvPr id="22" name="矩形 21">
+            <a:extLst>
+              <a:ext uri="{FF2B5EF4-FFF2-40B4-BE49-F238E27FC236}">
+                <a16:creationId xmlns:a16="http://schemas.microsoft.com/office/drawing/2014/main" id="{0B50BD26-39FB-4E86-806F-B0E42E9248CA}"/>
+              </a:ext>
+            </a:extLst>
+          </p:cNvPr>
+          <p:cNvSpPr/>
+          <p:nvPr/>
+        </p:nvSpPr>
+        <p:spPr>
+          <a:xfrm>
+            <a:off x="446142" y="3202573"/>
+            <a:ext cx="1800000" cy="369332"/>
+          </a:xfrm>
+          <a:prstGeom prst="rect">
+            <a:avLst/>
+          </a:prstGeom>
+        </p:spPr>
+        <p:txBody>
+          <a:bodyPr wrap="square">
+            <a:spAutoFit/>
+          </a:bodyPr>
+          <a:lstStyle/>
+          <a:p>
+            <a:pPr algn="ctr"/>
+            <a:r>
+              <a:rPr lang="en-US" altLang="zh-TW" b="1" dirty="0"/>
+              <a:t>Developers</a:t>
+            </a:r>
+            <a:endParaRPr lang="zh-TW" altLang="en-US" b="1" dirty="0"/>
+          </a:p>
+        </p:txBody>
+      </p:sp>
+      <p:sp>
+        <p:nvSpPr>
+          <p:cNvPr id="23" name="矩形 22">
+            <a:extLst>
+              <a:ext uri="{FF2B5EF4-FFF2-40B4-BE49-F238E27FC236}">
+                <a16:creationId xmlns:a16="http://schemas.microsoft.com/office/drawing/2014/main" id="{2A8FD256-560D-40D7-B7DF-43694F563700}"/>
+              </a:ext>
+            </a:extLst>
+          </p:cNvPr>
+          <p:cNvSpPr/>
+          <p:nvPr/>
+        </p:nvSpPr>
+        <p:spPr>
+          <a:xfrm>
+            <a:off x="4122314" y="1725604"/>
+            <a:ext cx="1112416" cy="369332"/>
+          </a:xfrm>
+          <a:prstGeom prst="rect">
+            <a:avLst/>
+          </a:prstGeom>
+        </p:spPr>
+        <p:txBody>
+          <a:bodyPr wrap="square">
+            <a:spAutoFit/>
+          </a:bodyPr>
+          <a:lstStyle/>
+          <a:p>
+            <a:pPr algn="ctr"/>
+            <a:r>
+              <a:rPr lang="en-US" altLang="zh-TW" b="1" dirty="0"/>
+              <a:t>Internet</a:t>
+            </a:r>
+            <a:endParaRPr lang="zh-TW" altLang="en-US" b="1" dirty="0"/>
+          </a:p>
+        </p:txBody>
+      </p:sp>
+      <p:cxnSp>
+        <p:nvCxnSpPr>
+          <p:cNvPr id="26" name="直線單箭頭接點 25">
+            <a:extLst>
+              <a:ext uri="{FF2B5EF4-FFF2-40B4-BE49-F238E27FC236}">
+                <a16:creationId xmlns:a16="http://schemas.microsoft.com/office/drawing/2014/main" id="{F0DA6F1A-301C-4C2B-8AE7-355ADB8613CC}"/>
+              </a:ext>
+            </a:extLst>
+          </p:cNvPr>
+          <p:cNvCxnSpPr>
+            <a:cxnSpLocks/>
+            <a:stCxn id="18" idx="3"/>
+            <a:endCxn id="20" idx="1"/>
+          </p:cNvCxnSpPr>
+          <p:nvPr/>
+        </p:nvCxnSpPr>
+        <p:spPr>
+          <a:xfrm flipV="1">
+            <a:off x="1886142" y="1198309"/>
+            <a:ext cx="2252380" cy="1430851"/>
+          </a:xfrm>
+          <a:prstGeom prst="straightConnector1">
+            <a:avLst/>
+          </a:prstGeom>
+          <a:ln w="38100">
+            <a:headEnd type="none" w="med" len="med"/>
+            <a:tailEnd type="arrow" w="med" len="med"/>
+          </a:ln>
+        </p:spPr>
+        <p:style>
+          <a:lnRef idx="3">
+            <a:schemeClr val="dk1"/>
+          </a:lnRef>
+          <a:fillRef idx="0">
+            <a:schemeClr val="dk1"/>
+          </a:fillRef>
+          <a:effectRef idx="2">
+            <a:schemeClr val="dk1"/>
+          </a:effectRef>
+          <a:fontRef idx="minor">
+            <a:schemeClr val="tx1"/>
+          </a:fontRef>
+        </p:style>
+      </p:cxnSp>
+      <p:cxnSp>
+        <p:nvCxnSpPr>
+          <p:cNvPr id="29" name="直線單箭頭接點 28">
+            <a:extLst>
+              <a:ext uri="{FF2B5EF4-FFF2-40B4-BE49-F238E27FC236}">
+                <a16:creationId xmlns:a16="http://schemas.microsoft.com/office/drawing/2014/main" id="{6AC33666-A362-457B-AC89-531199F9E7D8}"/>
+              </a:ext>
+            </a:extLst>
+          </p:cNvPr>
+          <p:cNvCxnSpPr>
+            <a:cxnSpLocks/>
+            <a:stCxn id="14" idx="1"/>
+            <a:endCxn id="20" idx="3"/>
+          </p:cNvCxnSpPr>
+          <p:nvPr/>
+        </p:nvCxnSpPr>
+        <p:spPr>
+          <a:xfrm flipH="1" flipV="1">
+            <a:off x="5218522" y="1198309"/>
+            <a:ext cx="2224100" cy="1430851"/>
+          </a:xfrm>
+          <a:prstGeom prst="straightConnector1">
+            <a:avLst/>
+          </a:prstGeom>
+          <a:ln w="38100">
+            <a:headEnd type="none" w="med" len="med"/>
+            <a:tailEnd type="arrow" w="med" len="med"/>
+          </a:ln>
+        </p:spPr>
+        <p:style>
+          <a:lnRef idx="3">
+            <a:schemeClr val="dk1"/>
+          </a:lnRef>
+          <a:fillRef idx="0">
+            <a:schemeClr val="dk1"/>
+          </a:fillRef>
+          <a:effectRef idx="2">
+            <a:schemeClr val="dk1"/>
+          </a:effectRef>
+          <a:fontRef idx="minor">
+            <a:schemeClr val="tx1"/>
+          </a:fontRef>
+        </p:style>
+      </p:cxnSp>
+      <p:cxnSp>
+        <p:nvCxnSpPr>
+          <p:cNvPr id="32" name="直線單箭頭接點 31">
+            <a:extLst>
+              <a:ext uri="{FF2B5EF4-FFF2-40B4-BE49-F238E27FC236}">
+                <a16:creationId xmlns:a16="http://schemas.microsoft.com/office/drawing/2014/main" id="{3731F357-A410-4721-BDD1-8783F4F9F798}"/>
+              </a:ext>
+            </a:extLst>
+          </p:cNvPr>
+          <p:cNvCxnSpPr>
+            <a:cxnSpLocks/>
+            <a:stCxn id="7" idx="3"/>
+          </p:cNvCxnSpPr>
+          <p:nvPr/>
+        </p:nvCxnSpPr>
+        <p:spPr>
+          <a:xfrm flipV="1">
+            <a:off x="5200490" y="2819400"/>
+            <a:ext cx="2242132" cy="1107839"/>
+          </a:xfrm>
+          <a:prstGeom prst="straightConnector1">
+            <a:avLst/>
+          </a:prstGeom>
+          <a:ln w="38100">
+            <a:solidFill>
+              <a:srgbClr val="FF0000"/>
+            </a:solidFill>
+            <a:headEnd type="none" w="med" len="med"/>
+            <a:tailEnd type="arrow" w="med" len="med"/>
+          </a:ln>
+        </p:spPr>
+        <p:style>
+          <a:lnRef idx="3">
+            <a:schemeClr val="dk1"/>
+          </a:lnRef>
+          <a:fillRef idx="0">
+            <a:schemeClr val="dk1"/>
+          </a:fillRef>
+          <a:effectRef idx="2">
+            <a:schemeClr val="dk1"/>
+          </a:effectRef>
+          <a:fontRef idx="minor">
+            <a:schemeClr val="tx1"/>
+          </a:fontRef>
+        </p:style>
+      </p:cxnSp>
+      <p:cxnSp>
+        <p:nvCxnSpPr>
+          <p:cNvPr id="37" name="直線單箭頭接點 36">
+            <a:extLst>
+              <a:ext uri="{FF2B5EF4-FFF2-40B4-BE49-F238E27FC236}">
+                <a16:creationId xmlns:a16="http://schemas.microsoft.com/office/drawing/2014/main" id="{E659F970-2E33-4C5F-B617-757DAFCBA6A4}"/>
+              </a:ext>
+            </a:extLst>
+          </p:cNvPr>
+          <p:cNvCxnSpPr>
+            <a:cxnSpLocks/>
+            <a:stCxn id="7" idx="1"/>
+          </p:cNvCxnSpPr>
+          <p:nvPr/>
+        </p:nvCxnSpPr>
+        <p:spPr>
+          <a:xfrm flipH="1" flipV="1">
+            <a:off x="1828800" y="2895601"/>
+            <a:ext cx="2291690" cy="1031638"/>
+          </a:xfrm>
+          <a:prstGeom prst="straightConnector1">
+            <a:avLst/>
+          </a:prstGeom>
+          <a:ln w="38100">
+            <a:headEnd type="arrow" w="med" len="med"/>
+            <a:tailEnd type="arrow" w="med" len="med"/>
+          </a:ln>
+        </p:spPr>
+        <p:style>
+          <a:lnRef idx="3">
+            <a:schemeClr val="dk1"/>
+          </a:lnRef>
+          <a:fillRef idx="0">
+            <a:schemeClr val="dk1"/>
+          </a:fillRef>
+          <a:effectRef idx="2">
+            <a:schemeClr val="dk1"/>
+          </a:effectRef>
+          <a:fontRef idx="minor">
+            <a:schemeClr val="tx1"/>
+          </a:fontRef>
+        </p:style>
+      </p:cxnSp>
+    </p:spTree>
+    <p:extLst>
+      <p:ext uri="{BB962C8B-B14F-4D97-AF65-F5344CB8AC3E}">
+        <p14:creationId xmlns:p14="http://schemas.microsoft.com/office/powerpoint/2010/main" val="453618051"/>
+      </p:ext>
+    </p:extLst>
+  </p:cSld>
+  <p:clrMapOvr>
+    <a:masterClrMapping/>
+  </p:clrMapOvr>
+</p:sld>
+</file>
+
 <file path=ppt/slides/slide3.xml><?xml version="1.0" encoding="utf-8"?>
 <p:sld xmlns:a="http://schemas.openxmlformats.org/drawingml/2006/main" xmlns:r="http://schemas.openxmlformats.org/officeDocument/2006/relationships" xmlns:p="http://schemas.openxmlformats.org/presentationml/2006/main">
   <p:cSld>
@@ -30547,6 +31294,3528 @@
 </p:sld>
 </file>
 
+<file path=ppt/slides/slide30.xml><?xml version="1.0" encoding="utf-8"?>
+<p:sld xmlns:a="http://schemas.openxmlformats.org/drawingml/2006/main" xmlns:r="http://schemas.openxmlformats.org/officeDocument/2006/relationships" xmlns:p="http://schemas.openxmlformats.org/presentationml/2006/main">
+  <p:cSld>
+    <p:spTree>
+      <p:nvGrpSpPr>
+        <p:cNvPr id="1" name=""/>
+        <p:cNvGrpSpPr/>
+        <p:nvPr/>
+      </p:nvGrpSpPr>
+      <p:grpSpPr>
+        <a:xfrm>
+          <a:off x="0" y="0"/>
+          <a:ext cx="0" cy="0"/>
+          <a:chOff x="0" y="0"/>
+          <a:chExt cx="0" cy="0"/>
+        </a:xfrm>
+      </p:grpSpPr>
+      <p:sp>
+        <p:nvSpPr>
+          <p:cNvPr id="185" name="矩形 184">
+            <a:extLst>
+              <a:ext uri="{FF2B5EF4-FFF2-40B4-BE49-F238E27FC236}">
+                <a16:creationId xmlns:a16="http://schemas.microsoft.com/office/drawing/2014/main" id="{3446E63B-0570-42EE-B77B-4E94206BF976}"/>
+              </a:ext>
+            </a:extLst>
+          </p:cNvPr>
+          <p:cNvSpPr/>
+          <p:nvPr/>
+        </p:nvSpPr>
+        <p:spPr>
+          <a:xfrm>
+            <a:off x="72571" y="266700"/>
+            <a:ext cx="12046857" cy="6324600"/>
+          </a:xfrm>
+          <a:prstGeom prst="rect">
+            <a:avLst/>
+          </a:prstGeom>
+          <a:noFill/>
+          <a:ln w="38100">
+            <a:solidFill>
+              <a:srgbClr val="FF0000"/>
+            </a:solidFill>
+            <a:prstDash val="lgDash"/>
+          </a:ln>
+        </p:spPr>
+        <p:style>
+          <a:lnRef idx="2">
+            <a:schemeClr val="accent1">
+              <a:shade val="50000"/>
+            </a:schemeClr>
+          </a:lnRef>
+          <a:fillRef idx="1">
+            <a:schemeClr val="accent1"/>
+          </a:fillRef>
+          <a:effectRef idx="0">
+            <a:schemeClr val="accent1"/>
+          </a:effectRef>
+          <a:fontRef idx="minor">
+            <a:schemeClr val="lt1"/>
+          </a:fontRef>
+        </p:style>
+        <p:txBody>
+          <a:bodyPr rot="0" spcFirstLastPara="0" vertOverflow="overflow" horzOverflow="overflow" vert="horz" wrap="square" lIns="91440" tIns="45720" rIns="91440" bIns="45720" numCol="1" spcCol="0" rtlCol="0" fromWordArt="0" anchor="ctr" anchorCtr="0" forceAA="0" compatLnSpc="1">
+            <a:prstTxWarp prst="textNoShape">
+              <a:avLst/>
+            </a:prstTxWarp>
+            <a:noAutofit/>
+          </a:bodyPr>
+          <a:lstStyle/>
+          <a:p>
+            <a:pPr algn="ctr"/>
+            <a:endParaRPr lang="zh-TW" altLang="en-US">
+              <a:solidFill>
+                <a:srgbClr val="FF0000"/>
+              </a:solidFill>
+            </a:endParaRPr>
+          </a:p>
+        </p:txBody>
+      </p:sp>
+      <p:sp>
+        <p:nvSpPr>
+          <p:cNvPr id="6" name="矩形 5">
+            <a:extLst>
+              <a:ext uri="{FF2B5EF4-FFF2-40B4-BE49-F238E27FC236}">
+                <a16:creationId xmlns:a16="http://schemas.microsoft.com/office/drawing/2014/main" id="{E37465D3-E71A-49DD-AC57-471BE12565FB}"/>
+              </a:ext>
+            </a:extLst>
+          </p:cNvPr>
+          <p:cNvSpPr/>
+          <p:nvPr/>
+        </p:nvSpPr>
+        <p:spPr>
+          <a:xfrm>
+            <a:off x="381000" y="450669"/>
+            <a:ext cx="3362075" cy="5943600"/>
+          </a:xfrm>
+          <a:prstGeom prst="rect">
+            <a:avLst/>
+          </a:prstGeom>
+          <a:noFill/>
+          <a:ln w="38100">
+            <a:solidFill>
+              <a:schemeClr val="bg1">
+                <a:lumMod val="65000"/>
+              </a:schemeClr>
+            </a:solidFill>
+            <a:prstDash val="lgDash"/>
+          </a:ln>
+        </p:spPr>
+        <p:style>
+          <a:lnRef idx="2">
+            <a:schemeClr val="accent1">
+              <a:shade val="50000"/>
+            </a:schemeClr>
+          </a:lnRef>
+          <a:fillRef idx="1">
+            <a:schemeClr val="accent1"/>
+          </a:fillRef>
+          <a:effectRef idx="0">
+            <a:schemeClr val="accent1"/>
+          </a:effectRef>
+          <a:fontRef idx="minor">
+            <a:schemeClr val="lt1"/>
+          </a:fontRef>
+        </p:style>
+        <p:txBody>
+          <a:bodyPr rtlCol="0" anchor="ctr"/>
+          <a:lstStyle/>
+          <a:p>
+            <a:pPr algn="ctr"/>
+            <a:endParaRPr lang="zh-TW" altLang="en-US"/>
+          </a:p>
+        </p:txBody>
+      </p:sp>
+      <p:sp>
+        <p:nvSpPr>
+          <p:cNvPr id="7" name="矩形 6">
+            <a:extLst>
+              <a:ext uri="{FF2B5EF4-FFF2-40B4-BE49-F238E27FC236}">
+                <a16:creationId xmlns:a16="http://schemas.microsoft.com/office/drawing/2014/main" id="{9E877993-341D-4A1C-8CC3-445B8527435F}"/>
+              </a:ext>
+            </a:extLst>
+          </p:cNvPr>
+          <p:cNvSpPr/>
+          <p:nvPr/>
+        </p:nvSpPr>
+        <p:spPr>
+          <a:xfrm>
+            <a:off x="8156570" y="457200"/>
+            <a:ext cx="3600000" cy="5943600"/>
+          </a:xfrm>
+          <a:prstGeom prst="rect">
+            <a:avLst/>
+          </a:prstGeom>
+          <a:noFill/>
+          <a:ln w="38100">
+            <a:solidFill>
+              <a:schemeClr val="bg1">
+                <a:lumMod val="65000"/>
+              </a:schemeClr>
+            </a:solidFill>
+            <a:prstDash val="lgDash"/>
+          </a:ln>
+        </p:spPr>
+        <p:style>
+          <a:lnRef idx="2">
+            <a:schemeClr val="accent1">
+              <a:shade val="50000"/>
+            </a:schemeClr>
+          </a:lnRef>
+          <a:fillRef idx="1">
+            <a:schemeClr val="accent1"/>
+          </a:fillRef>
+          <a:effectRef idx="0">
+            <a:schemeClr val="accent1"/>
+          </a:effectRef>
+          <a:fontRef idx="minor">
+            <a:schemeClr val="lt1"/>
+          </a:fontRef>
+        </p:style>
+        <p:txBody>
+          <a:bodyPr rot="0" spcFirstLastPara="0" vertOverflow="overflow" horzOverflow="overflow" vert="horz" wrap="square" lIns="91440" tIns="45720" rIns="91440" bIns="45720" numCol="1" spcCol="0" rtlCol="0" fromWordArt="0" anchor="ctr" anchorCtr="0" forceAA="0" compatLnSpc="1">
+            <a:prstTxWarp prst="textNoShape">
+              <a:avLst/>
+            </a:prstTxWarp>
+            <a:noAutofit/>
+          </a:bodyPr>
+          <a:lstStyle/>
+          <a:p>
+            <a:pPr algn="ctr"/>
+            <a:endParaRPr lang="zh-TW" altLang="en-US"/>
+          </a:p>
+        </p:txBody>
+      </p:sp>
+      <p:sp>
+        <p:nvSpPr>
+          <p:cNvPr id="8" name="文字方塊 7">
+            <a:extLst>
+              <a:ext uri="{FF2B5EF4-FFF2-40B4-BE49-F238E27FC236}">
+                <a16:creationId xmlns:a16="http://schemas.microsoft.com/office/drawing/2014/main" id="{0ECB93F9-E2A9-435D-B6E5-78B46913AFA0}"/>
+              </a:ext>
+            </a:extLst>
+          </p:cNvPr>
+          <p:cNvSpPr txBox="1"/>
+          <p:nvPr/>
+        </p:nvSpPr>
+        <p:spPr>
+          <a:xfrm>
+            <a:off x="428896" y="450669"/>
+            <a:ext cx="3362075" cy="369332"/>
+          </a:xfrm>
+          <a:prstGeom prst="rect">
+            <a:avLst/>
+          </a:prstGeom>
+          <a:noFill/>
+        </p:spPr>
+        <p:txBody>
+          <a:bodyPr wrap="square" rtlCol="0">
+            <a:spAutoFit/>
+          </a:bodyPr>
+          <a:lstStyle/>
+          <a:p>
+            <a:pPr algn="ctr"/>
+            <a:r>
+              <a:rPr lang="en-US" altLang="zh-TW" b="1" dirty="0"/>
+              <a:t>Development Environment</a:t>
+            </a:r>
+            <a:endParaRPr lang="zh-TW" altLang="en-US" b="1" dirty="0"/>
+          </a:p>
+        </p:txBody>
+      </p:sp>
+      <p:sp>
+        <p:nvSpPr>
+          <p:cNvPr id="9" name="文字方塊 8">
+            <a:extLst>
+              <a:ext uri="{FF2B5EF4-FFF2-40B4-BE49-F238E27FC236}">
+                <a16:creationId xmlns:a16="http://schemas.microsoft.com/office/drawing/2014/main" id="{318FC3EC-FCCE-49B4-B3D2-3DC435A0AC38}"/>
+              </a:ext>
+            </a:extLst>
+          </p:cNvPr>
+          <p:cNvSpPr txBox="1"/>
+          <p:nvPr/>
+        </p:nvSpPr>
+        <p:spPr>
+          <a:xfrm>
+            <a:off x="8156570" y="450669"/>
+            <a:ext cx="3600000" cy="369332"/>
+          </a:xfrm>
+          <a:prstGeom prst="rect">
+            <a:avLst/>
+          </a:prstGeom>
+          <a:noFill/>
+        </p:spPr>
+        <p:txBody>
+          <a:bodyPr wrap="square" rtlCol="0">
+            <a:spAutoFit/>
+          </a:bodyPr>
+          <a:lstStyle/>
+          <a:p>
+            <a:pPr algn="ctr"/>
+            <a:r>
+              <a:rPr lang="en-US" altLang="zh-TW" b="1" dirty="0"/>
+              <a:t>Production Environment</a:t>
+            </a:r>
+            <a:endParaRPr lang="zh-TW" altLang="en-US" b="1" dirty="0"/>
+          </a:p>
+        </p:txBody>
+      </p:sp>
+      <p:sp>
+        <p:nvSpPr>
+          <p:cNvPr id="13" name="矩形 12">
+            <a:extLst>
+              <a:ext uri="{FF2B5EF4-FFF2-40B4-BE49-F238E27FC236}">
+                <a16:creationId xmlns:a16="http://schemas.microsoft.com/office/drawing/2014/main" id="{05BABDCD-2A48-4A20-B6D5-3320C27ABECA}"/>
+              </a:ext>
+            </a:extLst>
+          </p:cNvPr>
+          <p:cNvSpPr/>
+          <p:nvPr/>
+        </p:nvSpPr>
+        <p:spPr>
+          <a:xfrm>
+            <a:off x="693600" y="4507391"/>
+            <a:ext cx="2811600" cy="1600200"/>
+          </a:xfrm>
+          <a:prstGeom prst="rect">
+            <a:avLst/>
+          </a:prstGeom>
+          <a:solidFill>
+            <a:schemeClr val="accent1">
+              <a:alpha val="50000"/>
+            </a:schemeClr>
+          </a:solidFill>
+          <a:ln>
+            <a:noFill/>
+          </a:ln>
+        </p:spPr>
+        <p:style>
+          <a:lnRef idx="0">
+            <a:scrgbClr r="0" g="0" b="0"/>
+          </a:lnRef>
+          <a:fillRef idx="0">
+            <a:scrgbClr r="0" g="0" b="0"/>
+          </a:fillRef>
+          <a:effectRef idx="0">
+            <a:scrgbClr r="0" g="0" b="0"/>
+          </a:effectRef>
+          <a:fontRef idx="minor">
+            <a:schemeClr val="lt1"/>
+          </a:fontRef>
+        </p:style>
+        <p:txBody>
+          <a:bodyPr rtlCol="0" anchor="ctr"/>
+          <a:lstStyle/>
+          <a:p>
+            <a:pPr algn="ctr"/>
+            <a:endParaRPr lang="zh-TW" altLang="en-US" dirty="0"/>
+          </a:p>
+        </p:txBody>
+      </p:sp>
+      <p:grpSp>
+        <p:nvGrpSpPr>
+          <p:cNvPr id="91" name="群組 90">
+            <a:extLst>
+              <a:ext uri="{FF2B5EF4-FFF2-40B4-BE49-F238E27FC236}">
+                <a16:creationId xmlns:a16="http://schemas.microsoft.com/office/drawing/2014/main" id="{33A01A70-BE7A-4397-B901-95DA1A0385C9}"/>
+              </a:ext>
+            </a:extLst>
+          </p:cNvPr>
+          <p:cNvGrpSpPr/>
+          <p:nvPr/>
+        </p:nvGrpSpPr>
+        <p:grpSpPr>
+          <a:xfrm>
+            <a:off x="1418055" y="1011940"/>
+            <a:ext cx="1362690" cy="1101000"/>
+            <a:chOff x="5091294" y="575400"/>
+            <a:chExt cx="1362690" cy="1101000"/>
+          </a:xfrm>
+        </p:grpSpPr>
+        <p:sp>
+          <p:nvSpPr>
+            <p:cNvPr id="23" name="矩形: 圓角 22">
+              <a:extLst>
+                <a:ext uri="{FF2B5EF4-FFF2-40B4-BE49-F238E27FC236}">
+                  <a16:creationId xmlns:a16="http://schemas.microsoft.com/office/drawing/2014/main" id="{802E0B67-B7BA-4787-A008-C3B5F57E62DB}"/>
+                </a:ext>
+              </a:extLst>
+            </p:cNvPr>
+            <p:cNvSpPr/>
+            <p:nvPr/>
+          </p:nvSpPr>
+          <p:spPr>
+            <a:xfrm>
+              <a:off x="5142639" y="596400"/>
+              <a:ext cx="1260000" cy="1080000"/>
+            </a:xfrm>
+            <a:prstGeom prst="roundRect">
+              <a:avLst/>
+            </a:prstGeom>
+          </p:spPr>
+          <p:style>
+            <a:lnRef idx="2">
+              <a:schemeClr val="accent1"/>
+            </a:lnRef>
+            <a:fillRef idx="1">
+              <a:schemeClr val="lt1"/>
+            </a:fillRef>
+            <a:effectRef idx="0">
+              <a:schemeClr val="accent1"/>
+            </a:effectRef>
+            <a:fontRef idx="minor">
+              <a:schemeClr val="dk1"/>
+            </a:fontRef>
+          </p:style>
+          <p:txBody>
+            <a:bodyPr rtlCol="0" anchor="ctr"/>
+            <a:lstStyle/>
+            <a:p>
+              <a:pPr algn="ctr"/>
+              <a:endParaRPr lang="zh-TW" altLang="en-US" b="1"/>
+            </a:p>
+          </p:txBody>
+        </p:sp>
+        <p:pic>
+          <p:nvPicPr>
+            <p:cNvPr id="24" name="圖片 23">
+              <a:extLst>
+                <a:ext uri="{FF2B5EF4-FFF2-40B4-BE49-F238E27FC236}">
+                  <a16:creationId xmlns:a16="http://schemas.microsoft.com/office/drawing/2014/main" id="{EEB67F9F-0A06-454F-8D0A-3B5BE88E040A}"/>
+                </a:ext>
+              </a:extLst>
+            </p:cNvPr>
+            <p:cNvPicPr>
+              <a:picLocks noChangeAspect="1"/>
+            </p:cNvPicPr>
+            <p:nvPr/>
+          </p:nvPicPr>
+          <p:blipFill>
+            <a:blip r:embed="rId2">
+              <a:extLst>
+                <a:ext uri="{28A0092B-C50C-407E-A947-70E740481C1C}">
+                  <a14:useLocalDpi xmlns:a14="http://schemas.microsoft.com/office/drawing/2010/main" val="0"/>
+                </a:ext>
+              </a:extLst>
+            </a:blip>
+            <a:stretch>
+              <a:fillRect/>
+            </a:stretch>
+          </p:blipFill>
+          <p:spPr>
+            <a:xfrm>
+              <a:off x="5412639" y="575400"/>
+              <a:ext cx="720000" cy="720000"/>
+            </a:xfrm>
+            <a:prstGeom prst="rect">
+              <a:avLst/>
+            </a:prstGeom>
+          </p:spPr>
+        </p:pic>
+        <p:sp>
+          <p:nvSpPr>
+            <p:cNvPr id="25" name="矩形 24">
+              <a:extLst>
+                <a:ext uri="{FF2B5EF4-FFF2-40B4-BE49-F238E27FC236}">
+                  <a16:creationId xmlns:a16="http://schemas.microsoft.com/office/drawing/2014/main" id="{24344AE3-0DA5-4448-8FA1-E9A81627FCED}"/>
+                </a:ext>
+              </a:extLst>
+            </p:cNvPr>
+            <p:cNvSpPr/>
+            <p:nvPr/>
+          </p:nvSpPr>
+          <p:spPr>
+            <a:xfrm>
+              <a:off x="5091294" y="1143000"/>
+              <a:ext cx="1362690" cy="523220"/>
+            </a:xfrm>
+            <a:prstGeom prst="rect">
+              <a:avLst/>
+            </a:prstGeom>
+          </p:spPr>
+          <p:txBody>
+            <a:bodyPr wrap="square">
+              <a:spAutoFit/>
+            </a:bodyPr>
+            <a:lstStyle/>
+            <a:p>
+              <a:pPr algn="ctr"/>
+              <a:r>
+                <a:rPr lang="en-US" altLang="zh-TW" sz="1400" b="1" dirty="0"/>
+                <a:t>Docker</a:t>
+              </a:r>
+            </a:p>
+            <a:p>
+              <a:pPr algn="ctr"/>
+              <a:r>
+                <a:rPr lang="en-US" altLang="zh-TW" sz="1400" b="1" dirty="0"/>
+                <a:t>Private Registry</a:t>
+              </a:r>
+              <a:endParaRPr lang="zh-TW" altLang="en-US" sz="1400" b="1" dirty="0"/>
+            </a:p>
+          </p:txBody>
+        </p:sp>
+      </p:grpSp>
+      <p:grpSp>
+        <p:nvGrpSpPr>
+          <p:cNvPr id="35" name="群組 34">
+            <a:extLst>
+              <a:ext uri="{FF2B5EF4-FFF2-40B4-BE49-F238E27FC236}">
+                <a16:creationId xmlns:a16="http://schemas.microsoft.com/office/drawing/2014/main" id="{3FE0E9A4-9AB1-4260-8C0E-06CF244E4759}"/>
+              </a:ext>
+            </a:extLst>
+          </p:cNvPr>
+          <p:cNvGrpSpPr/>
+          <p:nvPr/>
+        </p:nvGrpSpPr>
+        <p:grpSpPr>
+          <a:xfrm>
+            <a:off x="835424" y="4659791"/>
+            <a:ext cx="2517376" cy="1266950"/>
+            <a:chOff x="866328" y="4654029"/>
+            <a:chExt cx="2517376" cy="1266950"/>
+          </a:xfrm>
+        </p:grpSpPr>
+        <p:sp>
+          <p:nvSpPr>
+            <p:cNvPr id="14" name="矩形 13">
+              <a:extLst>
+                <a:ext uri="{FF2B5EF4-FFF2-40B4-BE49-F238E27FC236}">
+                  <a16:creationId xmlns:a16="http://schemas.microsoft.com/office/drawing/2014/main" id="{E90520E6-E19C-4E46-B4D6-0E6033A472BE}"/>
+                </a:ext>
+              </a:extLst>
+            </p:cNvPr>
+            <p:cNvSpPr/>
+            <p:nvPr/>
+          </p:nvSpPr>
+          <p:spPr>
+            <a:xfrm>
+              <a:off x="1583704" y="4654029"/>
+              <a:ext cx="1800000" cy="360000"/>
+            </a:xfrm>
+            <a:prstGeom prst="rect">
+              <a:avLst/>
+            </a:prstGeom>
+          </p:spPr>
+          <p:style>
+            <a:lnRef idx="0">
+              <a:schemeClr val="accent2"/>
+            </a:lnRef>
+            <a:fillRef idx="3">
+              <a:schemeClr val="accent2"/>
+            </a:fillRef>
+            <a:effectRef idx="3">
+              <a:schemeClr val="accent2"/>
+            </a:effectRef>
+            <a:fontRef idx="minor">
+              <a:schemeClr val="lt1"/>
+            </a:fontRef>
+          </p:style>
+          <p:txBody>
+            <a:bodyPr rtlCol="0" anchor="ctr"/>
+            <a:lstStyle/>
+            <a:p>
+              <a:pPr algn="ctr"/>
+              <a:r>
+                <a:rPr lang="en-US" altLang="zh-TW" b="1" dirty="0"/>
+                <a:t>Project DLL</a:t>
+              </a:r>
+              <a:endParaRPr lang="zh-TW" altLang="en-US" b="1" dirty="0"/>
+            </a:p>
+          </p:txBody>
+        </p:sp>
+        <p:sp>
+          <p:nvSpPr>
+            <p:cNvPr id="15" name="矩形 14">
+              <a:extLst>
+                <a:ext uri="{FF2B5EF4-FFF2-40B4-BE49-F238E27FC236}">
+                  <a16:creationId xmlns:a16="http://schemas.microsoft.com/office/drawing/2014/main" id="{7BC055E3-1E82-4FD7-A21D-07A4BC820FF4}"/>
+                </a:ext>
+              </a:extLst>
+            </p:cNvPr>
+            <p:cNvSpPr/>
+            <p:nvPr/>
+          </p:nvSpPr>
+          <p:spPr>
+            <a:xfrm>
+              <a:off x="1583704" y="5102838"/>
+              <a:ext cx="1800000" cy="360000"/>
+            </a:xfrm>
+            <a:prstGeom prst="rect">
+              <a:avLst/>
+            </a:prstGeom>
+          </p:spPr>
+          <p:style>
+            <a:lnRef idx="0">
+              <a:schemeClr val="accent5"/>
+            </a:lnRef>
+            <a:fillRef idx="3">
+              <a:schemeClr val="accent5"/>
+            </a:fillRef>
+            <a:effectRef idx="3">
+              <a:schemeClr val="accent5"/>
+            </a:effectRef>
+            <a:fontRef idx="minor">
+              <a:schemeClr val="lt1"/>
+            </a:fontRef>
+          </p:style>
+          <p:txBody>
+            <a:bodyPr rtlCol="0" anchor="ctr"/>
+            <a:lstStyle/>
+            <a:p>
+              <a:pPr algn="ctr"/>
+              <a:r>
+                <a:rPr lang="en-US" altLang="zh-TW" b="1" dirty="0"/>
+                <a:t>Third-party DLL</a:t>
+              </a:r>
+              <a:endParaRPr lang="zh-TW" altLang="en-US" b="1" dirty="0"/>
+            </a:p>
+          </p:txBody>
+        </p:sp>
+        <p:sp>
+          <p:nvSpPr>
+            <p:cNvPr id="16" name="矩形 15">
+              <a:extLst>
+                <a:ext uri="{FF2B5EF4-FFF2-40B4-BE49-F238E27FC236}">
+                  <a16:creationId xmlns:a16="http://schemas.microsoft.com/office/drawing/2014/main" id="{AAC6F56E-50FD-408D-B2CD-D99DCB697091}"/>
+                </a:ext>
+              </a:extLst>
+            </p:cNvPr>
+            <p:cNvSpPr/>
+            <p:nvPr/>
+          </p:nvSpPr>
+          <p:spPr>
+            <a:xfrm>
+              <a:off x="1583704" y="5551647"/>
+              <a:ext cx="1800000" cy="360000"/>
+            </a:xfrm>
+            <a:prstGeom prst="rect">
+              <a:avLst/>
+            </a:prstGeom>
+          </p:spPr>
+          <p:style>
+            <a:lnRef idx="0">
+              <a:schemeClr val="accent5"/>
+            </a:lnRef>
+            <a:fillRef idx="3">
+              <a:schemeClr val="accent5"/>
+            </a:fillRef>
+            <a:effectRef idx="3">
+              <a:schemeClr val="accent5"/>
+            </a:effectRef>
+            <a:fontRef idx="minor">
+              <a:schemeClr val="lt1"/>
+            </a:fontRef>
+          </p:style>
+          <p:txBody>
+            <a:bodyPr rtlCol="0" anchor="ctr"/>
+            <a:lstStyle/>
+            <a:p>
+              <a:pPr algn="ctr"/>
+              <a:r>
+                <a:rPr lang="en-US" altLang="zh-TW" b="1" dirty="0"/>
+                <a:t>Base Image</a:t>
+              </a:r>
+              <a:endParaRPr lang="zh-TW" altLang="en-US" b="1" dirty="0"/>
+            </a:p>
+          </p:txBody>
+        </p:sp>
+        <p:sp>
+          <p:nvSpPr>
+            <p:cNvPr id="30" name="文字方塊 29">
+              <a:extLst>
+                <a:ext uri="{FF2B5EF4-FFF2-40B4-BE49-F238E27FC236}">
+                  <a16:creationId xmlns:a16="http://schemas.microsoft.com/office/drawing/2014/main" id="{76DD3989-5BD9-47A2-861A-BAD5D280402A}"/>
+                </a:ext>
+              </a:extLst>
+            </p:cNvPr>
+            <p:cNvSpPr txBox="1"/>
+            <p:nvPr/>
+          </p:nvSpPr>
+          <p:spPr>
+            <a:xfrm>
+              <a:off x="869155" y="5551647"/>
+              <a:ext cx="676788" cy="369332"/>
+            </a:xfrm>
+            <a:prstGeom prst="rect">
+              <a:avLst/>
+            </a:prstGeom>
+            <a:noFill/>
+          </p:spPr>
+          <p:txBody>
+            <a:bodyPr wrap="none" rtlCol="0">
+              <a:spAutoFit/>
+            </a:bodyPr>
+            <a:lstStyle/>
+            <a:p>
+              <a:r>
+                <a:rPr lang="en-US" altLang="zh-TW" b="1" dirty="0" err="1"/>
+                <a:t>sha</a:t>
+              </a:r>
+              <a:r>
+                <a:rPr lang="en-US" altLang="zh-TW" b="1" dirty="0"/>
+                <a:t> 1</a:t>
+              </a:r>
+              <a:endParaRPr lang="zh-TW" altLang="en-US" b="1" dirty="0"/>
+            </a:p>
+          </p:txBody>
+        </p:sp>
+        <p:sp>
+          <p:nvSpPr>
+            <p:cNvPr id="31" name="文字方塊 30">
+              <a:extLst>
+                <a:ext uri="{FF2B5EF4-FFF2-40B4-BE49-F238E27FC236}">
+                  <a16:creationId xmlns:a16="http://schemas.microsoft.com/office/drawing/2014/main" id="{2A7DF3AA-EA20-4E7B-AB3B-83DB369ABEAB}"/>
+                </a:ext>
+              </a:extLst>
+            </p:cNvPr>
+            <p:cNvSpPr txBox="1"/>
+            <p:nvPr/>
+          </p:nvSpPr>
+          <p:spPr>
+            <a:xfrm>
+              <a:off x="866328" y="5098172"/>
+              <a:ext cx="676788" cy="369332"/>
+            </a:xfrm>
+            <a:prstGeom prst="rect">
+              <a:avLst/>
+            </a:prstGeom>
+            <a:noFill/>
+          </p:spPr>
+          <p:txBody>
+            <a:bodyPr wrap="none" rtlCol="0">
+              <a:spAutoFit/>
+            </a:bodyPr>
+            <a:lstStyle/>
+            <a:p>
+              <a:r>
+                <a:rPr lang="en-US" altLang="zh-TW" b="1" dirty="0" err="1"/>
+                <a:t>sha</a:t>
+              </a:r>
+              <a:r>
+                <a:rPr lang="en-US" altLang="zh-TW" b="1" dirty="0"/>
+                <a:t> 2</a:t>
+              </a:r>
+              <a:endParaRPr lang="zh-TW" altLang="en-US" b="1" dirty="0"/>
+            </a:p>
+          </p:txBody>
+        </p:sp>
+        <p:sp>
+          <p:nvSpPr>
+            <p:cNvPr id="32" name="文字方塊 31">
+              <a:extLst>
+                <a:ext uri="{FF2B5EF4-FFF2-40B4-BE49-F238E27FC236}">
+                  <a16:creationId xmlns:a16="http://schemas.microsoft.com/office/drawing/2014/main" id="{159CE188-A491-40BC-BFC5-8E96C7D6D8EB}"/>
+                </a:ext>
+              </a:extLst>
+            </p:cNvPr>
+            <p:cNvSpPr txBox="1"/>
+            <p:nvPr/>
+          </p:nvSpPr>
+          <p:spPr>
+            <a:xfrm>
+              <a:off x="870719" y="4654029"/>
+              <a:ext cx="676788" cy="369332"/>
+            </a:xfrm>
+            <a:prstGeom prst="rect">
+              <a:avLst/>
+            </a:prstGeom>
+            <a:noFill/>
+          </p:spPr>
+          <p:txBody>
+            <a:bodyPr wrap="none" rtlCol="0">
+              <a:spAutoFit/>
+            </a:bodyPr>
+            <a:lstStyle/>
+            <a:p>
+              <a:r>
+                <a:rPr lang="en-US" altLang="zh-TW" b="1" dirty="0" err="1"/>
+                <a:t>sha</a:t>
+              </a:r>
+              <a:r>
+                <a:rPr lang="en-US" altLang="zh-TW" b="1" dirty="0"/>
+                <a:t> 3</a:t>
+              </a:r>
+              <a:endParaRPr lang="zh-TW" altLang="en-US" b="1" dirty="0"/>
+            </a:p>
+          </p:txBody>
+        </p:sp>
+      </p:grpSp>
+      <p:cxnSp>
+        <p:nvCxnSpPr>
+          <p:cNvPr id="65" name="直線單箭頭接點 64">
+            <a:extLst>
+              <a:ext uri="{FF2B5EF4-FFF2-40B4-BE49-F238E27FC236}">
+                <a16:creationId xmlns:a16="http://schemas.microsoft.com/office/drawing/2014/main" id="{1867F53D-65CA-4EA2-AD07-05D66F6D0AE7}"/>
+              </a:ext>
+            </a:extLst>
+          </p:cNvPr>
+          <p:cNvCxnSpPr>
+            <a:cxnSpLocks/>
+          </p:cNvCxnSpPr>
+          <p:nvPr/>
+        </p:nvCxnSpPr>
+        <p:spPr>
+          <a:xfrm flipV="1">
+            <a:off x="2362200" y="2112940"/>
+            <a:ext cx="0" cy="2394451"/>
+          </a:xfrm>
+          <a:prstGeom prst="straightConnector1">
+            <a:avLst/>
+          </a:prstGeom>
+          <a:ln w="38100">
+            <a:headEnd type="none" w="med" len="med"/>
+            <a:tailEnd type="arrow" w="med" len="med"/>
+          </a:ln>
+        </p:spPr>
+        <p:style>
+          <a:lnRef idx="3">
+            <a:schemeClr val="dk1"/>
+          </a:lnRef>
+          <a:fillRef idx="0">
+            <a:schemeClr val="dk1"/>
+          </a:fillRef>
+          <a:effectRef idx="2">
+            <a:schemeClr val="dk1"/>
+          </a:effectRef>
+          <a:fontRef idx="minor">
+            <a:schemeClr val="tx1"/>
+          </a:fontRef>
+        </p:style>
+      </p:cxnSp>
+      <p:cxnSp>
+        <p:nvCxnSpPr>
+          <p:cNvPr id="67" name="直線單箭頭接點 66">
+            <a:extLst>
+              <a:ext uri="{FF2B5EF4-FFF2-40B4-BE49-F238E27FC236}">
+                <a16:creationId xmlns:a16="http://schemas.microsoft.com/office/drawing/2014/main" id="{0347EDAD-C7F5-4BC1-A92F-8D8E7D7CAC54}"/>
+              </a:ext>
+            </a:extLst>
+          </p:cNvPr>
+          <p:cNvCxnSpPr>
+            <a:cxnSpLocks/>
+          </p:cNvCxnSpPr>
+          <p:nvPr/>
+        </p:nvCxnSpPr>
+        <p:spPr>
+          <a:xfrm flipV="1">
+            <a:off x="2914121" y="1551472"/>
+            <a:ext cx="2828916" cy="2966367"/>
+          </a:xfrm>
+          <a:prstGeom prst="straightConnector1">
+            <a:avLst/>
+          </a:prstGeom>
+          <a:ln w="38100">
+            <a:headEnd type="none" w="med" len="med"/>
+            <a:tailEnd type="arrow" w="med" len="med"/>
+          </a:ln>
+        </p:spPr>
+        <p:style>
+          <a:lnRef idx="3">
+            <a:schemeClr val="dk1"/>
+          </a:lnRef>
+          <a:fillRef idx="0">
+            <a:schemeClr val="dk1"/>
+          </a:fillRef>
+          <a:effectRef idx="2">
+            <a:schemeClr val="dk1"/>
+          </a:effectRef>
+          <a:fontRef idx="minor">
+            <a:schemeClr val="tx1"/>
+          </a:fontRef>
+        </p:style>
+      </p:cxnSp>
+      <p:cxnSp>
+        <p:nvCxnSpPr>
+          <p:cNvPr id="69" name="直線單箭頭接點 68">
+            <a:extLst>
+              <a:ext uri="{FF2B5EF4-FFF2-40B4-BE49-F238E27FC236}">
+                <a16:creationId xmlns:a16="http://schemas.microsoft.com/office/drawing/2014/main" id="{CC910FB1-F13A-49F8-8F2D-8CA2F1CD4B76}"/>
+              </a:ext>
+            </a:extLst>
+          </p:cNvPr>
+          <p:cNvCxnSpPr>
+            <a:cxnSpLocks/>
+          </p:cNvCxnSpPr>
+          <p:nvPr/>
+        </p:nvCxnSpPr>
+        <p:spPr>
+          <a:xfrm>
+            <a:off x="2707007" y="2030181"/>
+            <a:ext cx="2838788" cy="3139065"/>
+          </a:xfrm>
+          <a:prstGeom prst="straightConnector1">
+            <a:avLst/>
+          </a:prstGeom>
+          <a:ln w="38100">
+            <a:headEnd type="none" w="med" len="med"/>
+            <a:tailEnd type="arrow" w="med" len="med"/>
+          </a:ln>
+        </p:spPr>
+        <p:style>
+          <a:lnRef idx="3">
+            <a:schemeClr val="dk1"/>
+          </a:lnRef>
+          <a:fillRef idx="0">
+            <a:schemeClr val="dk1"/>
+          </a:fillRef>
+          <a:effectRef idx="2">
+            <a:schemeClr val="dk1"/>
+          </a:effectRef>
+          <a:fontRef idx="minor">
+            <a:schemeClr val="tx1"/>
+          </a:fontRef>
+        </p:style>
+      </p:cxnSp>
+      <p:grpSp>
+        <p:nvGrpSpPr>
+          <p:cNvPr id="162" name="群組 161">
+            <a:extLst>
+              <a:ext uri="{FF2B5EF4-FFF2-40B4-BE49-F238E27FC236}">
+                <a16:creationId xmlns:a16="http://schemas.microsoft.com/office/drawing/2014/main" id="{0D4A655A-233F-4246-ABC0-F2602D2889C6}"/>
+              </a:ext>
+            </a:extLst>
+          </p:cNvPr>
+          <p:cNvGrpSpPr/>
+          <p:nvPr/>
+        </p:nvGrpSpPr>
+        <p:grpSpPr>
+          <a:xfrm>
+            <a:off x="5073770" y="4957742"/>
+            <a:ext cx="1800000" cy="1440013"/>
+            <a:chOff x="6011310" y="4777991"/>
+            <a:chExt cx="1800000" cy="1440013"/>
+          </a:xfrm>
+        </p:grpSpPr>
+        <p:pic>
+          <p:nvPicPr>
+            <p:cNvPr id="72" name="圖片 71">
+              <a:extLst>
+                <a:ext uri="{FF2B5EF4-FFF2-40B4-BE49-F238E27FC236}">
+                  <a16:creationId xmlns:a16="http://schemas.microsoft.com/office/drawing/2014/main" id="{B217EF17-9743-406A-840A-F22FE2578755}"/>
+                </a:ext>
+              </a:extLst>
+            </p:cNvPr>
+            <p:cNvPicPr>
+              <a:picLocks noChangeAspect="1"/>
+            </p:cNvPicPr>
+            <p:nvPr/>
+          </p:nvPicPr>
+          <p:blipFill>
+            <a:blip r:embed="rId3">
+              <a:extLst>
+                <a:ext uri="{28A0092B-C50C-407E-A947-70E740481C1C}">
+                  <a14:useLocalDpi xmlns:a14="http://schemas.microsoft.com/office/drawing/2010/main" val="0"/>
+                </a:ext>
+              </a:extLst>
+            </a:blip>
+            <a:stretch>
+              <a:fillRect/>
+            </a:stretch>
+          </p:blipFill>
+          <p:spPr>
+            <a:xfrm>
+              <a:off x="6367416" y="4777991"/>
+              <a:ext cx="1080000" cy="1080000"/>
+            </a:xfrm>
+            <a:prstGeom prst="rect">
+              <a:avLst/>
+            </a:prstGeom>
+          </p:spPr>
+        </p:pic>
+        <p:sp>
+          <p:nvSpPr>
+            <p:cNvPr id="73" name="矩形 72">
+              <a:extLst>
+                <a:ext uri="{FF2B5EF4-FFF2-40B4-BE49-F238E27FC236}">
+                  <a16:creationId xmlns:a16="http://schemas.microsoft.com/office/drawing/2014/main" id="{C4670069-0347-4795-86BD-3914CA715CA2}"/>
+                </a:ext>
+              </a:extLst>
+            </p:cNvPr>
+            <p:cNvSpPr/>
+            <p:nvPr/>
+          </p:nvSpPr>
+          <p:spPr>
+            <a:xfrm>
+              <a:off x="6011310" y="5848672"/>
+              <a:ext cx="1800000" cy="369332"/>
+            </a:xfrm>
+            <a:prstGeom prst="rect">
+              <a:avLst/>
+            </a:prstGeom>
+          </p:spPr>
+          <p:txBody>
+            <a:bodyPr wrap="square">
+              <a:spAutoFit/>
+            </a:bodyPr>
+            <a:lstStyle/>
+            <a:p>
+              <a:pPr algn="ctr"/>
+              <a:r>
+                <a:rPr lang="en-US" altLang="zh-TW" b="1" dirty="0"/>
+                <a:t>Cleanroom</a:t>
+              </a:r>
+              <a:endParaRPr lang="zh-TW" altLang="en-US" b="1" dirty="0"/>
+            </a:p>
+          </p:txBody>
+        </p:sp>
+      </p:grpSp>
+      <p:cxnSp>
+        <p:nvCxnSpPr>
+          <p:cNvPr id="83" name="直線單箭頭接點 82">
+            <a:extLst>
+              <a:ext uri="{FF2B5EF4-FFF2-40B4-BE49-F238E27FC236}">
+                <a16:creationId xmlns:a16="http://schemas.microsoft.com/office/drawing/2014/main" id="{C1D7692A-F47D-44D7-BC0E-21E67E00FB4B}"/>
+              </a:ext>
+            </a:extLst>
+          </p:cNvPr>
+          <p:cNvCxnSpPr>
+            <a:cxnSpLocks/>
+            <a:stCxn id="72" idx="3"/>
+          </p:cNvCxnSpPr>
+          <p:nvPr/>
+        </p:nvCxnSpPr>
+        <p:spPr>
+          <a:xfrm flipV="1">
+            <a:off x="6509876" y="5477504"/>
+            <a:ext cx="2747098" cy="20238"/>
+          </a:xfrm>
+          <a:prstGeom prst="straightConnector1">
+            <a:avLst/>
+          </a:prstGeom>
+          <a:ln w="38100">
+            <a:headEnd type="none" w="med" len="med"/>
+            <a:tailEnd type="arrow" w="med" len="med"/>
+          </a:ln>
+        </p:spPr>
+        <p:style>
+          <a:lnRef idx="3">
+            <a:schemeClr val="dk1"/>
+          </a:lnRef>
+          <a:fillRef idx="0">
+            <a:schemeClr val="dk1"/>
+          </a:fillRef>
+          <a:effectRef idx="2">
+            <a:schemeClr val="dk1"/>
+          </a:effectRef>
+          <a:fontRef idx="minor">
+            <a:schemeClr val="tx1"/>
+          </a:fontRef>
+        </p:style>
+      </p:cxnSp>
+      <p:grpSp>
+        <p:nvGrpSpPr>
+          <p:cNvPr id="93" name="群組 92">
+            <a:extLst>
+              <a:ext uri="{FF2B5EF4-FFF2-40B4-BE49-F238E27FC236}">
+                <a16:creationId xmlns:a16="http://schemas.microsoft.com/office/drawing/2014/main" id="{1E4B962F-293A-485C-A427-7C20E7237C8C}"/>
+              </a:ext>
+            </a:extLst>
+          </p:cNvPr>
+          <p:cNvGrpSpPr/>
+          <p:nvPr/>
+        </p:nvGrpSpPr>
+        <p:grpSpPr>
+          <a:xfrm>
+            <a:off x="5298016" y="451806"/>
+            <a:ext cx="1362690" cy="1101000"/>
+            <a:chOff x="5091294" y="575400"/>
+            <a:chExt cx="1362690" cy="1101000"/>
+          </a:xfrm>
+        </p:grpSpPr>
+        <p:sp>
+          <p:nvSpPr>
+            <p:cNvPr id="94" name="矩形: 圓角 93">
+              <a:extLst>
+                <a:ext uri="{FF2B5EF4-FFF2-40B4-BE49-F238E27FC236}">
+                  <a16:creationId xmlns:a16="http://schemas.microsoft.com/office/drawing/2014/main" id="{91114D46-3D89-4A38-ADA3-C2B3475F2F36}"/>
+                </a:ext>
+              </a:extLst>
+            </p:cNvPr>
+            <p:cNvSpPr/>
+            <p:nvPr/>
+          </p:nvSpPr>
+          <p:spPr>
+            <a:xfrm>
+              <a:off x="5142639" y="596400"/>
+              <a:ext cx="1260000" cy="1080000"/>
+            </a:xfrm>
+            <a:prstGeom prst="roundRect">
+              <a:avLst/>
+            </a:prstGeom>
+          </p:spPr>
+          <p:style>
+            <a:lnRef idx="2">
+              <a:schemeClr val="accent1"/>
+            </a:lnRef>
+            <a:fillRef idx="1">
+              <a:schemeClr val="lt1"/>
+            </a:fillRef>
+            <a:effectRef idx="0">
+              <a:schemeClr val="accent1"/>
+            </a:effectRef>
+            <a:fontRef idx="minor">
+              <a:schemeClr val="dk1"/>
+            </a:fontRef>
+          </p:style>
+          <p:txBody>
+            <a:bodyPr rtlCol="0" anchor="ctr"/>
+            <a:lstStyle/>
+            <a:p>
+              <a:pPr algn="ctr"/>
+              <a:endParaRPr lang="zh-TW" altLang="en-US" b="1"/>
+            </a:p>
+          </p:txBody>
+        </p:sp>
+        <p:pic>
+          <p:nvPicPr>
+            <p:cNvPr id="95" name="圖片 94">
+              <a:extLst>
+                <a:ext uri="{FF2B5EF4-FFF2-40B4-BE49-F238E27FC236}">
+                  <a16:creationId xmlns:a16="http://schemas.microsoft.com/office/drawing/2014/main" id="{B9E4F62F-844B-4270-B27E-575563692900}"/>
+                </a:ext>
+              </a:extLst>
+            </p:cNvPr>
+            <p:cNvPicPr>
+              <a:picLocks noChangeAspect="1"/>
+            </p:cNvPicPr>
+            <p:nvPr/>
+          </p:nvPicPr>
+          <p:blipFill>
+            <a:blip r:embed="rId2">
+              <a:extLst>
+                <a:ext uri="{28A0092B-C50C-407E-A947-70E740481C1C}">
+                  <a14:useLocalDpi xmlns:a14="http://schemas.microsoft.com/office/drawing/2010/main" val="0"/>
+                </a:ext>
+              </a:extLst>
+            </a:blip>
+            <a:stretch>
+              <a:fillRect/>
+            </a:stretch>
+          </p:blipFill>
+          <p:spPr>
+            <a:xfrm>
+              <a:off x="5412639" y="575400"/>
+              <a:ext cx="720000" cy="720000"/>
+            </a:xfrm>
+            <a:prstGeom prst="rect">
+              <a:avLst/>
+            </a:prstGeom>
+          </p:spPr>
+        </p:pic>
+        <p:sp>
+          <p:nvSpPr>
+            <p:cNvPr id="96" name="矩形 95">
+              <a:extLst>
+                <a:ext uri="{FF2B5EF4-FFF2-40B4-BE49-F238E27FC236}">
+                  <a16:creationId xmlns:a16="http://schemas.microsoft.com/office/drawing/2014/main" id="{29399430-516E-4A1F-B44F-03A0E8286C05}"/>
+                </a:ext>
+              </a:extLst>
+            </p:cNvPr>
+            <p:cNvSpPr/>
+            <p:nvPr/>
+          </p:nvSpPr>
+          <p:spPr>
+            <a:xfrm>
+              <a:off x="5091294" y="1143000"/>
+              <a:ext cx="1362690" cy="523220"/>
+            </a:xfrm>
+            <a:prstGeom prst="rect">
+              <a:avLst/>
+            </a:prstGeom>
+          </p:spPr>
+          <p:txBody>
+            <a:bodyPr wrap="square">
+              <a:spAutoFit/>
+            </a:bodyPr>
+            <a:lstStyle/>
+            <a:p>
+              <a:pPr algn="ctr"/>
+              <a:r>
+                <a:rPr lang="en-US" altLang="zh-TW" sz="1400" b="1" dirty="0"/>
+                <a:t>Docker</a:t>
+              </a:r>
+            </a:p>
+            <a:p>
+              <a:pPr algn="ctr"/>
+              <a:r>
+                <a:rPr lang="en-US" altLang="zh-TW" sz="1400" b="1" dirty="0"/>
+                <a:t>Publish Registry</a:t>
+              </a:r>
+              <a:endParaRPr lang="zh-TW" altLang="en-US" sz="1400" b="1" dirty="0"/>
+            </a:p>
+          </p:txBody>
+        </p:sp>
+      </p:grpSp>
+      <p:cxnSp>
+        <p:nvCxnSpPr>
+          <p:cNvPr id="100" name="直線單箭頭接點 99">
+            <a:extLst>
+              <a:ext uri="{FF2B5EF4-FFF2-40B4-BE49-F238E27FC236}">
+                <a16:creationId xmlns:a16="http://schemas.microsoft.com/office/drawing/2014/main" id="{D283FC6B-C099-48F1-8C90-3DDC86C9B564}"/>
+              </a:ext>
+            </a:extLst>
+          </p:cNvPr>
+          <p:cNvCxnSpPr>
+            <a:cxnSpLocks/>
+          </p:cNvCxnSpPr>
+          <p:nvPr/>
+        </p:nvCxnSpPr>
+        <p:spPr>
+          <a:xfrm>
+            <a:off x="6282519" y="1573306"/>
+            <a:ext cx="2102416" cy="1223158"/>
+          </a:xfrm>
+          <a:prstGeom prst="straightConnector1">
+            <a:avLst/>
+          </a:prstGeom>
+          <a:ln w="38100">
+            <a:headEnd type="none" w="med" len="med"/>
+            <a:tailEnd type="arrow" w="med" len="med"/>
+          </a:ln>
+        </p:spPr>
+        <p:style>
+          <a:lnRef idx="3">
+            <a:schemeClr val="dk1"/>
+          </a:lnRef>
+          <a:fillRef idx="0">
+            <a:schemeClr val="dk1"/>
+          </a:fillRef>
+          <a:effectRef idx="2">
+            <a:schemeClr val="dk1"/>
+          </a:effectRef>
+          <a:fontRef idx="minor">
+            <a:schemeClr val="tx1"/>
+          </a:fontRef>
+        </p:style>
+      </p:cxnSp>
+      <p:grpSp>
+        <p:nvGrpSpPr>
+          <p:cNvPr id="101" name="群組 100">
+            <a:extLst>
+              <a:ext uri="{FF2B5EF4-FFF2-40B4-BE49-F238E27FC236}">
+                <a16:creationId xmlns:a16="http://schemas.microsoft.com/office/drawing/2014/main" id="{AA4F6D45-9D7C-4682-AA77-E6A910CDF095}"/>
+              </a:ext>
+            </a:extLst>
+          </p:cNvPr>
+          <p:cNvGrpSpPr/>
+          <p:nvPr/>
+        </p:nvGrpSpPr>
+        <p:grpSpPr>
+          <a:xfrm>
+            <a:off x="9205629" y="4756991"/>
+            <a:ext cx="1362690" cy="1101000"/>
+            <a:chOff x="5091294" y="575400"/>
+            <a:chExt cx="1362690" cy="1101000"/>
+          </a:xfrm>
+        </p:grpSpPr>
+        <p:sp>
+          <p:nvSpPr>
+            <p:cNvPr id="102" name="矩形: 圓角 101">
+              <a:extLst>
+                <a:ext uri="{FF2B5EF4-FFF2-40B4-BE49-F238E27FC236}">
+                  <a16:creationId xmlns:a16="http://schemas.microsoft.com/office/drawing/2014/main" id="{4501142F-5A43-4ABF-91A5-659645F2A68C}"/>
+                </a:ext>
+              </a:extLst>
+            </p:cNvPr>
+            <p:cNvSpPr/>
+            <p:nvPr/>
+          </p:nvSpPr>
+          <p:spPr>
+            <a:xfrm>
+              <a:off x="5142639" y="596400"/>
+              <a:ext cx="1260000" cy="1080000"/>
+            </a:xfrm>
+            <a:prstGeom prst="roundRect">
+              <a:avLst/>
+            </a:prstGeom>
+          </p:spPr>
+          <p:style>
+            <a:lnRef idx="2">
+              <a:schemeClr val="accent1"/>
+            </a:lnRef>
+            <a:fillRef idx="1">
+              <a:schemeClr val="lt1"/>
+            </a:fillRef>
+            <a:effectRef idx="0">
+              <a:schemeClr val="accent1"/>
+            </a:effectRef>
+            <a:fontRef idx="minor">
+              <a:schemeClr val="dk1"/>
+            </a:fontRef>
+          </p:style>
+          <p:txBody>
+            <a:bodyPr rtlCol="0" anchor="ctr"/>
+            <a:lstStyle/>
+            <a:p>
+              <a:pPr algn="ctr"/>
+              <a:endParaRPr lang="zh-TW" altLang="en-US" b="1"/>
+            </a:p>
+          </p:txBody>
+        </p:sp>
+        <p:pic>
+          <p:nvPicPr>
+            <p:cNvPr id="103" name="圖片 102">
+              <a:extLst>
+                <a:ext uri="{FF2B5EF4-FFF2-40B4-BE49-F238E27FC236}">
+                  <a16:creationId xmlns:a16="http://schemas.microsoft.com/office/drawing/2014/main" id="{37E754D4-3491-4EDB-A2F0-C344710F6027}"/>
+                </a:ext>
+              </a:extLst>
+            </p:cNvPr>
+            <p:cNvPicPr>
+              <a:picLocks noChangeAspect="1"/>
+            </p:cNvPicPr>
+            <p:nvPr/>
+          </p:nvPicPr>
+          <p:blipFill>
+            <a:blip r:embed="rId2">
+              <a:extLst>
+                <a:ext uri="{28A0092B-C50C-407E-A947-70E740481C1C}">
+                  <a14:useLocalDpi xmlns:a14="http://schemas.microsoft.com/office/drawing/2010/main" val="0"/>
+                </a:ext>
+              </a:extLst>
+            </a:blip>
+            <a:stretch>
+              <a:fillRect/>
+            </a:stretch>
+          </p:blipFill>
+          <p:spPr>
+            <a:xfrm>
+              <a:off x="5412639" y="575400"/>
+              <a:ext cx="720000" cy="720000"/>
+            </a:xfrm>
+            <a:prstGeom prst="rect">
+              <a:avLst/>
+            </a:prstGeom>
+          </p:spPr>
+        </p:pic>
+        <p:sp>
+          <p:nvSpPr>
+            <p:cNvPr id="104" name="矩形 103">
+              <a:extLst>
+                <a:ext uri="{FF2B5EF4-FFF2-40B4-BE49-F238E27FC236}">
+                  <a16:creationId xmlns:a16="http://schemas.microsoft.com/office/drawing/2014/main" id="{C507CAFA-4F5D-4668-AF79-71C4298FAFC0}"/>
+                </a:ext>
+              </a:extLst>
+            </p:cNvPr>
+            <p:cNvSpPr/>
+            <p:nvPr/>
+          </p:nvSpPr>
+          <p:spPr>
+            <a:xfrm>
+              <a:off x="5091294" y="1143000"/>
+              <a:ext cx="1362690" cy="523220"/>
+            </a:xfrm>
+            <a:prstGeom prst="rect">
+              <a:avLst/>
+            </a:prstGeom>
+          </p:spPr>
+          <p:txBody>
+            <a:bodyPr wrap="square">
+              <a:spAutoFit/>
+            </a:bodyPr>
+            <a:lstStyle/>
+            <a:p>
+              <a:pPr algn="ctr"/>
+              <a:r>
+                <a:rPr lang="en-US" altLang="zh-TW" sz="1400" b="1" dirty="0"/>
+                <a:t>Docker</a:t>
+              </a:r>
+            </a:p>
+            <a:p>
+              <a:pPr algn="ctr"/>
+              <a:r>
+                <a:rPr lang="en-US" altLang="zh-TW" sz="1400" b="1" dirty="0"/>
+                <a:t>Private Registry</a:t>
+              </a:r>
+              <a:endParaRPr lang="zh-TW" altLang="en-US" sz="1400" b="1" dirty="0"/>
+            </a:p>
+          </p:txBody>
+        </p:sp>
+      </p:grpSp>
+      <p:pic>
+        <p:nvPicPr>
+          <p:cNvPr id="110" name="圖片 109" descr="一張含有 監視器, 物件 的圖片&#10;&#10;自動產生的描述">
+            <a:extLst>
+              <a:ext uri="{FF2B5EF4-FFF2-40B4-BE49-F238E27FC236}">
+                <a16:creationId xmlns:a16="http://schemas.microsoft.com/office/drawing/2014/main" id="{87B6ED85-B110-4629-A6DF-BE39995AE21C}"/>
+              </a:ext>
+            </a:extLst>
+          </p:cNvPr>
+          <p:cNvPicPr>
+            <a:picLocks noChangeAspect="1"/>
+          </p:cNvPicPr>
+          <p:nvPr/>
+        </p:nvPicPr>
+        <p:blipFill>
+          <a:blip r:embed="rId4">
+            <a:extLst>
+              <a:ext uri="{28A0092B-C50C-407E-A947-70E740481C1C}">
+                <a14:useLocalDpi xmlns:a14="http://schemas.microsoft.com/office/drawing/2010/main" val="0"/>
+              </a:ext>
+            </a:extLst>
+          </a:blip>
+          <a:stretch>
+            <a:fillRect/>
+          </a:stretch>
+        </p:blipFill>
+        <p:spPr>
+          <a:xfrm>
+            <a:off x="8371742" y="2625586"/>
+            <a:ext cx="720000" cy="720000"/>
+          </a:xfrm>
+          <a:prstGeom prst="rect">
+            <a:avLst/>
+          </a:prstGeom>
+        </p:spPr>
+      </p:pic>
+      <p:grpSp>
+        <p:nvGrpSpPr>
+          <p:cNvPr id="179" name="群組 178">
+            <a:extLst>
+              <a:ext uri="{FF2B5EF4-FFF2-40B4-BE49-F238E27FC236}">
+                <a16:creationId xmlns:a16="http://schemas.microsoft.com/office/drawing/2014/main" id="{2ED786CE-7BFB-4CF9-B824-546168FDB1EB}"/>
+              </a:ext>
+            </a:extLst>
+          </p:cNvPr>
+          <p:cNvGrpSpPr/>
+          <p:nvPr/>
+        </p:nvGrpSpPr>
+        <p:grpSpPr>
+          <a:xfrm>
+            <a:off x="8986974" y="999532"/>
+            <a:ext cx="1800000" cy="1482745"/>
+            <a:chOff x="8986974" y="999532"/>
+            <a:chExt cx="1800000" cy="1482745"/>
+          </a:xfrm>
+        </p:grpSpPr>
+        <p:pic>
+          <p:nvPicPr>
+            <p:cNvPr id="114" name="圖片 113">
+              <a:extLst>
+                <a:ext uri="{FF2B5EF4-FFF2-40B4-BE49-F238E27FC236}">
+                  <a16:creationId xmlns:a16="http://schemas.microsoft.com/office/drawing/2014/main" id="{CD05D398-7759-4E07-9862-E7BC6D12F849}"/>
+                </a:ext>
+              </a:extLst>
+            </p:cNvPr>
+            <p:cNvPicPr>
+              <a:picLocks noChangeAspect="1"/>
+            </p:cNvPicPr>
+            <p:nvPr/>
+          </p:nvPicPr>
+          <p:blipFill>
+            <a:blip r:embed="rId5">
+              <a:extLst>
+                <a:ext uri="{28A0092B-C50C-407E-A947-70E740481C1C}">
+                  <a14:useLocalDpi xmlns:a14="http://schemas.microsoft.com/office/drawing/2010/main" val="0"/>
+                </a:ext>
+              </a:extLst>
+            </a:blip>
+            <a:stretch>
+              <a:fillRect/>
+            </a:stretch>
+          </p:blipFill>
+          <p:spPr>
+            <a:xfrm>
+              <a:off x="9346974" y="999532"/>
+              <a:ext cx="1080000" cy="1080000"/>
+            </a:xfrm>
+            <a:prstGeom prst="rect">
+              <a:avLst/>
+            </a:prstGeom>
+          </p:spPr>
+        </p:pic>
+        <p:sp>
+          <p:nvSpPr>
+            <p:cNvPr id="115" name="矩形 114">
+              <a:extLst>
+                <a:ext uri="{FF2B5EF4-FFF2-40B4-BE49-F238E27FC236}">
+                  <a16:creationId xmlns:a16="http://schemas.microsoft.com/office/drawing/2014/main" id="{FA88BD18-CBC1-4C14-AA96-FEFF2D3774F8}"/>
+                </a:ext>
+              </a:extLst>
+            </p:cNvPr>
+            <p:cNvSpPr/>
+            <p:nvPr/>
+          </p:nvSpPr>
+          <p:spPr>
+            <a:xfrm>
+              <a:off x="8986974" y="2112945"/>
+              <a:ext cx="1800000" cy="369332"/>
+            </a:xfrm>
+            <a:prstGeom prst="rect">
+              <a:avLst/>
+            </a:prstGeom>
+          </p:spPr>
+          <p:txBody>
+            <a:bodyPr wrap="square">
+              <a:spAutoFit/>
+            </a:bodyPr>
+            <a:lstStyle/>
+            <a:p>
+              <a:pPr algn="ctr"/>
+              <a:r>
+                <a:rPr lang="en-US" altLang="zh-TW" b="1" dirty="0"/>
+                <a:t>Servers</a:t>
+              </a:r>
+              <a:endParaRPr lang="zh-TW" altLang="en-US" b="1" dirty="0"/>
+            </a:p>
+          </p:txBody>
+        </p:sp>
+      </p:grpSp>
+      <p:grpSp>
+        <p:nvGrpSpPr>
+          <p:cNvPr id="198" name="群組 197">
+            <a:extLst>
+              <a:ext uri="{FF2B5EF4-FFF2-40B4-BE49-F238E27FC236}">
+                <a16:creationId xmlns:a16="http://schemas.microsoft.com/office/drawing/2014/main" id="{2DB256A7-4320-423A-A1C9-B15ACB991CF5}"/>
+              </a:ext>
+            </a:extLst>
+          </p:cNvPr>
+          <p:cNvGrpSpPr/>
+          <p:nvPr/>
+        </p:nvGrpSpPr>
+        <p:grpSpPr>
+          <a:xfrm>
+            <a:off x="381000" y="2465203"/>
+            <a:ext cx="1917626" cy="1311034"/>
+            <a:chOff x="609600" y="2446025"/>
+            <a:chExt cx="1917626" cy="1311034"/>
+          </a:xfrm>
+        </p:grpSpPr>
+        <p:grpSp>
+          <p:nvGrpSpPr>
+            <p:cNvPr id="43" name="群組 42">
+              <a:extLst>
+                <a:ext uri="{FF2B5EF4-FFF2-40B4-BE49-F238E27FC236}">
+                  <a16:creationId xmlns:a16="http://schemas.microsoft.com/office/drawing/2014/main" id="{B9916634-A84C-49C7-B8F5-29A6C1FCCF63}"/>
+                </a:ext>
+              </a:extLst>
+            </p:cNvPr>
+            <p:cNvGrpSpPr/>
+            <p:nvPr/>
+          </p:nvGrpSpPr>
+          <p:grpSpPr>
+            <a:xfrm>
+              <a:off x="609600" y="2803438"/>
+              <a:ext cx="1917626" cy="953621"/>
+              <a:chOff x="1064896" y="2957588"/>
+              <a:chExt cx="1917626" cy="953621"/>
+            </a:xfrm>
+          </p:grpSpPr>
+          <p:sp>
+            <p:nvSpPr>
+              <p:cNvPr id="37" name="矩形 36">
+                <a:extLst>
+                  <a:ext uri="{FF2B5EF4-FFF2-40B4-BE49-F238E27FC236}">
+                    <a16:creationId xmlns:a16="http://schemas.microsoft.com/office/drawing/2014/main" id="{E73E0054-A3D3-49F0-83F3-6FD02E48D17B}"/>
+                  </a:ext>
+                </a:extLst>
+              </p:cNvPr>
+              <p:cNvSpPr/>
+              <p:nvPr/>
+            </p:nvSpPr>
+            <p:spPr>
+              <a:xfrm>
+                <a:off x="1603584" y="2973660"/>
+                <a:ext cx="1368000" cy="252000"/>
+              </a:xfrm>
+              <a:prstGeom prst="rect">
+                <a:avLst/>
+              </a:prstGeom>
+            </p:spPr>
+            <p:style>
+              <a:lnRef idx="0">
+                <a:schemeClr val="accent2"/>
+              </a:lnRef>
+              <a:fillRef idx="3">
+                <a:schemeClr val="accent2"/>
+              </a:fillRef>
+              <a:effectRef idx="3">
+                <a:schemeClr val="accent2"/>
+              </a:effectRef>
+              <a:fontRef idx="minor">
+                <a:schemeClr val="lt1"/>
+              </a:fontRef>
+            </p:style>
+            <p:txBody>
+              <a:bodyPr rtlCol="0" anchor="ctr"/>
+              <a:lstStyle/>
+              <a:p>
+                <a:pPr algn="ctr"/>
+                <a:r>
+                  <a:rPr lang="en-US" altLang="zh-TW" sz="1400" b="1" dirty="0"/>
+                  <a:t>Project DLL</a:t>
+                </a:r>
+                <a:endParaRPr lang="zh-TW" altLang="en-US" sz="1400" b="1" dirty="0"/>
+              </a:p>
+            </p:txBody>
+          </p:sp>
+          <p:sp>
+            <p:nvSpPr>
+              <p:cNvPr id="38" name="矩形 37">
+                <a:extLst>
+                  <a:ext uri="{FF2B5EF4-FFF2-40B4-BE49-F238E27FC236}">
+                    <a16:creationId xmlns:a16="http://schemas.microsoft.com/office/drawing/2014/main" id="{A12098F5-0A30-4F34-B38D-D06F119ADF91}"/>
+                  </a:ext>
+                </a:extLst>
+              </p:cNvPr>
+              <p:cNvSpPr/>
+              <p:nvPr/>
+            </p:nvSpPr>
+            <p:spPr>
+              <a:xfrm>
+                <a:off x="1612340" y="3288835"/>
+                <a:ext cx="1368000" cy="252000"/>
+              </a:xfrm>
+              <a:prstGeom prst="rect">
+                <a:avLst/>
+              </a:prstGeom>
+            </p:spPr>
+            <p:style>
+              <a:lnRef idx="0">
+                <a:schemeClr val="accent5"/>
+              </a:lnRef>
+              <a:fillRef idx="3">
+                <a:schemeClr val="accent5"/>
+              </a:fillRef>
+              <a:effectRef idx="3">
+                <a:schemeClr val="accent5"/>
+              </a:effectRef>
+              <a:fontRef idx="minor">
+                <a:schemeClr val="lt1"/>
+              </a:fontRef>
+            </p:style>
+            <p:txBody>
+              <a:bodyPr rtlCol="0" anchor="ctr"/>
+              <a:lstStyle/>
+              <a:p>
+                <a:pPr algn="ctr"/>
+                <a:r>
+                  <a:rPr lang="en-US" altLang="zh-TW" sz="1400" b="1" dirty="0"/>
+                  <a:t>Third-party DLL</a:t>
+                </a:r>
+                <a:endParaRPr lang="zh-TW" altLang="en-US" sz="1400" b="1" dirty="0"/>
+              </a:p>
+            </p:txBody>
+          </p:sp>
+          <p:sp>
+            <p:nvSpPr>
+              <p:cNvPr id="39" name="矩形 38">
+                <a:extLst>
+                  <a:ext uri="{FF2B5EF4-FFF2-40B4-BE49-F238E27FC236}">
+                    <a16:creationId xmlns:a16="http://schemas.microsoft.com/office/drawing/2014/main" id="{45D4BDF3-23AC-4344-871A-A8C0BBEB9EAC}"/>
+                  </a:ext>
+                </a:extLst>
+              </p:cNvPr>
+              <p:cNvSpPr/>
+              <p:nvPr/>
+            </p:nvSpPr>
+            <p:spPr>
+              <a:xfrm>
+                <a:off x="1614522" y="3608135"/>
+                <a:ext cx="1368000" cy="252000"/>
+              </a:xfrm>
+              <a:prstGeom prst="rect">
+                <a:avLst/>
+              </a:prstGeom>
+            </p:spPr>
+            <p:style>
+              <a:lnRef idx="0">
+                <a:schemeClr val="accent5"/>
+              </a:lnRef>
+              <a:fillRef idx="3">
+                <a:schemeClr val="accent5"/>
+              </a:fillRef>
+              <a:effectRef idx="3">
+                <a:schemeClr val="accent5"/>
+              </a:effectRef>
+              <a:fontRef idx="minor">
+                <a:schemeClr val="lt1"/>
+              </a:fontRef>
+            </p:style>
+            <p:txBody>
+              <a:bodyPr rtlCol="0" anchor="ctr"/>
+              <a:lstStyle/>
+              <a:p>
+                <a:pPr algn="ctr"/>
+                <a:r>
+                  <a:rPr lang="en-US" altLang="zh-TW" sz="1400" b="1" dirty="0"/>
+                  <a:t>Base Image</a:t>
+                </a:r>
+                <a:endParaRPr lang="zh-TW" altLang="en-US" sz="1400" b="1" dirty="0"/>
+              </a:p>
+            </p:txBody>
+          </p:sp>
+          <p:sp>
+            <p:nvSpPr>
+              <p:cNvPr id="40" name="文字方塊 39">
+                <a:extLst>
+                  <a:ext uri="{FF2B5EF4-FFF2-40B4-BE49-F238E27FC236}">
+                    <a16:creationId xmlns:a16="http://schemas.microsoft.com/office/drawing/2014/main" id="{D739B96D-C060-4065-9626-098543EC10CF}"/>
+                  </a:ext>
+                </a:extLst>
+              </p:cNvPr>
+              <p:cNvSpPr txBox="1"/>
+              <p:nvPr/>
+            </p:nvSpPr>
+            <p:spPr>
+              <a:xfrm>
+                <a:off x="1065613" y="3603432"/>
+                <a:ext cx="572593" cy="307777"/>
+              </a:xfrm>
+              <a:prstGeom prst="rect">
+                <a:avLst/>
+              </a:prstGeom>
+              <a:noFill/>
+            </p:spPr>
+            <p:txBody>
+              <a:bodyPr wrap="none" rtlCol="0">
+                <a:spAutoFit/>
+              </a:bodyPr>
+              <a:lstStyle/>
+              <a:p>
+                <a:r>
+                  <a:rPr lang="en-US" altLang="zh-TW" sz="1400" b="1" dirty="0" err="1"/>
+                  <a:t>sha</a:t>
+                </a:r>
+                <a:r>
+                  <a:rPr lang="en-US" altLang="zh-TW" sz="1400" b="1" dirty="0"/>
+                  <a:t> 1</a:t>
+                </a:r>
+                <a:endParaRPr lang="zh-TW" altLang="en-US" sz="1400" b="1" dirty="0"/>
+              </a:p>
+            </p:txBody>
+          </p:sp>
+          <p:sp>
+            <p:nvSpPr>
+              <p:cNvPr id="41" name="文字方塊 40">
+                <a:extLst>
+                  <a:ext uri="{FF2B5EF4-FFF2-40B4-BE49-F238E27FC236}">
+                    <a16:creationId xmlns:a16="http://schemas.microsoft.com/office/drawing/2014/main" id="{7D4CB755-03AE-44E3-B9A6-6D1BAFB12D7F}"/>
+                  </a:ext>
+                </a:extLst>
+              </p:cNvPr>
+              <p:cNvSpPr txBox="1"/>
+              <p:nvPr/>
+            </p:nvSpPr>
+            <p:spPr>
+              <a:xfrm>
+                <a:off x="1065613" y="3286270"/>
+                <a:ext cx="572593" cy="307777"/>
+              </a:xfrm>
+              <a:prstGeom prst="rect">
+                <a:avLst/>
+              </a:prstGeom>
+              <a:noFill/>
+            </p:spPr>
+            <p:txBody>
+              <a:bodyPr wrap="none" rtlCol="0">
+                <a:spAutoFit/>
+              </a:bodyPr>
+              <a:lstStyle/>
+              <a:p>
+                <a:r>
+                  <a:rPr lang="en-US" altLang="zh-TW" sz="1400" b="1" dirty="0" err="1"/>
+                  <a:t>sha</a:t>
+                </a:r>
+                <a:r>
+                  <a:rPr lang="en-US" altLang="zh-TW" sz="1400" b="1" dirty="0"/>
+                  <a:t> 2</a:t>
+                </a:r>
+                <a:endParaRPr lang="zh-TW" altLang="en-US" sz="1400" b="1" dirty="0"/>
+              </a:p>
+            </p:txBody>
+          </p:sp>
+          <p:sp>
+            <p:nvSpPr>
+              <p:cNvPr id="42" name="文字方塊 41">
+                <a:extLst>
+                  <a:ext uri="{FF2B5EF4-FFF2-40B4-BE49-F238E27FC236}">
+                    <a16:creationId xmlns:a16="http://schemas.microsoft.com/office/drawing/2014/main" id="{EBAE9D9D-C0AF-49AC-AB53-B033B36038C1}"/>
+                  </a:ext>
+                </a:extLst>
+              </p:cNvPr>
+              <p:cNvSpPr txBox="1"/>
+              <p:nvPr/>
+            </p:nvSpPr>
+            <p:spPr>
+              <a:xfrm>
+                <a:off x="1064896" y="2957588"/>
+                <a:ext cx="572593" cy="307777"/>
+              </a:xfrm>
+              <a:prstGeom prst="rect">
+                <a:avLst/>
+              </a:prstGeom>
+              <a:noFill/>
+            </p:spPr>
+            <p:txBody>
+              <a:bodyPr wrap="none" rtlCol="0">
+                <a:spAutoFit/>
+              </a:bodyPr>
+              <a:lstStyle/>
+              <a:p>
+                <a:r>
+                  <a:rPr lang="en-US" altLang="zh-TW" sz="1400" b="1" dirty="0" err="1"/>
+                  <a:t>sha</a:t>
+                </a:r>
+                <a:r>
+                  <a:rPr lang="en-US" altLang="zh-TW" sz="1400" b="1" dirty="0"/>
+                  <a:t> 3</a:t>
+                </a:r>
+                <a:endParaRPr lang="zh-TW" altLang="en-US" sz="1400" b="1" dirty="0"/>
+              </a:p>
+            </p:txBody>
+          </p:sp>
+        </p:grpSp>
+        <p:sp>
+          <p:nvSpPr>
+            <p:cNvPr id="117" name="文字方塊 116">
+              <a:extLst>
+                <a:ext uri="{FF2B5EF4-FFF2-40B4-BE49-F238E27FC236}">
+                  <a16:creationId xmlns:a16="http://schemas.microsoft.com/office/drawing/2014/main" id="{8A942767-6630-4B11-A1D6-C67CB6BAED53}"/>
+                </a:ext>
+              </a:extLst>
+            </p:cNvPr>
+            <p:cNvSpPr txBox="1"/>
+            <p:nvPr/>
+          </p:nvSpPr>
+          <p:spPr>
+            <a:xfrm>
+              <a:off x="1142815" y="2446025"/>
+              <a:ext cx="877163" cy="369332"/>
+            </a:xfrm>
+            <a:prstGeom prst="rect">
+              <a:avLst/>
+            </a:prstGeom>
+            <a:noFill/>
+          </p:spPr>
+          <p:txBody>
+            <a:bodyPr wrap="none" rtlCol="0">
+              <a:spAutoFit/>
+            </a:bodyPr>
+            <a:lstStyle/>
+            <a:p>
+              <a:r>
+                <a:rPr lang="en-US" altLang="zh-TW" b="1" dirty="0"/>
+                <a:t>1. Push</a:t>
+              </a:r>
+              <a:endParaRPr lang="zh-TW" altLang="en-US" b="1" dirty="0"/>
+            </a:p>
+          </p:txBody>
+        </p:sp>
+      </p:grpSp>
+      <p:grpSp>
+        <p:nvGrpSpPr>
+          <p:cNvPr id="166" name="群組 165">
+            <a:extLst>
+              <a:ext uri="{FF2B5EF4-FFF2-40B4-BE49-F238E27FC236}">
+                <a16:creationId xmlns:a16="http://schemas.microsoft.com/office/drawing/2014/main" id="{D9F38489-107B-46CE-9BA1-C2D08BD909CD}"/>
+              </a:ext>
+            </a:extLst>
+          </p:cNvPr>
+          <p:cNvGrpSpPr/>
+          <p:nvPr/>
+        </p:nvGrpSpPr>
+        <p:grpSpPr>
+          <a:xfrm>
+            <a:off x="3234056" y="1186333"/>
+            <a:ext cx="1916909" cy="986186"/>
+            <a:chOff x="4619292" y="1770822"/>
+            <a:chExt cx="1916909" cy="986186"/>
+          </a:xfrm>
+        </p:grpSpPr>
+        <p:grpSp>
+          <p:nvGrpSpPr>
+            <p:cNvPr id="44" name="群組 43">
+              <a:extLst>
+                <a:ext uri="{FF2B5EF4-FFF2-40B4-BE49-F238E27FC236}">
+                  <a16:creationId xmlns:a16="http://schemas.microsoft.com/office/drawing/2014/main" id="{4C7C1324-57DB-45D4-9970-B7B2F9995082}"/>
+                </a:ext>
+              </a:extLst>
+            </p:cNvPr>
+            <p:cNvGrpSpPr/>
+            <p:nvPr/>
+          </p:nvGrpSpPr>
+          <p:grpSpPr>
+            <a:xfrm>
+              <a:off x="4619292" y="2132069"/>
+              <a:ext cx="1916909" cy="624939"/>
+              <a:chOff x="1065613" y="3286270"/>
+              <a:chExt cx="1916909" cy="624939"/>
+            </a:xfrm>
+          </p:grpSpPr>
+          <p:sp>
+            <p:nvSpPr>
+              <p:cNvPr id="46" name="矩形 45">
+                <a:extLst>
+                  <a:ext uri="{FF2B5EF4-FFF2-40B4-BE49-F238E27FC236}">
+                    <a16:creationId xmlns:a16="http://schemas.microsoft.com/office/drawing/2014/main" id="{90960FE6-5C7A-4ED1-A61E-C1BF18C550FE}"/>
+                  </a:ext>
+                </a:extLst>
+              </p:cNvPr>
+              <p:cNvSpPr/>
+              <p:nvPr/>
+            </p:nvSpPr>
+            <p:spPr>
+              <a:xfrm>
+                <a:off x="1612340" y="3288835"/>
+                <a:ext cx="1368000" cy="252000"/>
+              </a:xfrm>
+              <a:prstGeom prst="rect">
+                <a:avLst/>
+              </a:prstGeom>
+            </p:spPr>
+            <p:style>
+              <a:lnRef idx="0">
+                <a:schemeClr val="accent5"/>
+              </a:lnRef>
+              <a:fillRef idx="3">
+                <a:schemeClr val="accent5"/>
+              </a:fillRef>
+              <a:effectRef idx="3">
+                <a:schemeClr val="accent5"/>
+              </a:effectRef>
+              <a:fontRef idx="minor">
+                <a:schemeClr val="lt1"/>
+              </a:fontRef>
+            </p:style>
+            <p:txBody>
+              <a:bodyPr rtlCol="0" anchor="ctr"/>
+              <a:lstStyle/>
+              <a:p>
+                <a:pPr algn="ctr"/>
+                <a:r>
+                  <a:rPr lang="en-US" altLang="zh-TW" sz="1400" b="1" dirty="0"/>
+                  <a:t>Third-party DLL</a:t>
+                </a:r>
+                <a:endParaRPr lang="zh-TW" altLang="en-US" sz="1400" b="1" dirty="0"/>
+              </a:p>
+            </p:txBody>
+          </p:sp>
+          <p:sp>
+            <p:nvSpPr>
+              <p:cNvPr id="47" name="矩形 46">
+                <a:extLst>
+                  <a:ext uri="{FF2B5EF4-FFF2-40B4-BE49-F238E27FC236}">
+                    <a16:creationId xmlns:a16="http://schemas.microsoft.com/office/drawing/2014/main" id="{C98AF79A-5985-42CC-B288-59D5A295A624}"/>
+                  </a:ext>
+                </a:extLst>
+              </p:cNvPr>
+              <p:cNvSpPr/>
+              <p:nvPr/>
+            </p:nvSpPr>
+            <p:spPr>
+              <a:xfrm>
+                <a:off x="1614522" y="3608135"/>
+                <a:ext cx="1368000" cy="252000"/>
+              </a:xfrm>
+              <a:prstGeom prst="rect">
+                <a:avLst/>
+              </a:prstGeom>
+            </p:spPr>
+            <p:style>
+              <a:lnRef idx="0">
+                <a:schemeClr val="accent5"/>
+              </a:lnRef>
+              <a:fillRef idx="3">
+                <a:schemeClr val="accent5"/>
+              </a:fillRef>
+              <a:effectRef idx="3">
+                <a:schemeClr val="accent5"/>
+              </a:effectRef>
+              <a:fontRef idx="minor">
+                <a:schemeClr val="lt1"/>
+              </a:fontRef>
+            </p:style>
+            <p:txBody>
+              <a:bodyPr rtlCol="0" anchor="ctr"/>
+              <a:lstStyle/>
+              <a:p>
+                <a:pPr algn="ctr"/>
+                <a:r>
+                  <a:rPr lang="en-US" altLang="zh-TW" sz="1400" b="1" dirty="0"/>
+                  <a:t>Base Image</a:t>
+                </a:r>
+                <a:endParaRPr lang="zh-TW" altLang="en-US" sz="1400" b="1" dirty="0"/>
+              </a:p>
+            </p:txBody>
+          </p:sp>
+          <p:sp>
+            <p:nvSpPr>
+              <p:cNvPr id="48" name="文字方塊 47">
+                <a:extLst>
+                  <a:ext uri="{FF2B5EF4-FFF2-40B4-BE49-F238E27FC236}">
+                    <a16:creationId xmlns:a16="http://schemas.microsoft.com/office/drawing/2014/main" id="{A8B5CC02-792C-4DB8-8147-9CCA96AB73D2}"/>
+                  </a:ext>
+                </a:extLst>
+              </p:cNvPr>
+              <p:cNvSpPr txBox="1"/>
+              <p:nvPr/>
+            </p:nvSpPr>
+            <p:spPr>
+              <a:xfrm>
+                <a:off x="1065613" y="3603432"/>
+                <a:ext cx="572593" cy="307777"/>
+              </a:xfrm>
+              <a:prstGeom prst="rect">
+                <a:avLst/>
+              </a:prstGeom>
+              <a:noFill/>
+            </p:spPr>
+            <p:txBody>
+              <a:bodyPr wrap="none" rtlCol="0">
+                <a:spAutoFit/>
+              </a:bodyPr>
+              <a:lstStyle/>
+              <a:p>
+                <a:r>
+                  <a:rPr lang="en-US" altLang="zh-TW" sz="1400" b="1" dirty="0" err="1"/>
+                  <a:t>sha</a:t>
+                </a:r>
+                <a:r>
+                  <a:rPr lang="en-US" altLang="zh-TW" sz="1400" b="1" dirty="0"/>
+                  <a:t> 1</a:t>
+                </a:r>
+                <a:endParaRPr lang="zh-TW" altLang="en-US" sz="1400" b="1" dirty="0"/>
+              </a:p>
+            </p:txBody>
+          </p:sp>
+          <p:sp>
+            <p:nvSpPr>
+              <p:cNvPr id="49" name="文字方塊 48">
+                <a:extLst>
+                  <a:ext uri="{FF2B5EF4-FFF2-40B4-BE49-F238E27FC236}">
+                    <a16:creationId xmlns:a16="http://schemas.microsoft.com/office/drawing/2014/main" id="{0CECD161-C434-4F4B-9C98-A42ACB52F919}"/>
+                  </a:ext>
+                </a:extLst>
+              </p:cNvPr>
+              <p:cNvSpPr txBox="1"/>
+              <p:nvPr/>
+            </p:nvSpPr>
+            <p:spPr>
+              <a:xfrm>
+                <a:off x="1065613" y="3286270"/>
+                <a:ext cx="572593" cy="307777"/>
+              </a:xfrm>
+              <a:prstGeom prst="rect">
+                <a:avLst/>
+              </a:prstGeom>
+              <a:noFill/>
+            </p:spPr>
+            <p:txBody>
+              <a:bodyPr wrap="none" rtlCol="0">
+                <a:spAutoFit/>
+              </a:bodyPr>
+              <a:lstStyle/>
+              <a:p>
+                <a:r>
+                  <a:rPr lang="en-US" altLang="zh-TW" sz="1400" b="1" dirty="0" err="1"/>
+                  <a:t>sha</a:t>
+                </a:r>
+                <a:r>
+                  <a:rPr lang="en-US" altLang="zh-TW" sz="1400" b="1" dirty="0"/>
+                  <a:t> 2</a:t>
+                </a:r>
+                <a:endParaRPr lang="zh-TW" altLang="en-US" sz="1400" b="1" dirty="0"/>
+              </a:p>
+            </p:txBody>
+          </p:sp>
+        </p:grpSp>
+        <p:sp>
+          <p:nvSpPr>
+            <p:cNvPr id="118" name="文字方塊 117">
+              <a:extLst>
+                <a:ext uri="{FF2B5EF4-FFF2-40B4-BE49-F238E27FC236}">
+                  <a16:creationId xmlns:a16="http://schemas.microsoft.com/office/drawing/2014/main" id="{BF151340-C968-41A4-947E-9ED00F6E08AF}"/>
+                </a:ext>
+              </a:extLst>
+            </p:cNvPr>
+            <p:cNvSpPr txBox="1"/>
+            <p:nvPr/>
+          </p:nvSpPr>
+          <p:spPr>
+            <a:xfrm>
+              <a:off x="5142059" y="1770822"/>
+              <a:ext cx="877163" cy="369332"/>
+            </a:xfrm>
+            <a:prstGeom prst="rect">
+              <a:avLst/>
+            </a:prstGeom>
+            <a:noFill/>
+          </p:spPr>
+          <p:txBody>
+            <a:bodyPr wrap="none" rtlCol="0">
+              <a:spAutoFit/>
+            </a:bodyPr>
+            <a:lstStyle/>
+            <a:p>
+              <a:r>
+                <a:rPr lang="en-US" altLang="zh-TW" b="1" dirty="0"/>
+                <a:t>2. Push</a:t>
+              </a:r>
+              <a:endParaRPr lang="zh-TW" altLang="en-US" b="1" dirty="0"/>
+            </a:p>
+          </p:txBody>
+        </p:sp>
+      </p:grpSp>
+      <p:cxnSp>
+        <p:nvCxnSpPr>
+          <p:cNvPr id="120" name="直線單箭頭接點 119">
+            <a:extLst>
+              <a:ext uri="{FF2B5EF4-FFF2-40B4-BE49-F238E27FC236}">
+                <a16:creationId xmlns:a16="http://schemas.microsoft.com/office/drawing/2014/main" id="{840B7BF5-8AC5-4F21-99B6-2CFE21291032}"/>
+              </a:ext>
+            </a:extLst>
+          </p:cNvPr>
+          <p:cNvCxnSpPr>
+            <a:cxnSpLocks/>
+            <a:stCxn id="110" idx="2"/>
+          </p:cNvCxnSpPr>
+          <p:nvPr/>
+        </p:nvCxnSpPr>
+        <p:spPr>
+          <a:xfrm>
+            <a:off x="8731742" y="3345586"/>
+            <a:ext cx="601974" cy="1498871"/>
+          </a:xfrm>
+          <a:prstGeom prst="straightConnector1">
+            <a:avLst/>
+          </a:prstGeom>
+          <a:ln w="38100">
+            <a:headEnd type="none" w="med" len="med"/>
+            <a:tailEnd type="arrow" w="med" len="med"/>
+          </a:ln>
+        </p:spPr>
+        <p:style>
+          <a:lnRef idx="3">
+            <a:schemeClr val="dk1"/>
+          </a:lnRef>
+          <a:fillRef idx="0">
+            <a:schemeClr val="dk1"/>
+          </a:fillRef>
+          <a:effectRef idx="2">
+            <a:schemeClr val="dk1"/>
+          </a:effectRef>
+          <a:fontRef idx="minor">
+            <a:schemeClr val="tx1"/>
+          </a:fontRef>
+        </p:style>
+      </p:cxnSp>
+      <p:grpSp>
+        <p:nvGrpSpPr>
+          <p:cNvPr id="172" name="群組 171">
+            <a:extLst>
+              <a:ext uri="{FF2B5EF4-FFF2-40B4-BE49-F238E27FC236}">
+                <a16:creationId xmlns:a16="http://schemas.microsoft.com/office/drawing/2014/main" id="{D145DF98-35BD-4C12-960A-B3033BF64E9B}"/>
+              </a:ext>
+            </a:extLst>
+          </p:cNvPr>
+          <p:cNvGrpSpPr/>
+          <p:nvPr/>
+        </p:nvGrpSpPr>
+        <p:grpSpPr>
+          <a:xfrm>
+            <a:off x="6937144" y="3152591"/>
+            <a:ext cx="1916909" cy="999345"/>
+            <a:chOff x="7195660" y="3659186"/>
+            <a:chExt cx="1916909" cy="999345"/>
+          </a:xfrm>
+        </p:grpSpPr>
+        <p:grpSp>
+          <p:nvGrpSpPr>
+            <p:cNvPr id="125" name="群組 124">
+              <a:extLst>
+                <a:ext uri="{FF2B5EF4-FFF2-40B4-BE49-F238E27FC236}">
+                  <a16:creationId xmlns:a16="http://schemas.microsoft.com/office/drawing/2014/main" id="{090A2CA6-2996-4474-BFE7-F9518FF359E5}"/>
+                </a:ext>
+              </a:extLst>
+            </p:cNvPr>
+            <p:cNvGrpSpPr/>
+            <p:nvPr/>
+          </p:nvGrpSpPr>
+          <p:grpSpPr>
+            <a:xfrm>
+              <a:off x="7195660" y="4033592"/>
+              <a:ext cx="1916909" cy="624939"/>
+              <a:chOff x="1065613" y="3286270"/>
+              <a:chExt cx="1916909" cy="624939"/>
+            </a:xfrm>
+          </p:grpSpPr>
+          <p:sp>
+            <p:nvSpPr>
+              <p:cNvPr id="126" name="矩形 125">
+                <a:extLst>
+                  <a:ext uri="{FF2B5EF4-FFF2-40B4-BE49-F238E27FC236}">
+                    <a16:creationId xmlns:a16="http://schemas.microsoft.com/office/drawing/2014/main" id="{69FDEC91-EC7A-4A84-B22C-E2836699576A}"/>
+                  </a:ext>
+                </a:extLst>
+              </p:cNvPr>
+              <p:cNvSpPr/>
+              <p:nvPr/>
+            </p:nvSpPr>
+            <p:spPr>
+              <a:xfrm>
+                <a:off x="1612340" y="3288835"/>
+                <a:ext cx="1368000" cy="252000"/>
+              </a:xfrm>
+              <a:prstGeom prst="rect">
+                <a:avLst/>
+              </a:prstGeom>
+            </p:spPr>
+            <p:style>
+              <a:lnRef idx="0">
+                <a:schemeClr val="accent5"/>
+              </a:lnRef>
+              <a:fillRef idx="3">
+                <a:schemeClr val="accent5"/>
+              </a:fillRef>
+              <a:effectRef idx="3">
+                <a:schemeClr val="accent5"/>
+              </a:effectRef>
+              <a:fontRef idx="minor">
+                <a:schemeClr val="lt1"/>
+              </a:fontRef>
+            </p:style>
+            <p:txBody>
+              <a:bodyPr rtlCol="0" anchor="ctr"/>
+              <a:lstStyle/>
+              <a:p>
+                <a:pPr algn="ctr"/>
+                <a:r>
+                  <a:rPr lang="en-US" altLang="zh-TW" sz="1400" b="1" dirty="0"/>
+                  <a:t>Third-party DLL</a:t>
+                </a:r>
+                <a:endParaRPr lang="zh-TW" altLang="en-US" sz="1400" b="1" dirty="0"/>
+              </a:p>
+            </p:txBody>
+          </p:sp>
+          <p:sp>
+            <p:nvSpPr>
+              <p:cNvPr id="127" name="矩形 126">
+                <a:extLst>
+                  <a:ext uri="{FF2B5EF4-FFF2-40B4-BE49-F238E27FC236}">
+                    <a16:creationId xmlns:a16="http://schemas.microsoft.com/office/drawing/2014/main" id="{0860ED37-3F6C-4BC4-AA5E-547723EE5E4E}"/>
+                  </a:ext>
+                </a:extLst>
+              </p:cNvPr>
+              <p:cNvSpPr/>
+              <p:nvPr/>
+            </p:nvSpPr>
+            <p:spPr>
+              <a:xfrm>
+                <a:off x="1614522" y="3608135"/>
+                <a:ext cx="1368000" cy="252000"/>
+              </a:xfrm>
+              <a:prstGeom prst="rect">
+                <a:avLst/>
+              </a:prstGeom>
+            </p:spPr>
+            <p:style>
+              <a:lnRef idx="0">
+                <a:schemeClr val="accent5"/>
+              </a:lnRef>
+              <a:fillRef idx="3">
+                <a:schemeClr val="accent5"/>
+              </a:fillRef>
+              <a:effectRef idx="3">
+                <a:schemeClr val="accent5"/>
+              </a:effectRef>
+              <a:fontRef idx="minor">
+                <a:schemeClr val="lt1"/>
+              </a:fontRef>
+            </p:style>
+            <p:txBody>
+              <a:bodyPr rtlCol="0" anchor="ctr"/>
+              <a:lstStyle/>
+              <a:p>
+                <a:pPr algn="ctr"/>
+                <a:r>
+                  <a:rPr lang="en-US" altLang="zh-TW" sz="1400" b="1" dirty="0"/>
+                  <a:t>Base Image</a:t>
+                </a:r>
+                <a:endParaRPr lang="zh-TW" altLang="en-US" sz="1400" b="1" dirty="0"/>
+              </a:p>
+            </p:txBody>
+          </p:sp>
+          <p:sp>
+            <p:nvSpPr>
+              <p:cNvPr id="128" name="文字方塊 127">
+                <a:extLst>
+                  <a:ext uri="{FF2B5EF4-FFF2-40B4-BE49-F238E27FC236}">
+                    <a16:creationId xmlns:a16="http://schemas.microsoft.com/office/drawing/2014/main" id="{A83CD5E9-8522-4207-AFAD-A5419A4DF167}"/>
+                  </a:ext>
+                </a:extLst>
+              </p:cNvPr>
+              <p:cNvSpPr txBox="1"/>
+              <p:nvPr/>
+            </p:nvSpPr>
+            <p:spPr>
+              <a:xfrm>
+                <a:off x="1065613" y="3603432"/>
+                <a:ext cx="572593" cy="307777"/>
+              </a:xfrm>
+              <a:prstGeom prst="rect">
+                <a:avLst/>
+              </a:prstGeom>
+              <a:noFill/>
+            </p:spPr>
+            <p:txBody>
+              <a:bodyPr wrap="none" rtlCol="0">
+                <a:spAutoFit/>
+              </a:bodyPr>
+              <a:lstStyle/>
+              <a:p>
+                <a:r>
+                  <a:rPr lang="en-US" altLang="zh-TW" sz="1400" b="1" dirty="0" err="1"/>
+                  <a:t>sha</a:t>
+                </a:r>
+                <a:r>
+                  <a:rPr lang="en-US" altLang="zh-TW" sz="1400" b="1" dirty="0"/>
+                  <a:t> 1</a:t>
+                </a:r>
+                <a:endParaRPr lang="zh-TW" altLang="en-US" sz="1400" b="1" dirty="0"/>
+              </a:p>
+            </p:txBody>
+          </p:sp>
+          <p:sp>
+            <p:nvSpPr>
+              <p:cNvPr id="129" name="文字方塊 128">
+                <a:extLst>
+                  <a:ext uri="{FF2B5EF4-FFF2-40B4-BE49-F238E27FC236}">
+                    <a16:creationId xmlns:a16="http://schemas.microsoft.com/office/drawing/2014/main" id="{1AAF30BC-CCF8-41AE-84E9-1FAB2A723080}"/>
+                  </a:ext>
+                </a:extLst>
+              </p:cNvPr>
+              <p:cNvSpPr txBox="1"/>
+              <p:nvPr/>
+            </p:nvSpPr>
+            <p:spPr>
+              <a:xfrm>
+                <a:off x="1065613" y="3286270"/>
+                <a:ext cx="572593" cy="307777"/>
+              </a:xfrm>
+              <a:prstGeom prst="rect">
+                <a:avLst/>
+              </a:prstGeom>
+              <a:noFill/>
+            </p:spPr>
+            <p:txBody>
+              <a:bodyPr wrap="none" rtlCol="0">
+                <a:spAutoFit/>
+              </a:bodyPr>
+              <a:lstStyle/>
+              <a:p>
+                <a:r>
+                  <a:rPr lang="en-US" altLang="zh-TW" sz="1400" b="1" dirty="0" err="1"/>
+                  <a:t>sha</a:t>
+                </a:r>
+                <a:r>
+                  <a:rPr lang="en-US" altLang="zh-TW" sz="1400" b="1" dirty="0"/>
+                  <a:t> 2</a:t>
+                </a:r>
+                <a:endParaRPr lang="zh-TW" altLang="en-US" sz="1400" b="1" dirty="0"/>
+              </a:p>
+            </p:txBody>
+          </p:sp>
+        </p:grpSp>
+        <p:sp>
+          <p:nvSpPr>
+            <p:cNvPr id="130" name="文字方塊 129">
+              <a:extLst>
+                <a:ext uri="{FF2B5EF4-FFF2-40B4-BE49-F238E27FC236}">
+                  <a16:creationId xmlns:a16="http://schemas.microsoft.com/office/drawing/2014/main" id="{7F4321A0-F403-4F29-9CFE-B0B3449A16FD}"/>
+                </a:ext>
+              </a:extLst>
+            </p:cNvPr>
+            <p:cNvSpPr txBox="1"/>
+            <p:nvPr/>
+          </p:nvSpPr>
+          <p:spPr>
+            <a:xfrm>
+              <a:off x="7742387" y="3659186"/>
+              <a:ext cx="877163" cy="369332"/>
+            </a:xfrm>
+            <a:prstGeom prst="rect">
+              <a:avLst/>
+            </a:prstGeom>
+            <a:noFill/>
+          </p:spPr>
+          <p:txBody>
+            <a:bodyPr wrap="none" rtlCol="0">
+              <a:spAutoFit/>
+            </a:bodyPr>
+            <a:lstStyle/>
+            <a:p>
+              <a:r>
+                <a:rPr lang="en-US" altLang="zh-TW" b="1" dirty="0"/>
+                <a:t>4. Push</a:t>
+              </a:r>
+              <a:endParaRPr lang="zh-TW" altLang="en-US" b="1" dirty="0"/>
+            </a:p>
+          </p:txBody>
+        </p:sp>
+      </p:grpSp>
+      <p:grpSp>
+        <p:nvGrpSpPr>
+          <p:cNvPr id="197" name="群組 196">
+            <a:extLst>
+              <a:ext uri="{FF2B5EF4-FFF2-40B4-BE49-F238E27FC236}">
+                <a16:creationId xmlns:a16="http://schemas.microsoft.com/office/drawing/2014/main" id="{8883A3F2-EF6C-49F7-8C56-61EFBBFCC362}"/>
+              </a:ext>
+            </a:extLst>
+          </p:cNvPr>
+          <p:cNvGrpSpPr/>
+          <p:nvPr/>
+        </p:nvGrpSpPr>
+        <p:grpSpPr>
+          <a:xfrm>
+            <a:off x="6814407" y="5532910"/>
+            <a:ext cx="1906688" cy="674109"/>
+            <a:chOff x="6814407" y="5532910"/>
+            <a:chExt cx="1906688" cy="674109"/>
+          </a:xfrm>
+        </p:grpSpPr>
+        <p:grpSp>
+          <p:nvGrpSpPr>
+            <p:cNvPr id="134" name="群組 133">
+              <a:extLst>
+                <a:ext uri="{FF2B5EF4-FFF2-40B4-BE49-F238E27FC236}">
+                  <a16:creationId xmlns:a16="http://schemas.microsoft.com/office/drawing/2014/main" id="{999568A0-D462-4812-ACA6-909065B861AB}"/>
+                </a:ext>
+              </a:extLst>
+            </p:cNvPr>
+            <p:cNvGrpSpPr/>
+            <p:nvPr/>
+          </p:nvGrpSpPr>
+          <p:grpSpPr>
+            <a:xfrm>
+              <a:off x="6814407" y="5899242"/>
+              <a:ext cx="1906688" cy="307777"/>
+              <a:chOff x="1064896" y="2957588"/>
+              <a:chExt cx="1906688" cy="307777"/>
+            </a:xfrm>
+          </p:grpSpPr>
+          <p:sp>
+            <p:nvSpPr>
+              <p:cNvPr id="135" name="矩形 134">
+                <a:extLst>
+                  <a:ext uri="{FF2B5EF4-FFF2-40B4-BE49-F238E27FC236}">
+                    <a16:creationId xmlns:a16="http://schemas.microsoft.com/office/drawing/2014/main" id="{D2190BD6-4AC5-4BAE-831D-FF6565D3A338}"/>
+                  </a:ext>
+                </a:extLst>
+              </p:cNvPr>
+              <p:cNvSpPr/>
+              <p:nvPr/>
+            </p:nvSpPr>
+            <p:spPr>
+              <a:xfrm>
+                <a:off x="1603584" y="2973660"/>
+                <a:ext cx="1368000" cy="252000"/>
+              </a:xfrm>
+              <a:prstGeom prst="rect">
+                <a:avLst/>
+              </a:prstGeom>
+            </p:spPr>
+            <p:style>
+              <a:lnRef idx="0">
+                <a:schemeClr val="accent2"/>
+              </a:lnRef>
+              <a:fillRef idx="3">
+                <a:schemeClr val="accent2"/>
+              </a:fillRef>
+              <a:effectRef idx="3">
+                <a:schemeClr val="accent2"/>
+              </a:effectRef>
+              <a:fontRef idx="minor">
+                <a:schemeClr val="lt1"/>
+              </a:fontRef>
+            </p:style>
+            <p:txBody>
+              <a:bodyPr rtlCol="0" anchor="ctr"/>
+              <a:lstStyle/>
+              <a:p>
+                <a:pPr algn="ctr"/>
+                <a:r>
+                  <a:rPr lang="en-US" altLang="zh-TW" sz="1400" b="1" dirty="0"/>
+                  <a:t>Project DLL</a:t>
+                </a:r>
+                <a:endParaRPr lang="zh-TW" altLang="en-US" sz="1400" b="1" dirty="0"/>
+              </a:p>
+            </p:txBody>
+          </p:sp>
+          <p:sp>
+            <p:nvSpPr>
+              <p:cNvPr id="140" name="文字方塊 139">
+                <a:extLst>
+                  <a:ext uri="{FF2B5EF4-FFF2-40B4-BE49-F238E27FC236}">
+                    <a16:creationId xmlns:a16="http://schemas.microsoft.com/office/drawing/2014/main" id="{7CD75C97-0B03-45C3-AC58-313C814063BE}"/>
+                  </a:ext>
+                </a:extLst>
+              </p:cNvPr>
+              <p:cNvSpPr txBox="1"/>
+              <p:nvPr/>
+            </p:nvSpPr>
+            <p:spPr>
+              <a:xfrm>
+                <a:off x="1064896" y="2957588"/>
+                <a:ext cx="572593" cy="307777"/>
+              </a:xfrm>
+              <a:prstGeom prst="rect">
+                <a:avLst/>
+              </a:prstGeom>
+              <a:noFill/>
+            </p:spPr>
+            <p:txBody>
+              <a:bodyPr wrap="none" rtlCol="0">
+                <a:spAutoFit/>
+              </a:bodyPr>
+              <a:lstStyle/>
+              <a:p>
+                <a:r>
+                  <a:rPr lang="en-US" altLang="zh-TW" sz="1400" b="1" dirty="0" err="1"/>
+                  <a:t>sha</a:t>
+                </a:r>
+                <a:r>
+                  <a:rPr lang="en-US" altLang="zh-TW" sz="1400" b="1" dirty="0"/>
+                  <a:t> 3</a:t>
+                </a:r>
+                <a:endParaRPr lang="zh-TW" altLang="en-US" sz="1400" b="1" dirty="0"/>
+              </a:p>
+            </p:txBody>
+          </p:sp>
+        </p:grpSp>
+        <p:sp>
+          <p:nvSpPr>
+            <p:cNvPr id="141" name="文字方塊 140">
+              <a:extLst>
+                <a:ext uri="{FF2B5EF4-FFF2-40B4-BE49-F238E27FC236}">
+                  <a16:creationId xmlns:a16="http://schemas.microsoft.com/office/drawing/2014/main" id="{5AFB9BEC-3019-4C58-BA66-2C78C6306FA5}"/>
+                </a:ext>
+              </a:extLst>
+            </p:cNvPr>
+            <p:cNvSpPr txBox="1"/>
+            <p:nvPr/>
+          </p:nvSpPr>
+          <p:spPr>
+            <a:xfrm>
+              <a:off x="7361055" y="5532910"/>
+              <a:ext cx="877163" cy="369332"/>
+            </a:xfrm>
+            <a:prstGeom prst="rect">
+              <a:avLst/>
+            </a:prstGeom>
+            <a:noFill/>
+          </p:spPr>
+          <p:txBody>
+            <a:bodyPr wrap="none" rtlCol="0">
+              <a:spAutoFit/>
+            </a:bodyPr>
+            <a:lstStyle/>
+            <a:p>
+              <a:r>
+                <a:rPr lang="en-US" altLang="zh-TW" b="1" dirty="0"/>
+                <a:t>6. Push</a:t>
+              </a:r>
+              <a:endParaRPr lang="zh-TW" altLang="en-US" b="1" dirty="0"/>
+            </a:p>
+          </p:txBody>
+        </p:sp>
+      </p:grpSp>
+      <p:grpSp>
+        <p:nvGrpSpPr>
+          <p:cNvPr id="186" name="群組 185">
+            <a:extLst>
+              <a:ext uri="{FF2B5EF4-FFF2-40B4-BE49-F238E27FC236}">
+                <a16:creationId xmlns:a16="http://schemas.microsoft.com/office/drawing/2014/main" id="{6D7EE536-0E3F-4726-9CE4-F8891038249F}"/>
+              </a:ext>
+            </a:extLst>
+          </p:cNvPr>
+          <p:cNvGrpSpPr/>
+          <p:nvPr/>
+        </p:nvGrpSpPr>
+        <p:grpSpPr>
+          <a:xfrm>
+            <a:off x="9696574" y="2864096"/>
+            <a:ext cx="1917626" cy="1319953"/>
+            <a:chOff x="9880326" y="2864096"/>
+            <a:chExt cx="1917626" cy="1319953"/>
+          </a:xfrm>
+        </p:grpSpPr>
+        <p:grpSp>
+          <p:nvGrpSpPr>
+            <p:cNvPr id="142" name="群組 141">
+              <a:extLst>
+                <a:ext uri="{FF2B5EF4-FFF2-40B4-BE49-F238E27FC236}">
+                  <a16:creationId xmlns:a16="http://schemas.microsoft.com/office/drawing/2014/main" id="{FCCAB9EE-4EF3-4254-9640-8641253DD5B6}"/>
+                </a:ext>
+              </a:extLst>
+            </p:cNvPr>
+            <p:cNvGrpSpPr/>
+            <p:nvPr/>
+          </p:nvGrpSpPr>
+          <p:grpSpPr>
+            <a:xfrm>
+              <a:off x="9880326" y="3230428"/>
+              <a:ext cx="1917626" cy="953621"/>
+              <a:chOff x="1064896" y="2957588"/>
+              <a:chExt cx="1917626" cy="953621"/>
+            </a:xfrm>
+          </p:grpSpPr>
+          <p:sp>
+            <p:nvSpPr>
+              <p:cNvPr id="143" name="矩形 142">
+                <a:extLst>
+                  <a:ext uri="{FF2B5EF4-FFF2-40B4-BE49-F238E27FC236}">
+                    <a16:creationId xmlns:a16="http://schemas.microsoft.com/office/drawing/2014/main" id="{BF48AA64-3A33-47AD-B375-317BDBE910FE}"/>
+                  </a:ext>
+                </a:extLst>
+              </p:cNvPr>
+              <p:cNvSpPr/>
+              <p:nvPr/>
+            </p:nvSpPr>
+            <p:spPr>
+              <a:xfrm>
+                <a:off x="1603584" y="2973660"/>
+                <a:ext cx="1368000" cy="252000"/>
+              </a:xfrm>
+              <a:prstGeom prst="rect">
+                <a:avLst/>
+              </a:prstGeom>
+            </p:spPr>
+            <p:style>
+              <a:lnRef idx="0">
+                <a:schemeClr val="accent2"/>
+              </a:lnRef>
+              <a:fillRef idx="3">
+                <a:schemeClr val="accent2"/>
+              </a:fillRef>
+              <a:effectRef idx="3">
+                <a:schemeClr val="accent2"/>
+              </a:effectRef>
+              <a:fontRef idx="minor">
+                <a:schemeClr val="lt1"/>
+              </a:fontRef>
+            </p:style>
+            <p:txBody>
+              <a:bodyPr rtlCol="0" anchor="ctr"/>
+              <a:lstStyle/>
+              <a:p>
+                <a:pPr algn="ctr"/>
+                <a:r>
+                  <a:rPr lang="en-US" altLang="zh-TW" sz="1400" b="1" dirty="0"/>
+                  <a:t>Project DLL</a:t>
+                </a:r>
+                <a:endParaRPr lang="zh-TW" altLang="en-US" sz="1400" b="1" dirty="0"/>
+              </a:p>
+            </p:txBody>
+          </p:sp>
+          <p:sp>
+            <p:nvSpPr>
+              <p:cNvPr id="144" name="矩形 143">
+                <a:extLst>
+                  <a:ext uri="{FF2B5EF4-FFF2-40B4-BE49-F238E27FC236}">
+                    <a16:creationId xmlns:a16="http://schemas.microsoft.com/office/drawing/2014/main" id="{4C5C5E93-3D11-4E85-A299-FBE82971D34F}"/>
+                  </a:ext>
+                </a:extLst>
+              </p:cNvPr>
+              <p:cNvSpPr/>
+              <p:nvPr/>
+            </p:nvSpPr>
+            <p:spPr>
+              <a:xfrm>
+                <a:off x="1612340" y="3288835"/>
+                <a:ext cx="1368000" cy="252000"/>
+              </a:xfrm>
+              <a:prstGeom prst="rect">
+                <a:avLst/>
+              </a:prstGeom>
+            </p:spPr>
+            <p:style>
+              <a:lnRef idx="0">
+                <a:schemeClr val="accent5"/>
+              </a:lnRef>
+              <a:fillRef idx="3">
+                <a:schemeClr val="accent5"/>
+              </a:fillRef>
+              <a:effectRef idx="3">
+                <a:schemeClr val="accent5"/>
+              </a:effectRef>
+              <a:fontRef idx="minor">
+                <a:schemeClr val="lt1"/>
+              </a:fontRef>
+            </p:style>
+            <p:txBody>
+              <a:bodyPr rtlCol="0" anchor="ctr"/>
+              <a:lstStyle/>
+              <a:p>
+                <a:pPr algn="ctr"/>
+                <a:r>
+                  <a:rPr lang="en-US" altLang="zh-TW" sz="1400" b="1" dirty="0"/>
+                  <a:t>Third-party DLL</a:t>
+                </a:r>
+                <a:endParaRPr lang="zh-TW" altLang="en-US" sz="1400" b="1" dirty="0"/>
+              </a:p>
+            </p:txBody>
+          </p:sp>
+          <p:sp>
+            <p:nvSpPr>
+              <p:cNvPr id="145" name="矩形 144">
+                <a:extLst>
+                  <a:ext uri="{FF2B5EF4-FFF2-40B4-BE49-F238E27FC236}">
+                    <a16:creationId xmlns:a16="http://schemas.microsoft.com/office/drawing/2014/main" id="{FE5889A1-DD9C-489A-8E05-BB37DBF7DDF7}"/>
+                  </a:ext>
+                </a:extLst>
+              </p:cNvPr>
+              <p:cNvSpPr/>
+              <p:nvPr/>
+            </p:nvSpPr>
+            <p:spPr>
+              <a:xfrm>
+                <a:off x="1614522" y="3608135"/>
+                <a:ext cx="1368000" cy="252000"/>
+              </a:xfrm>
+              <a:prstGeom prst="rect">
+                <a:avLst/>
+              </a:prstGeom>
+            </p:spPr>
+            <p:style>
+              <a:lnRef idx="0">
+                <a:schemeClr val="accent5"/>
+              </a:lnRef>
+              <a:fillRef idx="3">
+                <a:schemeClr val="accent5"/>
+              </a:fillRef>
+              <a:effectRef idx="3">
+                <a:schemeClr val="accent5"/>
+              </a:effectRef>
+              <a:fontRef idx="minor">
+                <a:schemeClr val="lt1"/>
+              </a:fontRef>
+            </p:style>
+            <p:txBody>
+              <a:bodyPr rtlCol="0" anchor="ctr"/>
+              <a:lstStyle/>
+              <a:p>
+                <a:pPr algn="ctr"/>
+                <a:r>
+                  <a:rPr lang="en-US" altLang="zh-TW" sz="1400" b="1" dirty="0"/>
+                  <a:t>Base Image</a:t>
+                </a:r>
+                <a:endParaRPr lang="zh-TW" altLang="en-US" sz="1400" b="1" dirty="0"/>
+              </a:p>
+            </p:txBody>
+          </p:sp>
+          <p:sp>
+            <p:nvSpPr>
+              <p:cNvPr id="146" name="文字方塊 145">
+                <a:extLst>
+                  <a:ext uri="{FF2B5EF4-FFF2-40B4-BE49-F238E27FC236}">
+                    <a16:creationId xmlns:a16="http://schemas.microsoft.com/office/drawing/2014/main" id="{84122F86-2960-4155-8DDC-F91E70FDF010}"/>
+                  </a:ext>
+                </a:extLst>
+              </p:cNvPr>
+              <p:cNvSpPr txBox="1"/>
+              <p:nvPr/>
+            </p:nvSpPr>
+            <p:spPr>
+              <a:xfrm>
+                <a:off x="1065613" y="3603432"/>
+                <a:ext cx="572593" cy="307777"/>
+              </a:xfrm>
+              <a:prstGeom prst="rect">
+                <a:avLst/>
+              </a:prstGeom>
+              <a:noFill/>
+            </p:spPr>
+            <p:txBody>
+              <a:bodyPr wrap="none" rtlCol="0">
+                <a:spAutoFit/>
+              </a:bodyPr>
+              <a:lstStyle/>
+              <a:p>
+                <a:r>
+                  <a:rPr lang="en-US" altLang="zh-TW" sz="1400" b="1" dirty="0" err="1"/>
+                  <a:t>sha</a:t>
+                </a:r>
+                <a:r>
+                  <a:rPr lang="en-US" altLang="zh-TW" sz="1400" b="1" dirty="0"/>
+                  <a:t> 1</a:t>
+                </a:r>
+                <a:endParaRPr lang="zh-TW" altLang="en-US" sz="1400" b="1" dirty="0"/>
+              </a:p>
+            </p:txBody>
+          </p:sp>
+          <p:sp>
+            <p:nvSpPr>
+              <p:cNvPr id="147" name="文字方塊 146">
+                <a:extLst>
+                  <a:ext uri="{FF2B5EF4-FFF2-40B4-BE49-F238E27FC236}">
+                    <a16:creationId xmlns:a16="http://schemas.microsoft.com/office/drawing/2014/main" id="{6AC69327-0809-41C5-B01A-1229059CFC59}"/>
+                  </a:ext>
+                </a:extLst>
+              </p:cNvPr>
+              <p:cNvSpPr txBox="1"/>
+              <p:nvPr/>
+            </p:nvSpPr>
+            <p:spPr>
+              <a:xfrm>
+                <a:off x="1065613" y="3286270"/>
+                <a:ext cx="572593" cy="307777"/>
+              </a:xfrm>
+              <a:prstGeom prst="rect">
+                <a:avLst/>
+              </a:prstGeom>
+              <a:noFill/>
+            </p:spPr>
+            <p:txBody>
+              <a:bodyPr wrap="none" rtlCol="0">
+                <a:spAutoFit/>
+              </a:bodyPr>
+              <a:lstStyle/>
+              <a:p>
+                <a:r>
+                  <a:rPr lang="en-US" altLang="zh-TW" sz="1400" b="1" dirty="0" err="1"/>
+                  <a:t>sha</a:t>
+                </a:r>
+                <a:r>
+                  <a:rPr lang="en-US" altLang="zh-TW" sz="1400" b="1" dirty="0"/>
+                  <a:t> 2</a:t>
+                </a:r>
+                <a:endParaRPr lang="zh-TW" altLang="en-US" sz="1400" b="1" dirty="0"/>
+              </a:p>
+            </p:txBody>
+          </p:sp>
+          <p:sp>
+            <p:nvSpPr>
+              <p:cNvPr id="148" name="文字方塊 147">
+                <a:extLst>
+                  <a:ext uri="{FF2B5EF4-FFF2-40B4-BE49-F238E27FC236}">
+                    <a16:creationId xmlns:a16="http://schemas.microsoft.com/office/drawing/2014/main" id="{2E39C6F9-FDA7-485F-9E00-FAAA8D926C58}"/>
+                  </a:ext>
+                </a:extLst>
+              </p:cNvPr>
+              <p:cNvSpPr txBox="1"/>
+              <p:nvPr/>
+            </p:nvSpPr>
+            <p:spPr>
+              <a:xfrm>
+                <a:off x="1064896" y="2957588"/>
+                <a:ext cx="572593" cy="307777"/>
+              </a:xfrm>
+              <a:prstGeom prst="rect">
+                <a:avLst/>
+              </a:prstGeom>
+              <a:noFill/>
+            </p:spPr>
+            <p:txBody>
+              <a:bodyPr wrap="none" rtlCol="0">
+                <a:spAutoFit/>
+              </a:bodyPr>
+              <a:lstStyle/>
+              <a:p>
+                <a:r>
+                  <a:rPr lang="en-US" altLang="zh-TW" sz="1400" b="1" dirty="0" err="1"/>
+                  <a:t>sha</a:t>
+                </a:r>
+                <a:r>
+                  <a:rPr lang="en-US" altLang="zh-TW" sz="1400" b="1" dirty="0"/>
+                  <a:t> 3</a:t>
+                </a:r>
+                <a:endParaRPr lang="zh-TW" altLang="en-US" sz="1400" b="1" dirty="0"/>
+              </a:p>
+            </p:txBody>
+          </p:sp>
+        </p:grpSp>
+        <p:sp>
+          <p:nvSpPr>
+            <p:cNvPr id="149" name="文字方塊 148">
+              <a:extLst>
+                <a:ext uri="{FF2B5EF4-FFF2-40B4-BE49-F238E27FC236}">
+                  <a16:creationId xmlns:a16="http://schemas.microsoft.com/office/drawing/2014/main" id="{573949D8-5060-447F-AFF9-7E10460B82ED}"/>
+                </a:ext>
+              </a:extLst>
+            </p:cNvPr>
+            <p:cNvSpPr txBox="1"/>
+            <p:nvPr/>
+          </p:nvSpPr>
+          <p:spPr>
+            <a:xfrm>
+              <a:off x="10426974" y="2864096"/>
+              <a:ext cx="774571" cy="369332"/>
+            </a:xfrm>
+            <a:prstGeom prst="rect">
+              <a:avLst/>
+            </a:prstGeom>
+            <a:noFill/>
+          </p:spPr>
+          <p:txBody>
+            <a:bodyPr wrap="none" rtlCol="0">
+              <a:spAutoFit/>
+            </a:bodyPr>
+            <a:lstStyle/>
+            <a:p>
+              <a:r>
+                <a:rPr lang="en-US" altLang="zh-TW" b="1" dirty="0"/>
+                <a:t>7. Pull</a:t>
+              </a:r>
+              <a:endParaRPr lang="zh-TW" altLang="en-US" b="1" dirty="0"/>
+            </a:p>
+          </p:txBody>
+        </p:sp>
+      </p:grpSp>
+      <p:grpSp>
+        <p:nvGrpSpPr>
+          <p:cNvPr id="165" name="群組 164">
+            <a:extLst>
+              <a:ext uri="{FF2B5EF4-FFF2-40B4-BE49-F238E27FC236}">
+                <a16:creationId xmlns:a16="http://schemas.microsoft.com/office/drawing/2014/main" id="{6C2BD117-99FB-4724-B2AD-462D56FB7BBF}"/>
+              </a:ext>
+            </a:extLst>
+          </p:cNvPr>
+          <p:cNvGrpSpPr/>
+          <p:nvPr/>
+        </p:nvGrpSpPr>
+        <p:grpSpPr>
+          <a:xfrm>
+            <a:off x="3884666" y="3505242"/>
+            <a:ext cx="1917626" cy="1319953"/>
+            <a:chOff x="3964257" y="4132805"/>
+            <a:chExt cx="1917626" cy="1319953"/>
+          </a:xfrm>
+        </p:grpSpPr>
+        <p:sp>
+          <p:nvSpPr>
+            <p:cNvPr id="133" name="文字方塊 132">
+              <a:extLst>
+                <a:ext uri="{FF2B5EF4-FFF2-40B4-BE49-F238E27FC236}">
+                  <a16:creationId xmlns:a16="http://schemas.microsoft.com/office/drawing/2014/main" id="{AF6065A2-1CBC-42C4-986B-30AEA48AE112}"/>
+                </a:ext>
+              </a:extLst>
+            </p:cNvPr>
+            <p:cNvSpPr txBox="1"/>
+            <p:nvPr/>
+          </p:nvSpPr>
+          <p:spPr>
+            <a:xfrm>
+              <a:off x="4510905" y="4132805"/>
+              <a:ext cx="774571" cy="369332"/>
+            </a:xfrm>
+            <a:prstGeom prst="rect">
+              <a:avLst/>
+            </a:prstGeom>
+            <a:noFill/>
+          </p:spPr>
+          <p:txBody>
+            <a:bodyPr wrap="none" rtlCol="0">
+              <a:spAutoFit/>
+            </a:bodyPr>
+            <a:lstStyle/>
+            <a:p>
+              <a:r>
+                <a:rPr lang="en-US" altLang="zh-TW" b="1" dirty="0"/>
+                <a:t>5. Pull</a:t>
+              </a:r>
+              <a:endParaRPr lang="zh-TW" altLang="en-US" b="1" dirty="0"/>
+            </a:p>
+          </p:txBody>
+        </p:sp>
+        <p:grpSp>
+          <p:nvGrpSpPr>
+            <p:cNvPr id="52" name="群組 51">
+              <a:extLst>
+                <a:ext uri="{FF2B5EF4-FFF2-40B4-BE49-F238E27FC236}">
+                  <a16:creationId xmlns:a16="http://schemas.microsoft.com/office/drawing/2014/main" id="{E56A2CCE-E768-4078-A040-ED2E3971D5D7}"/>
+                </a:ext>
+              </a:extLst>
+            </p:cNvPr>
+            <p:cNvGrpSpPr/>
+            <p:nvPr/>
+          </p:nvGrpSpPr>
+          <p:grpSpPr>
+            <a:xfrm>
+              <a:off x="3964257" y="4499137"/>
+              <a:ext cx="1917626" cy="953621"/>
+              <a:chOff x="1064896" y="2957588"/>
+              <a:chExt cx="1917626" cy="953621"/>
+            </a:xfrm>
+          </p:grpSpPr>
+          <p:sp>
+            <p:nvSpPr>
+              <p:cNvPr id="53" name="矩形 52">
+                <a:extLst>
+                  <a:ext uri="{FF2B5EF4-FFF2-40B4-BE49-F238E27FC236}">
+                    <a16:creationId xmlns:a16="http://schemas.microsoft.com/office/drawing/2014/main" id="{C2C9A821-C8C1-414A-B755-C42C9CDB42DF}"/>
+                  </a:ext>
+                </a:extLst>
+              </p:cNvPr>
+              <p:cNvSpPr/>
+              <p:nvPr/>
+            </p:nvSpPr>
+            <p:spPr>
+              <a:xfrm>
+                <a:off x="1603584" y="2973660"/>
+                <a:ext cx="1368000" cy="252000"/>
+              </a:xfrm>
+              <a:prstGeom prst="rect">
+                <a:avLst/>
+              </a:prstGeom>
+            </p:spPr>
+            <p:style>
+              <a:lnRef idx="0">
+                <a:schemeClr val="accent2"/>
+              </a:lnRef>
+              <a:fillRef idx="3">
+                <a:schemeClr val="accent2"/>
+              </a:fillRef>
+              <a:effectRef idx="3">
+                <a:schemeClr val="accent2"/>
+              </a:effectRef>
+              <a:fontRef idx="minor">
+                <a:schemeClr val="lt1"/>
+              </a:fontRef>
+            </p:style>
+            <p:txBody>
+              <a:bodyPr rtlCol="0" anchor="ctr"/>
+              <a:lstStyle/>
+              <a:p>
+                <a:pPr algn="ctr"/>
+                <a:r>
+                  <a:rPr lang="en-US" altLang="zh-TW" sz="1400" b="1" dirty="0"/>
+                  <a:t>Project DLL</a:t>
+                </a:r>
+                <a:endParaRPr lang="zh-TW" altLang="en-US" sz="1400" b="1" dirty="0"/>
+              </a:p>
+            </p:txBody>
+          </p:sp>
+          <p:sp>
+            <p:nvSpPr>
+              <p:cNvPr id="54" name="矩形 53">
+                <a:extLst>
+                  <a:ext uri="{FF2B5EF4-FFF2-40B4-BE49-F238E27FC236}">
+                    <a16:creationId xmlns:a16="http://schemas.microsoft.com/office/drawing/2014/main" id="{B4437E00-F10B-4ACE-80E7-AC8FF5DA827B}"/>
+                  </a:ext>
+                </a:extLst>
+              </p:cNvPr>
+              <p:cNvSpPr/>
+              <p:nvPr/>
+            </p:nvSpPr>
+            <p:spPr>
+              <a:xfrm>
+                <a:off x="1612340" y="3288835"/>
+                <a:ext cx="1368000" cy="252000"/>
+              </a:xfrm>
+              <a:prstGeom prst="rect">
+                <a:avLst/>
+              </a:prstGeom>
+            </p:spPr>
+            <p:style>
+              <a:lnRef idx="0">
+                <a:schemeClr val="accent5"/>
+              </a:lnRef>
+              <a:fillRef idx="3">
+                <a:schemeClr val="accent5"/>
+              </a:fillRef>
+              <a:effectRef idx="3">
+                <a:schemeClr val="accent5"/>
+              </a:effectRef>
+              <a:fontRef idx="minor">
+                <a:schemeClr val="lt1"/>
+              </a:fontRef>
+            </p:style>
+            <p:txBody>
+              <a:bodyPr rtlCol="0" anchor="ctr"/>
+              <a:lstStyle/>
+              <a:p>
+                <a:pPr algn="ctr"/>
+                <a:r>
+                  <a:rPr lang="en-US" altLang="zh-TW" sz="1400" b="1" dirty="0"/>
+                  <a:t>Third-party DLL</a:t>
+                </a:r>
+                <a:endParaRPr lang="zh-TW" altLang="en-US" sz="1400" b="1" dirty="0"/>
+              </a:p>
+            </p:txBody>
+          </p:sp>
+          <p:sp>
+            <p:nvSpPr>
+              <p:cNvPr id="55" name="矩形 54">
+                <a:extLst>
+                  <a:ext uri="{FF2B5EF4-FFF2-40B4-BE49-F238E27FC236}">
+                    <a16:creationId xmlns:a16="http://schemas.microsoft.com/office/drawing/2014/main" id="{BD8A07F4-4898-4685-B356-781EC469B03A}"/>
+                  </a:ext>
+                </a:extLst>
+              </p:cNvPr>
+              <p:cNvSpPr/>
+              <p:nvPr/>
+            </p:nvSpPr>
+            <p:spPr>
+              <a:xfrm>
+                <a:off x="1614522" y="3608135"/>
+                <a:ext cx="1368000" cy="252000"/>
+              </a:xfrm>
+              <a:prstGeom prst="rect">
+                <a:avLst/>
+              </a:prstGeom>
+            </p:spPr>
+            <p:style>
+              <a:lnRef idx="0">
+                <a:schemeClr val="accent5"/>
+              </a:lnRef>
+              <a:fillRef idx="3">
+                <a:schemeClr val="accent5"/>
+              </a:fillRef>
+              <a:effectRef idx="3">
+                <a:schemeClr val="accent5"/>
+              </a:effectRef>
+              <a:fontRef idx="minor">
+                <a:schemeClr val="lt1"/>
+              </a:fontRef>
+            </p:style>
+            <p:txBody>
+              <a:bodyPr rtlCol="0" anchor="ctr"/>
+              <a:lstStyle/>
+              <a:p>
+                <a:pPr algn="ctr"/>
+                <a:r>
+                  <a:rPr lang="en-US" altLang="zh-TW" sz="1400" b="1" dirty="0"/>
+                  <a:t>Base Image</a:t>
+                </a:r>
+                <a:endParaRPr lang="zh-TW" altLang="en-US" sz="1400" b="1" dirty="0"/>
+              </a:p>
+            </p:txBody>
+          </p:sp>
+          <p:sp>
+            <p:nvSpPr>
+              <p:cNvPr id="56" name="文字方塊 55">
+                <a:extLst>
+                  <a:ext uri="{FF2B5EF4-FFF2-40B4-BE49-F238E27FC236}">
+                    <a16:creationId xmlns:a16="http://schemas.microsoft.com/office/drawing/2014/main" id="{FC4F4556-E363-46F6-8AFE-BCD84B7507B1}"/>
+                  </a:ext>
+                </a:extLst>
+              </p:cNvPr>
+              <p:cNvSpPr txBox="1"/>
+              <p:nvPr/>
+            </p:nvSpPr>
+            <p:spPr>
+              <a:xfrm>
+                <a:off x="1065613" y="3603432"/>
+                <a:ext cx="572593" cy="307777"/>
+              </a:xfrm>
+              <a:prstGeom prst="rect">
+                <a:avLst/>
+              </a:prstGeom>
+              <a:noFill/>
+            </p:spPr>
+            <p:txBody>
+              <a:bodyPr wrap="none" rtlCol="0">
+                <a:spAutoFit/>
+              </a:bodyPr>
+              <a:lstStyle/>
+              <a:p>
+                <a:r>
+                  <a:rPr lang="en-US" altLang="zh-TW" sz="1400" b="1" dirty="0" err="1"/>
+                  <a:t>sha</a:t>
+                </a:r>
+                <a:r>
+                  <a:rPr lang="en-US" altLang="zh-TW" sz="1400" b="1" dirty="0"/>
+                  <a:t> 1</a:t>
+                </a:r>
+                <a:endParaRPr lang="zh-TW" altLang="en-US" sz="1400" b="1" dirty="0"/>
+              </a:p>
+            </p:txBody>
+          </p:sp>
+          <p:sp>
+            <p:nvSpPr>
+              <p:cNvPr id="57" name="文字方塊 56">
+                <a:extLst>
+                  <a:ext uri="{FF2B5EF4-FFF2-40B4-BE49-F238E27FC236}">
+                    <a16:creationId xmlns:a16="http://schemas.microsoft.com/office/drawing/2014/main" id="{550E9C53-26DE-4D99-A92F-6C8F13A76D65}"/>
+                  </a:ext>
+                </a:extLst>
+              </p:cNvPr>
+              <p:cNvSpPr txBox="1"/>
+              <p:nvPr/>
+            </p:nvSpPr>
+            <p:spPr>
+              <a:xfrm>
+                <a:off x="1065613" y="3286270"/>
+                <a:ext cx="572593" cy="307777"/>
+              </a:xfrm>
+              <a:prstGeom prst="rect">
+                <a:avLst/>
+              </a:prstGeom>
+              <a:noFill/>
+            </p:spPr>
+            <p:txBody>
+              <a:bodyPr wrap="none" rtlCol="0">
+                <a:spAutoFit/>
+              </a:bodyPr>
+              <a:lstStyle/>
+              <a:p>
+                <a:r>
+                  <a:rPr lang="en-US" altLang="zh-TW" sz="1400" b="1" dirty="0" err="1"/>
+                  <a:t>sha</a:t>
+                </a:r>
+                <a:r>
+                  <a:rPr lang="en-US" altLang="zh-TW" sz="1400" b="1" dirty="0"/>
+                  <a:t> 2</a:t>
+                </a:r>
+                <a:endParaRPr lang="zh-TW" altLang="en-US" sz="1400" b="1" dirty="0"/>
+              </a:p>
+            </p:txBody>
+          </p:sp>
+          <p:sp>
+            <p:nvSpPr>
+              <p:cNvPr id="58" name="文字方塊 57">
+                <a:extLst>
+                  <a:ext uri="{FF2B5EF4-FFF2-40B4-BE49-F238E27FC236}">
+                    <a16:creationId xmlns:a16="http://schemas.microsoft.com/office/drawing/2014/main" id="{F5F07C1B-6312-416C-92E9-7CBE50790A34}"/>
+                  </a:ext>
+                </a:extLst>
+              </p:cNvPr>
+              <p:cNvSpPr txBox="1"/>
+              <p:nvPr/>
+            </p:nvSpPr>
+            <p:spPr>
+              <a:xfrm>
+                <a:off x="1064896" y="2957588"/>
+                <a:ext cx="572593" cy="307777"/>
+              </a:xfrm>
+              <a:prstGeom prst="rect">
+                <a:avLst/>
+              </a:prstGeom>
+              <a:noFill/>
+            </p:spPr>
+            <p:txBody>
+              <a:bodyPr wrap="none" rtlCol="0">
+                <a:spAutoFit/>
+              </a:bodyPr>
+              <a:lstStyle/>
+              <a:p>
+                <a:r>
+                  <a:rPr lang="en-US" altLang="zh-TW" sz="1400" b="1" dirty="0" err="1"/>
+                  <a:t>sha</a:t>
+                </a:r>
+                <a:r>
+                  <a:rPr lang="en-US" altLang="zh-TW" sz="1400" b="1" dirty="0"/>
+                  <a:t> 3</a:t>
+                </a:r>
+                <a:endParaRPr lang="zh-TW" altLang="en-US" sz="1400" b="1" dirty="0"/>
+              </a:p>
+            </p:txBody>
+          </p:sp>
+        </p:grpSp>
+      </p:grpSp>
+      <p:cxnSp>
+        <p:nvCxnSpPr>
+          <p:cNvPr id="176" name="直線單箭頭接點 175">
+            <a:extLst>
+              <a:ext uri="{FF2B5EF4-FFF2-40B4-BE49-F238E27FC236}">
+                <a16:creationId xmlns:a16="http://schemas.microsoft.com/office/drawing/2014/main" id="{E0EF9A30-E0E9-4977-A087-324344659F09}"/>
+              </a:ext>
+            </a:extLst>
+          </p:cNvPr>
+          <p:cNvCxnSpPr>
+            <a:cxnSpLocks/>
+          </p:cNvCxnSpPr>
+          <p:nvPr/>
+        </p:nvCxnSpPr>
+        <p:spPr>
+          <a:xfrm flipV="1">
+            <a:off x="9677400" y="2482277"/>
+            <a:ext cx="0" cy="2274714"/>
+          </a:xfrm>
+          <a:prstGeom prst="straightConnector1">
+            <a:avLst/>
+          </a:prstGeom>
+          <a:ln w="38100">
+            <a:headEnd type="none" w="med" len="med"/>
+            <a:tailEnd type="arrow" w="med" len="med"/>
+          </a:ln>
+        </p:spPr>
+        <p:style>
+          <a:lnRef idx="3">
+            <a:schemeClr val="dk1"/>
+          </a:lnRef>
+          <a:fillRef idx="0">
+            <a:schemeClr val="dk1"/>
+          </a:fillRef>
+          <a:effectRef idx="2">
+            <a:schemeClr val="dk1"/>
+          </a:effectRef>
+          <a:fontRef idx="minor">
+            <a:schemeClr val="tx1"/>
+          </a:fontRef>
+        </p:style>
+      </p:cxnSp>
+      <p:grpSp>
+        <p:nvGrpSpPr>
+          <p:cNvPr id="167" name="群組 166">
+            <a:extLst>
+              <a:ext uri="{FF2B5EF4-FFF2-40B4-BE49-F238E27FC236}">
+                <a16:creationId xmlns:a16="http://schemas.microsoft.com/office/drawing/2014/main" id="{0E164BC1-FF94-4FF5-8E28-9683E6A4F494}"/>
+              </a:ext>
+            </a:extLst>
+          </p:cNvPr>
+          <p:cNvGrpSpPr/>
+          <p:nvPr/>
+        </p:nvGrpSpPr>
+        <p:grpSpPr>
+          <a:xfrm>
+            <a:off x="5550793" y="2030181"/>
+            <a:ext cx="1916909" cy="992895"/>
+            <a:chOff x="6819517" y="875499"/>
+            <a:chExt cx="1916909" cy="992895"/>
+          </a:xfrm>
+        </p:grpSpPr>
+        <p:grpSp>
+          <p:nvGrpSpPr>
+            <p:cNvPr id="59" name="群組 58">
+              <a:extLst>
+                <a:ext uri="{FF2B5EF4-FFF2-40B4-BE49-F238E27FC236}">
+                  <a16:creationId xmlns:a16="http://schemas.microsoft.com/office/drawing/2014/main" id="{E62524CB-2873-4CE9-A3A2-D599425F090E}"/>
+                </a:ext>
+              </a:extLst>
+            </p:cNvPr>
+            <p:cNvGrpSpPr/>
+            <p:nvPr/>
+          </p:nvGrpSpPr>
+          <p:grpSpPr>
+            <a:xfrm>
+              <a:off x="6819517" y="1243455"/>
+              <a:ext cx="1916909" cy="624939"/>
+              <a:chOff x="1065613" y="3286270"/>
+              <a:chExt cx="1916909" cy="624939"/>
+            </a:xfrm>
+          </p:grpSpPr>
+          <p:sp>
+            <p:nvSpPr>
+              <p:cNvPr id="60" name="矩形 59">
+                <a:extLst>
+                  <a:ext uri="{FF2B5EF4-FFF2-40B4-BE49-F238E27FC236}">
+                    <a16:creationId xmlns:a16="http://schemas.microsoft.com/office/drawing/2014/main" id="{3B8F8BED-0D51-4DBF-BA6F-BFCF16DE0AD5}"/>
+                  </a:ext>
+                </a:extLst>
+              </p:cNvPr>
+              <p:cNvSpPr/>
+              <p:nvPr/>
+            </p:nvSpPr>
+            <p:spPr>
+              <a:xfrm>
+                <a:off x="1612340" y="3288835"/>
+                <a:ext cx="1368000" cy="252000"/>
+              </a:xfrm>
+              <a:prstGeom prst="rect">
+                <a:avLst/>
+              </a:prstGeom>
+            </p:spPr>
+            <p:style>
+              <a:lnRef idx="0">
+                <a:schemeClr val="accent5"/>
+              </a:lnRef>
+              <a:fillRef idx="3">
+                <a:schemeClr val="accent5"/>
+              </a:fillRef>
+              <a:effectRef idx="3">
+                <a:schemeClr val="accent5"/>
+              </a:effectRef>
+              <a:fontRef idx="minor">
+                <a:schemeClr val="lt1"/>
+              </a:fontRef>
+            </p:style>
+            <p:txBody>
+              <a:bodyPr rtlCol="0" anchor="ctr"/>
+              <a:lstStyle/>
+              <a:p>
+                <a:pPr algn="ctr"/>
+                <a:r>
+                  <a:rPr lang="en-US" altLang="zh-TW" sz="1400" b="1" dirty="0"/>
+                  <a:t>Third-party DLL</a:t>
+                </a:r>
+                <a:endParaRPr lang="zh-TW" altLang="en-US" sz="1400" b="1" dirty="0"/>
+              </a:p>
+            </p:txBody>
+          </p:sp>
+          <p:sp>
+            <p:nvSpPr>
+              <p:cNvPr id="61" name="矩形 60">
+                <a:extLst>
+                  <a:ext uri="{FF2B5EF4-FFF2-40B4-BE49-F238E27FC236}">
+                    <a16:creationId xmlns:a16="http://schemas.microsoft.com/office/drawing/2014/main" id="{529B02E5-9E58-45C7-90D6-3E96DCCB2275}"/>
+                  </a:ext>
+                </a:extLst>
+              </p:cNvPr>
+              <p:cNvSpPr/>
+              <p:nvPr/>
+            </p:nvSpPr>
+            <p:spPr>
+              <a:xfrm>
+                <a:off x="1614522" y="3608135"/>
+                <a:ext cx="1368000" cy="252000"/>
+              </a:xfrm>
+              <a:prstGeom prst="rect">
+                <a:avLst/>
+              </a:prstGeom>
+            </p:spPr>
+            <p:style>
+              <a:lnRef idx="0">
+                <a:schemeClr val="accent5"/>
+              </a:lnRef>
+              <a:fillRef idx="3">
+                <a:schemeClr val="accent5"/>
+              </a:fillRef>
+              <a:effectRef idx="3">
+                <a:schemeClr val="accent5"/>
+              </a:effectRef>
+              <a:fontRef idx="minor">
+                <a:schemeClr val="lt1"/>
+              </a:fontRef>
+            </p:style>
+            <p:txBody>
+              <a:bodyPr rtlCol="0" anchor="ctr"/>
+              <a:lstStyle/>
+              <a:p>
+                <a:pPr algn="ctr"/>
+                <a:r>
+                  <a:rPr lang="en-US" altLang="zh-TW" sz="1400" b="1" dirty="0"/>
+                  <a:t>Base Image</a:t>
+                </a:r>
+                <a:endParaRPr lang="zh-TW" altLang="en-US" sz="1400" b="1" dirty="0"/>
+              </a:p>
+            </p:txBody>
+          </p:sp>
+          <p:sp>
+            <p:nvSpPr>
+              <p:cNvPr id="62" name="文字方塊 61">
+                <a:extLst>
+                  <a:ext uri="{FF2B5EF4-FFF2-40B4-BE49-F238E27FC236}">
+                    <a16:creationId xmlns:a16="http://schemas.microsoft.com/office/drawing/2014/main" id="{A321086D-0B4B-4C5D-9741-AF0FEE4EAA3A}"/>
+                  </a:ext>
+                </a:extLst>
+              </p:cNvPr>
+              <p:cNvSpPr txBox="1"/>
+              <p:nvPr/>
+            </p:nvSpPr>
+            <p:spPr>
+              <a:xfrm>
+                <a:off x="1065613" y="3603432"/>
+                <a:ext cx="572593" cy="307777"/>
+              </a:xfrm>
+              <a:prstGeom prst="rect">
+                <a:avLst/>
+              </a:prstGeom>
+              <a:noFill/>
+            </p:spPr>
+            <p:txBody>
+              <a:bodyPr wrap="none" rtlCol="0">
+                <a:spAutoFit/>
+              </a:bodyPr>
+              <a:lstStyle/>
+              <a:p>
+                <a:r>
+                  <a:rPr lang="en-US" altLang="zh-TW" sz="1400" b="1" dirty="0" err="1"/>
+                  <a:t>sha</a:t>
+                </a:r>
+                <a:r>
+                  <a:rPr lang="en-US" altLang="zh-TW" sz="1400" b="1" dirty="0"/>
+                  <a:t> 1</a:t>
+                </a:r>
+                <a:endParaRPr lang="zh-TW" altLang="en-US" sz="1400" b="1" dirty="0"/>
+              </a:p>
+            </p:txBody>
+          </p:sp>
+          <p:sp>
+            <p:nvSpPr>
+              <p:cNvPr id="63" name="文字方塊 62">
+                <a:extLst>
+                  <a:ext uri="{FF2B5EF4-FFF2-40B4-BE49-F238E27FC236}">
+                    <a16:creationId xmlns:a16="http://schemas.microsoft.com/office/drawing/2014/main" id="{221E4D42-9B4F-473F-81B6-B2591C9B54C1}"/>
+                  </a:ext>
+                </a:extLst>
+              </p:cNvPr>
+              <p:cNvSpPr txBox="1"/>
+              <p:nvPr/>
+            </p:nvSpPr>
+            <p:spPr>
+              <a:xfrm>
+                <a:off x="1065613" y="3286270"/>
+                <a:ext cx="572593" cy="307777"/>
+              </a:xfrm>
+              <a:prstGeom prst="rect">
+                <a:avLst/>
+              </a:prstGeom>
+              <a:noFill/>
+            </p:spPr>
+            <p:txBody>
+              <a:bodyPr wrap="none" rtlCol="0">
+                <a:spAutoFit/>
+              </a:bodyPr>
+              <a:lstStyle/>
+              <a:p>
+                <a:r>
+                  <a:rPr lang="en-US" altLang="zh-TW" sz="1400" b="1" dirty="0" err="1"/>
+                  <a:t>sha</a:t>
+                </a:r>
+                <a:r>
+                  <a:rPr lang="en-US" altLang="zh-TW" sz="1400" b="1" dirty="0"/>
+                  <a:t> 2</a:t>
+                </a:r>
+                <a:endParaRPr lang="zh-TW" altLang="en-US" sz="1400" b="1" dirty="0"/>
+              </a:p>
+            </p:txBody>
+          </p:sp>
+        </p:grpSp>
+        <p:sp>
+          <p:nvSpPr>
+            <p:cNvPr id="119" name="文字方塊 118">
+              <a:extLst>
+                <a:ext uri="{FF2B5EF4-FFF2-40B4-BE49-F238E27FC236}">
+                  <a16:creationId xmlns:a16="http://schemas.microsoft.com/office/drawing/2014/main" id="{83C91CEC-DC99-4A0E-BF16-2EC093166843}"/>
+                </a:ext>
+              </a:extLst>
+            </p:cNvPr>
+            <p:cNvSpPr txBox="1"/>
+            <p:nvPr/>
+          </p:nvSpPr>
+          <p:spPr>
+            <a:xfrm>
+              <a:off x="7036981" y="875499"/>
+              <a:ext cx="1583254" cy="369332"/>
+            </a:xfrm>
+            <a:prstGeom prst="rect">
+              <a:avLst/>
+            </a:prstGeom>
+            <a:noFill/>
+          </p:spPr>
+          <p:txBody>
+            <a:bodyPr wrap="none" rtlCol="0">
+              <a:spAutoFit/>
+            </a:bodyPr>
+            <a:lstStyle/>
+            <a:p>
+              <a:r>
+                <a:rPr lang="en-US" altLang="zh-TW" b="1" dirty="0"/>
+                <a:t>3. Pull &amp; Retag</a:t>
+              </a:r>
+              <a:endParaRPr lang="zh-TW" altLang="en-US" b="1" dirty="0"/>
+            </a:p>
+          </p:txBody>
+        </p:sp>
+      </p:grpSp>
+    </p:spTree>
+    <p:extLst>
+      <p:ext uri="{BB962C8B-B14F-4D97-AF65-F5344CB8AC3E}">
+        <p14:creationId xmlns:p14="http://schemas.microsoft.com/office/powerpoint/2010/main" val="1966747919"/>
+      </p:ext>
+    </p:extLst>
+  </p:cSld>
+  <p:clrMapOvr>
+    <a:masterClrMapping/>
+  </p:clrMapOvr>
+</p:sld>
+</file>
+
 <file path=ppt/slides/slide4.xml><?xml version="1.0" encoding="utf-8"?>
 <p:sld xmlns:a="http://schemas.openxmlformats.org/drawingml/2006/main" xmlns:r="http://schemas.openxmlformats.org/officeDocument/2006/relationships" xmlns:p="http://schemas.openxmlformats.org/presentationml/2006/main">
   <p:cSld>
@@ -38915,6 +43184,15 @@
 </file>
 
 <file path=customXml/item1.xml><?xml version="1.0" encoding="utf-8"?>
+<?mso-contentType ?>
+<FormTemplates xmlns="http://schemas.microsoft.com/sharepoint/v3/contenttype/forms">
+  <Display>DocumentLibraryForm</Display>
+  <Edit>DocumentLibraryForm</Edit>
+  <New>DocumentLibraryForm</New>
+</FormTemplates>
+</file>
+
+<file path=customXml/item2.xml><?xml version="1.0" encoding="utf-8"?>
 <ct:contentTypeSchema xmlns:ct="http://schemas.microsoft.com/office/2006/metadata/contentType" xmlns:ma="http://schemas.microsoft.com/office/2006/metadata/properties/metaAttributes" ct:_="" ma:_="" ma:contentTypeName="Document" ma:contentTypeID="0x0101000AA0115B54226D469CC0FAAE38E5F61C" ma:contentTypeVersion="3" ma:contentTypeDescription="Create a new document." ma:contentTypeScope="" ma:versionID="0ae424bb0065d3a2a055b165aca25ec5">
   <xsd:schema xmlns:xsd="http://www.w3.org/2001/XMLSchema" xmlns:p="http://schemas.microsoft.com/office/2006/metadata/properties" targetNamespace="http://schemas.microsoft.com/office/2006/metadata/properties" ma:root="true" ma:fieldsID="4aeb20c0e3442673af7ee10786458764">
     <xsd:element name="properties">
@@ -38963,15 +43241,6 @@
 </ct:contentTypeSchema>
 </file>
 
-<file path=customXml/item2.xml><?xml version="1.0" encoding="utf-8"?>
-<?mso-contentType ?>
-<FormTemplates xmlns="http://schemas.microsoft.com/sharepoint/v3/contenttype/forms">
-  <Display>DocumentLibraryForm</Display>
-  <Edit>DocumentLibraryForm</Edit>
-  <New>DocumentLibraryForm</New>
-</FormTemplates>
-</file>
-
 <file path=customXml/item3.xml><?xml version="1.0" encoding="utf-8"?>
 <p:properties xmlns:p="http://schemas.microsoft.com/office/2006/metadata/properties" xmlns:xsi="http://www.w3.org/2001/XMLSchema-instance">
   <documentManagement/>
@@ -38979,6 +43248,14 @@
 </file>
 
 <file path=customXml/itemProps1.xml><?xml version="1.0" encoding="utf-8"?>
+<ds:datastoreItem xmlns:ds="http://schemas.openxmlformats.org/officeDocument/2006/customXml" ds:itemID="{A1770BF7-49D5-46D6-8B76-1D8AF290B450}">
+  <ds:schemaRefs>
+    <ds:schemaRef ds:uri="http://schemas.microsoft.com/sharepoint/v3/contenttype/forms"/>
+  </ds:schemaRefs>
+</ds:datastoreItem>
+</file>
+
+<file path=customXml/itemProps2.xml><?xml version="1.0" encoding="utf-8"?>
 <ds:datastoreItem xmlns:ds="http://schemas.openxmlformats.org/officeDocument/2006/customXml" ds:itemID="{FE6BB287-9CB7-4AA6-A5A5-8D1CE03643F3}">
   <ds:schemaRefs>
     <ds:schemaRef ds:uri="http://schemas.microsoft.com/office/2006/metadata/contentType"/>
@@ -38989,14 +43266,6 @@
     <ds:schemaRef ds:uri="http://purl.org/dc/elements/1.1/"/>
     <ds:schemaRef ds:uri="http://purl.org/dc/terms/"/>
     <ds:schemaRef ds:uri="http://schemas.microsoft.com/office/internal/2005/internalDocumentation"/>
-  </ds:schemaRefs>
-</ds:datastoreItem>
-</file>
-
-<file path=customXml/itemProps2.xml><?xml version="1.0" encoding="utf-8"?>
-<ds:datastoreItem xmlns:ds="http://schemas.openxmlformats.org/officeDocument/2006/customXml" ds:itemID="{A1770BF7-49D5-46D6-8B76-1D8AF290B450}">
-  <ds:schemaRefs>
-    <ds:schemaRef ds:uri="http://schemas.microsoft.com/sharepoint/v3/contenttype/forms"/>
   </ds:schemaRefs>
 </ds:datastoreItem>
 </file>

--- a/source/_assets/Blog動畫.pptx
+++ b/source/_assets/Blog動畫.pptx
@@ -255,7 +255,7 @@
             <a:fld id="{3CDD3A71-4C75-488C-A8F3-A1F163ED0DB9}" type="datetimeFigureOut">
               <a:rPr lang="en-US" smtClean="0"/>
               <a:pPr/>
-              <a:t>8/1/2019</a:t>
+              <a:t>8/5/2019</a:t>
             </a:fld>
             <a:endParaRPr lang="en-US" dirty="0"/>
           </a:p>
@@ -423,7 +423,7 @@
             <a:fld id="{523CC419-8FB3-4D1C-8127-E63C1A13459D}" type="datetimeFigureOut">
               <a:rPr lang="en-US" smtClean="0"/>
               <a:pPr/>
-              <a:t>8/1/2019</a:t>
+              <a:t>8/5/2019</a:t>
             </a:fld>
             <a:endParaRPr lang="en-US" dirty="0"/>
           </a:p>
@@ -825,7 +825,7 @@
           <a:p>
             <a:fld id="{237FF733-248C-4CF7-A090-89CF012E357B}" type="datetimeFigureOut">
               <a:rPr lang="zh-TW" altLang="en-US" smtClean="0"/>
-              <a:t>2019/8/1</a:t>
+              <a:t>2019/8/5</a:t>
             </a:fld>
             <a:endParaRPr lang="zh-TW" altLang="en-US"/>
           </a:p>
@@ -996,7 +996,7 @@
           <a:p>
             <a:fld id="{237FF733-248C-4CF7-A090-89CF012E357B}" type="datetimeFigureOut">
               <a:rPr lang="zh-TW" altLang="en-US" smtClean="0"/>
-              <a:t>2019/8/1</a:t>
+              <a:t>2019/8/5</a:t>
             </a:fld>
             <a:endParaRPr lang="zh-TW" altLang="en-US"/>
           </a:p>
@@ -1177,7 +1177,7 @@
           <a:p>
             <a:fld id="{237FF733-248C-4CF7-A090-89CF012E357B}" type="datetimeFigureOut">
               <a:rPr lang="zh-TW" altLang="en-US" smtClean="0"/>
-              <a:t>2019/8/1</a:t>
+              <a:t>2019/8/5</a:t>
             </a:fld>
             <a:endParaRPr lang="zh-TW" altLang="en-US"/>
           </a:p>
@@ -1348,7 +1348,7 @@
           <a:p>
             <a:fld id="{237FF733-248C-4CF7-A090-89CF012E357B}" type="datetimeFigureOut">
               <a:rPr lang="zh-TW" altLang="en-US" smtClean="0"/>
-              <a:t>2019/8/1</a:t>
+              <a:t>2019/8/5</a:t>
             </a:fld>
             <a:endParaRPr lang="zh-TW" altLang="en-US"/>
           </a:p>
@@ -1595,7 +1595,7 @@
           <a:p>
             <a:fld id="{237FF733-248C-4CF7-A090-89CF012E357B}" type="datetimeFigureOut">
               <a:rPr lang="zh-TW" altLang="en-US" smtClean="0"/>
-              <a:t>2019/8/1</a:t>
+              <a:t>2019/8/5</a:t>
             </a:fld>
             <a:endParaRPr lang="zh-TW" altLang="en-US"/>
           </a:p>
@@ -1828,7 +1828,7 @@
           <a:p>
             <a:fld id="{237FF733-248C-4CF7-A090-89CF012E357B}" type="datetimeFigureOut">
               <a:rPr lang="zh-TW" altLang="en-US" smtClean="0"/>
-              <a:t>2019/8/1</a:t>
+              <a:t>2019/8/5</a:t>
             </a:fld>
             <a:endParaRPr lang="zh-TW" altLang="en-US"/>
           </a:p>
@@ -2196,7 +2196,7 @@
           <a:p>
             <a:fld id="{237FF733-248C-4CF7-A090-89CF012E357B}" type="datetimeFigureOut">
               <a:rPr lang="zh-TW" altLang="en-US" smtClean="0"/>
-              <a:t>2019/8/1</a:t>
+              <a:t>2019/8/5</a:t>
             </a:fld>
             <a:endParaRPr lang="zh-TW" altLang="en-US"/>
           </a:p>
@@ -2315,7 +2315,7 @@
           <a:p>
             <a:fld id="{237FF733-248C-4CF7-A090-89CF012E357B}" type="datetimeFigureOut">
               <a:rPr lang="zh-TW" altLang="en-US" smtClean="0"/>
-              <a:t>2019/8/1</a:t>
+              <a:t>2019/8/5</a:t>
             </a:fld>
             <a:endParaRPr lang="zh-TW" altLang="en-US"/>
           </a:p>
@@ -2411,7 +2411,7 @@
           <a:p>
             <a:fld id="{237FF733-248C-4CF7-A090-89CF012E357B}" type="datetimeFigureOut">
               <a:rPr lang="zh-TW" altLang="en-US" smtClean="0"/>
-              <a:t>2019/8/1</a:t>
+              <a:t>2019/8/5</a:t>
             </a:fld>
             <a:endParaRPr lang="zh-TW" altLang="en-US"/>
           </a:p>
@@ -2689,7 +2689,7 @@
           <a:p>
             <a:fld id="{237FF733-248C-4CF7-A090-89CF012E357B}" type="datetimeFigureOut">
               <a:rPr lang="zh-TW" altLang="en-US" smtClean="0"/>
-              <a:t>2019/8/1</a:t>
+              <a:t>2019/8/5</a:t>
             </a:fld>
             <a:endParaRPr lang="zh-TW" altLang="en-US"/>
           </a:p>
@@ -2947,7 +2947,7 @@
           <a:p>
             <a:fld id="{237FF733-248C-4CF7-A090-89CF012E357B}" type="datetimeFigureOut">
               <a:rPr lang="zh-TW" altLang="en-US" smtClean="0"/>
-              <a:t>2019/8/1</a:t>
+              <a:t>2019/8/5</a:t>
             </a:fld>
             <a:endParaRPr lang="zh-TW" altLang="en-US"/>
           </a:p>
@@ -3161,7 +3161,7 @@
           <a:p>
             <a:fld id="{237FF733-248C-4CF7-A090-89CF012E357B}" type="datetimeFigureOut">
               <a:rPr lang="zh-TW" altLang="en-US" smtClean="0"/>
-              <a:t>2019/8/1</a:t>
+              <a:t>2019/8/5</a:t>
             </a:fld>
             <a:endParaRPr lang="zh-TW" altLang="en-US"/>
           </a:p>
@@ -31333,9 +31333,7 @@
           </a:prstGeom>
           <a:noFill/>
           <a:ln w="38100">
-            <a:solidFill>
-              <a:srgbClr val="FF0000"/>
-            </a:solidFill>
+            <a:noFill/>
             <a:prstDash val="lgDash"/>
           </a:ln>
         </p:spPr>
@@ -33417,10 +33415,10 @@
         </p:nvGrpSpPr>
         <p:grpSpPr>
           <a:xfrm>
-            <a:off x="6937144" y="3152591"/>
-            <a:ext cx="1916909" cy="999345"/>
-            <a:chOff x="7195660" y="3659186"/>
-            <a:chExt cx="1916909" cy="999345"/>
+            <a:off x="6877077" y="3275907"/>
+            <a:ext cx="1921142" cy="991807"/>
+            <a:chOff x="7195660" y="3666724"/>
+            <a:chExt cx="1921142" cy="991807"/>
           </a:xfrm>
         </p:grpSpPr>
         <p:grpSp>
@@ -33634,8 +33632,8 @@
           </p:nvSpPr>
           <p:spPr>
             <a:xfrm>
-              <a:off x="7742387" y="3659186"/>
-              <a:ext cx="877163" cy="369332"/>
+              <a:off x="7430956" y="3666724"/>
+              <a:ext cx="1685846" cy="369332"/>
             </a:xfrm>
             <a:prstGeom prst="rect">
               <a:avLst/>
@@ -33650,7 +33648,15 @@
             <a:p>
               <a:r>
                 <a:rPr lang="en-US" altLang="zh-TW" b="1" dirty="0"/>
-                <a:t>4. Push</a:t>
+                <a:t>4. Retag &amp;</a:t>
+              </a:r>
+              <a:r>
+                <a:rPr lang="zh-TW" altLang="en-US" b="1" dirty="0"/>
+                <a:t> </a:t>
+              </a:r>
+              <a:r>
+                <a:rPr lang="en-US" altLang="zh-TW" b="1" dirty="0"/>
+                <a:t>Push</a:t>
               </a:r>
               <a:endParaRPr lang="zh-TW" altLang="en-US" b="1" dirty="0"/>
             </a:p>
@@ -33671,10 +33677,10 @@
         </p:nvGrpSpPr>
         <p:grpSpPr>
           <a:xfrm>
-            <a:off x="6814407" y="5532910"/>
-            <a:ext cx="1906688" cy="674109"/>
-            <a:chOff x="6814407" y="5532910"/>
-            <a:chExt cx="1906688" cy="674109"/>
+            <a:off x="6814407" y="5552743"/>
+            <a:ext cx="1946169" cy="654276"/>
+            <a:chOff x="6814407" y="5552743"/>
+            <a:chExt cx="1946169" cy="654276"/>
           </a:xfrm>
         </p:grpSpPr>
         <p:grpSp>
@@ -33800,8 +33806,8 @@
           </p:nvSpPr>
           <p:spPr>
             <a:xfrm>
-              <a:off x="7361055" y="5532910"/>
-              <a:ext cx="877163" cy="369332"/>
+              <a:off x="7074730" y="5552743"/>
+              <a:ext cx="1685846" cy="369332"/>
             </a:xfrm>
             <a:prstGeom prst="rect">
               <a:avLst/>
@@ -33816,7 +33822,15 @@
             <a:p>
               <a:r>
                 <a:rPr lang="en-US" altLang="zh-TW" b="1" dirty="0"/>
-                <a:t>6. Push</a:t>
+                <a:t>6. Retag &amp;</a:t>
+              </a:r>
+              <a:r>
+                <a:rPr lang="zh-TW" altLang="en-US" b="1" dirty="0"/>
+                <a:t> </a:t>
+              </a:r>
+              <a:r>
+                <a:rPr lang="en-US" altLang="zh-TW" b="1" dirty="0"/>
+                <a:t>Push</a:t>
               </a:r>
               <a:endParaRPr lang="zh-TW" altLang="en-US" b="1" dirty="0"/>
             </a:p>
@@ -34781,7 +34795,7 @@
           <p:spPr>
             <a:xfrm>
               <a:off x="7036981" y="875499"/>
-              <a:ext cx="1583254" cy="369332"/>
+              <a:ext cx="774571" cy="369332"/>
             </a:xfrm>
             <a:prstGeom prst="rect">
               <a:avLst/>
@@ -34796,7 +34810,7 @@
             <a:p>
               <a:r>
                 <a:rPr lang="en-US" altLang="zh-TW" b="1" dirty="0"/>
-                <a:t>3. Pull &amp; Retag</a:t>
+                <a:t>3. Pull</a:t>
               </a:r>
               <a:endParaRPr lang="zh-TW" altLang="en-US" b="1" dirty="0"/>
             </a:p>
@@ -43184,15 +43198,6 @@
 </file>
 
 <file path=customXml/item1.xml><?xml version="1.0" encoding="utf-8"?>
-<?mso-contentType ?>
-<FormTemplates xmlns="http://schemas.microsoft.com/sharepoint/v3/contenttype/forms">
-  <Display>DocumentLibraryForm</Display>
-  <Edit>DocumentLibraryForm</Edit>
-  <New>DocumentLibraryForm</New>
-</FormTemplates>
-</file>
-
-<file path=customXml/item2.xml><?xml version="1.0" encoding="utf-8"?>
 <ct:contentTypeSchema xmlns:ct="http://schemas.microsoft.com/office/2006/metadata/contentType" xmlns:ma="http://schemas.microsoft.com/office/2006/metadata/properties/metaAttributes" ct:_="" ma:_="" ma:contentTypeName="Document" ma:contentTypeID="0x0101000AA0115B54226D469CC0FAAE38E5F61C" ma:contentTypeVersion="3" ma:contentTypeDescription="Create a new document." ma:contentTypeScope="" ma:versionID="0ae424bb0065d3a2a055b165aca25ec5">
   <xsd:schema xmlns:xsd="http://www.w3.org/2001/XMLSchema" xmlns:p="http://schemas.microsoft.com/office/2006/metadata/properties" targetNamespace="http://schemas.microsoft.com/office/2006/metadata/properties" ma:root="true" ma:fieldsID="4aeb20c0e3442673af7ee10786458764">
     <xsd:element name="properties">
@@ -43241,6 +43246,15 @@
 </ct:contentTypeSchema>
 </file>
 
+<file path=customXml/item2.xml><?xml version="1.0" encoding="utf-8"?>
+<?mso-contentType ?>
+<FormTemplates xmlns="http://schemas.microsoft.com/sharepoint/v3/contenttype/forms">
+  <Display>DocumentLibraryForm</Display>
+  <Edit>DocumentLibraryForm</Edit>
+  <New>DocumentLibraryForm</New>
+</FormTemplates>
+</file>
+
 <file path=customXml/item3.xml><?xml version="1.0" encoding="utf-8"?>
 <p:properties xmlns:p="http://schemas.microsoft.com/office/2006/metadata/properties" xmlns:xsi="http://www.w3.org/2001/XMLSchema-instance">
   <documentManagement/>
@@ -43248,14 +43262,6 @@
 </file>
 
 <file path=customXml/itemProps1.xml><?xml version="1.0" encoding="utf-8"?>
-<ds:datastoreItem xmlns:ds="http://schemas.openxmlformats.org/officeDocument/2006/customXml" ds:itemID="{A1770BF7-49D5-46D6-8B76-1D8AF290B450}">
-  <ds:schemaRefs>
-    <ds:schemaRef ds:uri="http://schemas.microsoft.com/sharepoint/v3/contenttype/forms"/>
-  </ds:schemaRefs>
-</ds:datastoreItem>
-</file>
-
-<file path=customXml/itemProps2.xml><?xml version="1.0" encoding="utf-8"?>
 <ds:datastoreItem xmlns:ds="http://schemas.openxmlformats.org/officeDocument/2006/customXml" ds:itemID="{FE6BB287-9CB7-4AA6-A5A5-8D1CE03643F3}">
   <ds:schemaRefs>
     <ds:schemaRef ds:uri="http://schemas.microsoft.com/office/2006/metadata/contentType"/>
@@ -43266,6 +43272,14 @@
     <ds:schemaRef ds:uri="http://purl.org/dc/elements/1.1/"/>
     <ds:schemaRef ds:uri="http://purl.org/dc/terms/"/>
     <ds:schemaRef ds:uri="http://schemas.microsoft.com/office/internal/2005/internalDocumentation"/>
+  </ds:schemaRefs>
+</ds:datastoreItem>
+</file>
+
+<file path=customXml/itemProps2.xml><?xml version="1.0" encoding="utf-8"?>
+<ds:datastoreItem xmlns:ds="http://schemas.openxmlformats.org/officeDocument/2006/customXml" ds:itemID="{A1770BF7-49D5-46D6-8B76-1D8AF290B450}">
+  <ds:schemaRefs>
+    <ds:schemaRef ds:uri="http://schemas.microsoft.com/sharepoint/v3/contenttype/forms"/>
   </ds:schemaRefs>
 </ds:datastoreItem>
 </file>
